--- a/Finished Presentations/crm-three-scenarios.pptx
+++ b/Finished Presentations/crm-three-scenarios.pptx
@@ -5,7 +5,7 @@
     <p:sldMasterId id="2147483648" r:id="rId1"/>
   </p:sldMasterIdLst>
   <p:notesMasterIdLst>
-    <p:notesMasterId r:id="rId77"/>
+    <p:notesMasterId r:id="rId92"/>
   </p:notesMasterIdLst>
   <p:sldIdLst>
     <p:sldId id="256" r:id="rId2"/>
@@ -83,6 +83,21 @@
     <p:sldId id="328" r:id="rId74"/>
     <p:sldId id="329" r:id="rId75"/>
     <p:sldId id="330" r:id="rId76"/>
+    <p:sldId id="331" r:id="rId77"/>
+    <p:sldId id="332" r:id="rId78"/>
+    <p:sldId id="333" r:id="rId79"/>
+    <p:sldId id="334" r:id="rId80"/>
+    <p:sldId id="335" r:id="rId81"/>
+    <p:sldId id="336" r:id="rId82"/>
+    <p:sldId id="337" r:id="rId83"/>
+    <p:sldId id="338" r:id="rId84"/>
+    <p:sldId id="339" r:id="rId85"/>
+    <p:sldId id="340" r:id="rId86"/>
+    <p:sldId id="341" r:id="rId87"/>
+    <p:sldId id="342" r:id="rId88"/>
+    <p:sldId id="343" r:id="rId89"/>
+    <p:sldId id="344" r:id="rId90"/>
+    <p:sldId id="345" r:id="rId91"/>
   </p:sldIdLst>
   <p:sldSz cx="9144000" cy="5143500" type="screen16x9"/>
   <p:notesSz cx="6858000" cy="9144000"/>
@@ -10285,174 +10300,170 @@
               <a:buNone/>
             </a:pPr>
             <a:r>
-              <a:rPr b="1"/>
-              <a:t>C055</a:t>
-            </a:r>
-            <a:r>
-              <a:rPr/>
-              <a:t> caveat · Duplicate detection is exact-match on normalised name / domain / email (lowercase, whitespace collapsed) and duplicate_ids under-count for clusters larger than 10; the 226 / 281 clusters are a floor, not a count. caveat → Reword: ‘Duplicate detection is exact-match on lowercased, whitespace-collapsed name/domain (companies) or email/full name (contacts), so fuzzy duplicates are missed and the scan stops at 10,000 records: the real duplicate volume is at least what is shown. Separately, the exported duplicate_ids list is truncated to 10 members per cluster (README line 75), so the ID list, not the cluster count, under-counts large clusters.’ source: README.md · locator: line 74 · as-of: 2026-10-01 · tag: repo-hs-logic</a:t>
-            </a:r>
-          </a:p>
-          <a:p>
-            <a:pPr lvl="0" indent="0" marL="0">
-              <a:buNone/>
-            </a:pPr>
-          </a:p>
-          <a:p>
-            <a:pPr lvl="0" indent="0" marL="0">
-              <a:buNone/>
-            </a:pPr>
-            <a:r>
-              <a:rPr b="1"/>
-              <a:t>C056</a:t>
-            </a:r>
-            <a:r>
-              <a:rPr/>
-              <a:t> caveat · Both scans stop at CAP = 10000 and flag ‘cap reached — results partial’; against live totals the company scan covered 10,000 of 13,679 (73.1%) and the contact scan 10,000 of 26,293 (38.0%), paged in default list order (not random). caveat → Use ‘contact scan 10,000 of ~26.3k (38.0%; live total 26,294 on 2026-10-01, totals drift daily)’ and note that the denominators are live 2026-10-01 counts while the scans date from 2026-09. source: hubspot.py · locator: lines 320, 465, 536, 698 · as-of: 2026-10-01 · tag: repo-hs-logic</a:t>
-            </a:r>
-          </a:p>
-          <a:p>
-            <a:pPr lvl="0" indent="0" marL="0">
-              <a:buNone/>
-            </a:pPr>
-          </a:p>
-          <a:p>
-            <a:pPr lvl="0" indent="0" marL="0">
-              <a:buNone/>
-            </a:pPr>
-            <a:r>
-              <a:rPr b="1"/>
-              <a:t>C062</a:t>
-            </a:r>
-            <a:r>
-              <a:rPr/>
-              <a:t> caveat · SEALSQ property set captured 2026-09-14 by direct HubSpot MCP calls; scope SealSQ Hardware, SealSQ Services, Icalps_hardware, SEALCOIN = 1,820 of 1,960 deals; 498 deal / 30 contact / 30 company / 14 ticket properties. caveat → Cite sealsq_property_set.json (meta.sealsq_scope: deals_in_scope 1,820 of deals_total 1,960; 7 pipelines: 728 HW + 303 Services + 788 Icalps_hardware + 1 SEALCOIN in scope, 140 Wisekey Services + PKI out of scope, Wise.Sat and Quantum &amp; AI 0) and its 498 deal / 30 contact / 30 company / 14 ticket property arrays, alongside line 3 of the md. source: SEALSQ_Property_Resource.md · locator: line 3 · as-of: 2026-10-01 · tag: sealsq-property-set-2026-09-14</a:t>
-            </a:r>
-          </a:p>
-          <a:p>
-            <a:pPr lvl="0" indent="0" marL="0">
-              <a:buNone/>
-            </a:pPr>
-          </a:p>
-          <a:p>
-            <a:pPr lvl="0" indent="0" marL="0">
-              <a:buNone/>
-            </a:pPr>
-            <a:r>
-              <a:rPr b="1"/>
-              <a:t>C079</a:t>
-            </a:r>
-            <a:r>
-              <a:rPr/>
-              <a:t> caveat · 822 deals have no product assigned (largest ‘product’ bucket); Breeze free-text matching on deal names under-counts (2 vs 32 for ‘QVault TPM IOT’). caveat → 822 of 1,960 deals (42%, whole portal, open and closed, capture 2026-09-14) have no prod___product_name_new_; Breeze free-text on the deal name returned 2 vs 32 by property filter for QVault TPM IOT. source: Prompt_Resource.md · locator: lines 9-12, 79 · as-of: 2026-10-01 · tag: sealsq-property-set-2026-09-14</a:t>
-            </a:r>
-          </a:p>
-          <a:p>
-            <a:pPr lvl="0" indent="0" marL="0">
-              <a:buNone/>
-            </a:pPr>
-          </a:p>
-          <a:p>
-            <a:pPr lvl="0" indent="0" marL="0">
-              <a:buNone/>
-            </a:pPr>
-            <a:r>
-              <a:rPr b="1"/>
-              <a:t>C087</a:t>
-            </a:r>
-            <a:r>
-              <a:rPr/>
-              <a:t> caveat · The Data-Toolkit encodes the S1 sampling-probe practice: 14 HubSQL rules (one object per query, no JOIN, max 2 associated objects), a 10,000-result ceiling on the CRM Search API, and a prompt template forbidding dealname matching. caveat → HubSQL practice: 14 cheat-sheet rules (one object per query, no JOIN/UNION/subqueries, max 2 associated object types); dealname matching is a flagged last resort, never for product counts. Separately, the CRM Search API (used by Hs-Logic and the hermes agent) stops at 10,000 results per query. source: Prompt_Resource.md · locator: lines 175-190, 215-225 · as-of: 2026-10-01 · tag: sealsq-property-set-2026-09-14</a:t>
-            </a:r>
-          </a:p>
-          <a:p>
-            <a:pPr lvl="0" indent="0" marL="0">
-              <a:buNone/>
-            </a:pPr>
-          </a:p>
-          <a:p>
-            <a:pPr lvl="0" indent="0" marL="0">
-              <a:buNone/>
-            </a:pPr>
-            <a:r>
-              <a:rPr b="1"/>
-              <a:t>C089</a:t>
-            </a:r>
-            <a:r>
-              <a:rPr/>
-              <a:t> caveat · Object volumes at the 2026-09-14 capture: 25,782 contacts (SEALSQ flag set on 176 = 0.68%), 13,422 companies, 1,960 deals. caveat → Add locator: HubSpot-Ruler/SEALSQ/sealsq_property_set.json meta.captured=‘2026-09-14’, meta.sealsq_scope.deals_total=1960 (per pipeline: SealSQ HW 728, Services 303, Icalps 788, SEALCOIN 1, Wisekey Services+PKI 140, Wise.Sat 0, Quantum &amp; AI 0). State that 25,782 / 13,422 are the denominators used in the property utilisation columns. source: SEALSQ_Property_Resource.md · locator: lines 238, 273 · as-of: 2026-10-01 · tag: sealsq-property-set-2026-09-14</a:t>
-            </a:r>
-          </a:p>
-          <a:p>
-            <a:pPr lvl="0" indent="0" marL="0">
-              <a:buNone/>
-            </a:pPr>
-          </a:p>
-          <a:p>
-            <a:pPr lvl="0" indent="0" marL="0">
-              <a:buNone/>
-            </a:pPr>
-            <a:r>
-              <a:rPr b="1"/>
-              <a:t>C091</a:t>
-            </a:r>
-            <a:r>
-              <a:rPr/>
-              <a:t> confirmed · Total deals in the portal: 1,972 (live, 2026-10-01). source: live-hubsql-2026-10-01 · locator: SELECT COUNT(*) FROM DEAL · as-of: 2026-10-01 · tag: live-hubsql-2026-10-01</a:t>
-            </a:r>
-          </a:p>
-          <a:p>
-            <a:pPr lvl="0" indent="0" marL="0">
-              <a:buNone/>
-            </a:pPr>
-          </a:p>
-          <a:p>
-            <a:pPr lvl="0" indent="0" marL="0">
-              <a:buNone/>
-            </a:pPr>
-            <a:r>
-              <a:rPr b="1"/>
-              <a:t>C103</a:t>
-            </a:r>
-            <a:r>
-              <a:rPr/>
-              <a:t> confirmed · The year fields are non-null on virtually every deal because they are calculated fields evaluating to 0 (pipeline_2029__k__ 1,972; calculation___pipeline_2025__k__ 1,972; calculation___cumulative_pipeline_2026 1,964; calculation___pipeline_2026__k__ 1,972), so IS NOT NULL cannot measure fill. source: live-hubsql-2026-10-01 · locator: SELECT COUNT(*) FROM DEAL WHERE pipeline_2029__k__ IS NOT NULL · as-of: 2026-10-01 · tag: live-hubsql-2026-10-01</a:t>
-            </a:r>
-          </a:p>
-          <a:p>
-            <a:pPr lvl="0" indent="0" marL="0">
-              <a:buNone/>
-            </a:pPr>
-          </a:p>
-          <a:p>
-            <a:pPr lvl="0" indent="0" marL="0">
-              <a:buNone/>
-            </a:pPr>
-            <a:r>
-              <a:rPr b="1"/>
-              <a:t>C108</a:t>
-            </a:r>
-            <a:r>
-              <a:rPr/>
-              <a:t> confirmed · Sum of year fields over ALL deals (k$, live): Pipeline 2029 79,646.67; Pipeline 2025 78,512.3; ‘Cumulative Pipeline 2027’ [calculation___cumulative_pipeline_2026] 434,772.8; Pipeline 2026 103,895.2. source: live-hubsql-2026-10-01 · locator: SELECT SUM(pipeline_2029__k__), SUM(calculation___pipeline_2025__k__), SUM(calculation___cumulative_pipeline_2026), SUM(calculation___pipeline_2026__k__) FROM DEAL · as-of: 2026-10-01 · tag: live-hubsql-2026-10-01</a:t>
-            </a:r>
-          </a:p>
-          <a:p>
-            <a:pPr lvl="0" indent="0" marL="0">
-              <a:buNone/>
-            </a:pPr>
-          </a:p>
-          <a:p>
-            <a:pPr lvl="0" indent="0" marL="0">
-              <a:buNone/>
-            </a:pPr>
-            <a:r>
-              <a:rPr b="1"/>
-              <a:t>C116</a:t>
-            </a:r>
-            <a:r>
-              <a:rPr/>
-              <a:t> caveat · The HubSpot SQL probe has traps: COUNT(hs_object_id) is executed as a SUM of record IDs (18944500703385 for SealSQ Hardware vs 730 with COUNT(*)), and association filters are silently dropped in GROUP BY and some single-filter queries; only COUNT(*) results are used as facts. caveat → Reword: ‘association filters are silently dropped when combined with GROUP BY (verified 2026-10-01: grouped counts sum to the full 1,972); the plain single-filter COUNT(*) honoured the filter (160) in the verification run.’ source: live-hubsql-2026-10-01 · locator: SELECT pipeline, COUNT(hs_object_id) FROM DEAL GROUP BY pipeline · as-of: 2026-10-01 · tag: live-hubsql-2026-10-01</a:t>
+              <a:rPr/>
+              <a:t>Sequel slides added 2026-10-12 from the remediation-plan tracker (projects/crm-three-scenarios/sources/tracker2026-10-13_remediation-plan.csv, tag tracker-remediation-2026-10-13); verified second pass of 2026-10-12 (metagraph.json meta.verification.second_pass: claims C158–C171, 13 caveated, 1 confirmed, 0 refuted; side findings C172–C187 filed). The tracker is the user’s plan: admissible as what is planned, never as a measurement. Chunking: the user’s two lines ‘foundation : L1+L2’ / ‘E2:E4 : L3’ (brief.md section 5), read by this deck as Foundation engine of the 21/09/26 roadmap ↔ layers L1 + L2 and engines E2–E4 ↔ layer L3; the plan’s own Foundation phase (lines 2–6) is not named in the rule and is shown beside L1 as a reading. No deviation from the planned view V23: every planned claim is shown.</a:t>
+            </a:r>
+          </a:p>
+          <a:p>
+            <a:pPr lvl="0" indent="0" marL="0">
+              <a:buNone/>
+            </a:pPr>
+          </a:p>
+          <a:p>
+            <a:pPr lvl="0" indent="0" marL="0">
+              <a:buNone/>
+            </a:pPr>
+            <a:r>
+              <a:rPr b="1"/>
+              <a:t>C053</a:t>
+            </a:r>
+            <a:r>
+              <a:rPr/>
+              <a:t> caveat · CRM Health (Hs-Logic, 10,000 companies scanned, cap reached): 1,034 deals with final_customer; 709 edge-companies excluded; 9,150 orphan companies; 226 duplicate clusters. Example orphans: World Micro, Domainregistrationcorp, Revilian, eidoo.io, indiabusinessconsulting.in. caveat → State: ‘Across the first 10,000 of ~13.7k companies, 9,150 had zero deal associations, were not tied to any final_customer deal and bore no final_customer name (orphans); 226 exact-match duplicate clusters. 1,034 deals portal-wide carry a final_customer string (vs 931 in the SEALSQ 1,820-deal subset); 709 companies linked to those deals were excluded from the orphan test.’ source: projects/crm-three-scenarios/sources/hs-logic-crm-health-2026-09.png · locator: banner + stat cards · as-of: 2026-10-01 · tag: hs-logic-screenshot-2026-09</a:t>
+            </a:r>
+          </a:p>
+          <a:p>
+            <a:pPr lvl="0" indent="0" marL="0">
+              <a:buNone/>
+            </a:pPr>
+          </a:p>
+          <a:p>
+            <a:pPr lvl="0" indent="0" marL="0">
+              <a:buNone/>
+            </a:pPr>
+            <a:r>
+              <a:rPr b="1"/>
+              <a:t>C111</a:t>
+            </a:r>
+            <a:r>
+              <a:rPr/>
+              <a:t> caveat · Contacts with no company association: 6,570 of 26,293 (25.0%); 19,723 associated (live, uncapped). caveat → Contacts with no company association: 6,570 of 26,293 (25.0%) at the 2026-10-01 snapshot; 19,723 associated. Absolute counts drift by a few per day as contacts are created. source: live-hubsql-2026-10-01 · locator: SELECT COUNT(*) FROM CONTACT WHERE hs_object_id IS NOT NULL AND associations.COMPANY IS NULL · as-of: 2026-10-01 · tag: live-hubsql-2026-10-01</a:t>
+            </a:r>
+          </a:p>
+          <a:p>
+            <a:pPr lvl="0" indent="0" marL="0">
+              <a:buNone/>
+            </a:pPr>
+          </a:p>
+          <a:p>
+            <a:pPr lvl="0" indent="0" marL="0">
+              <a:buNone/>
+            </a:pPr>
+            <a:r>
+              <a:rPr b="1"/>
+              <a:t>C158</a:t>
+            </a:r>
+            <a:r>
+              <a:rPr/>
+              <a:t> caveat · Remediation plan tracker dated 13-Oct-26: 22 tasks in four phases (Foundation 5, L1 5, L2 8, L3 4), engine ‘Remediation’ on every row, status pending, progress 0%, owner and priority empty on every row. caveat → Slide wording: ‘Tracker export dated 13-Oct-26 (plan start date; one day after this deck’s date): 22 tasks, all pending, 0% progress, no owner, no priority — the plan as written before its start, not a measurement of progress.’ source: projects/crm-three-scenarios/sources/tracker2026-10-13_remediation-plan.csv · locator: lines 2-23 (PHASE, ENGINE, OWNER, PROGRESS, Status columns) · as-of: 2026-10-12 · tag: tracker-remediation-2026-10-13</a:t>
+            </a:r>
+          </a:p>
+          <a:p>
+            <a:pPr lvl="0" indent="0" marL="0">
+              <a:buNone/>
+            </a:pPr>
+          </a:p>
+          <a:p>
+            <a:pPr lvl="0" indent="0" marL="0">
+              <a:buNone/>
+            </a:pPr>
+            <a:r>
+              <a:rPr b="1"/>
+              <a:t>C159</a:t>
+            </a:r>
+            <a:r>
+              <a:rPr/>
+              <a:t> caveat · Foundation (5 rows) and L1 (5 rows) start 13-Oct-26 with no end date or duration; L2 (8 rows) runs 16-Nov-26 to 30-Nov-26, 11 days, every row Critical = yes; L3 (4 rows) runs 01-Dec-26 to 20-Dec-26, 14 days, every row Critical = yes. caveat → Slide wording: ‘L2 16-30 Nov-26, estimated duration 11 (tracker column; equals the weekday count of the span, which is 15 calendar days); L3 1-20 Dec-26, estimated duration 14 (weekday count; 20 calendar days). Foundation and L1: start 13-Oct-26, no duration, no end date.’ caveat → Show as: ‘L2 16-30 Nov 2026 (tracker estimate 11 working days; 15 calendar days), L3 1-20 Dec 2026 (tracker estimate 14 working days; 20 calendar days, END falls on a Sunday)’. Label 11 and 14 as the plan’s ESTIMATED DURATION column. source: projects/crm-three-scenarios/sources/tracker2026-10-13_remediation-plan.csv · locator: lines 2-11 (START 13-Oct-26, END empty); lines 12-19 (16-Nov-26,11,30-Nov-26,…,yes); lines 20-23 (01-Dec-26,14,20-Dec-26,…,yes) · as-of: 2026-10-12 · tag: tracker-remediation-2026-10-13</a:t>
+            </a:r>
+          </a:p>
+          <a:p>
+            <a:pPr lvl="0" indent="0" marL="0">
+              <a:buNone/>
+            </a:pPr>
+          </a:p>
+          <a:p>
+            <a:pPr lvl="0" indent="0" marL="0">
+              <a:buNone/>
+            </a:pPr>
+            <a:r>
+              <a:rPr b="1"/>
+              <a:t>C160</a:t>
+            </a:r>
+            <a:r>
+              <a:rPr/>
+              <a:t> caveat · Foundation phase, five [Data] tasks: score each object in the CRM against defined criteria (goal ‘Realistic assessment of stale records in the CRM’); define each bucket by its total ratio in the pipeline; write the script to archive stale records (SEALSQ only); prevent the entry of non-relevant records; document the set of properties: SEALSQ, IC’Alps, Connex. caveat → Slide wording: ‘Plan phase “Foundation” (5 rows, CSV lines 2-6) — a phase label of the plan, distinct from the 21/09/26 roadmap’s Foundation engine; not named in the user’s chunking rule, shown beside L1 + L2 under the Foundation engine as a reading, not as the user’s instruction.’ Also keep line 3 wording as ‘Define each bucket in the CRM based on their total ratio in the pipeline’. caveat → Keep the five rows but tag them ‘Foundation phase of the plan (not a layer); shown with L1 by the orchestrator’s reading of the chunking rule, which names only L1, L2, L3’. State that only one of the five rows carries a Goal. source: projects/crm-three-scenarios/sources/tracker2026-10-13_remediation-plan.csv · locator: lines 2-6 · as-of: 2026-10-12 · tag: tracker-remediation-2026-10-13</a:t>
+            </a:r>
+          </a:p>
+          <a:p>
+            <a:pPr lvl="0" indent="0" marL="0">
+              <a:buNone/>
+            </a:pPr>
+          </a:p>
+          <a:p>
+            <a:pPr lvl="0" indent="0" marL="0">
+              <a:buNone/>
+            </a:pPr>
+            <a:r>
+              <a:rPr b="1"/>
+              <a:t>C161</a:t>
+            </a:r>
+            <a:r>
+              <a:rPr/>
+              <a:t> confirmed · L1, five tasks: [Ops] ledger the previous pass for all records and properties; [Ops] archive the first pass of records; [Ops] survey the sales director and ensure best practices in the daily workflow; [Document] document the full property set and the boundaries between SEALSQ and IC’Alps; [Ops] remove all object auto-creation workflows. source: projects/crm-three-scenarios/sources/tracker2026-10-13_remediation-plan.csv · locator: lines 7-11 · as-of: 2026-10-12 · tag: tracker-remediation-2026-10-13</a:t>
+            </a:r>
+          </a:p>
+          <a:p>
+            <a:pPr lvl="0" indent="0" marL="0">
+              <a:buNone/>
+            </a:pPr>
+          </a:p>
+          <a:p>
+            <a:pPr lvl="0" indent="0" marL="0">
+              <a:buNone/>
+            </a:pPr>
+            <a:r>
+              <a:rPr b="1"/>
+              <a:t>C162</a:t>
+            </a:r>
+            <a:r>
+              <a:rPr/>
+              <a:t> caveat · L1 archive row as written: ‘Archive the first pass of records (full NQL, full Orphan companies ~33% of total CRM records). Delete 6,570 orphan contacts, 2,043 companies with neither deals nor contacts, 10,574 contacts-only auto-creations.’ Goal: ‘Low-risk purge of records strictly polluting the CRM.’ caveat → Slide wording: ‘Counts as written in the plan (the user’s wording, not a measurement). 6,570 coincides with the deck’s live count of contacts with no company on 2026-10-01 (C111; same-day re-run 6,571). 2,043, 10,574 and “~33% of total CRM records” have no admissible measurement behind them.’ caveat → Carry: ‘Counts as written in the plan (tracker-remediation-2026-10-13). 6,570 equals the deck’s 2026-10-01 count of contacts with no company association (C111); 2,043 and 10,574 were not measured by any source in this deck; the three sum to 19,187 = 45.7% of the 41,944 records measured on 2026-10-01 (a figure the row does not state); the row’s ~33% qualifies “full Orphan companies” and states no denominator (all companies are 32.6% of those records).’ source: projects/crm-three-scenarios/sources/tracker2026-10-13_remediation-plan.csv · locator: line 8 · as-of: 2026-10-12 · tag: tracker-remediation-2026-10-13</a:t>
+            </a:r>
+          </a:p>
+          <a:p>
+            <a:pPr lvl="0" indent="0" marL="0">
+              <a:buNone/>
+            </a:pPr>
+          </a:p>
+          <a:p>
+            <a:pPr lvl="0" indent="0" marL="0">
+              <a:buNone/>
+            </a:pPr>
+            <a:r>
+              <a:rPr b="1"/>
+              <a:t>C166</a:t>
+            </a:r>
+            <a:r>
+              <a:rPr/>
+              <a:t> caveat · The user’s chunking rule for the three appended slides: the Foundation engine of the 21/09/26 roadmap corresponds to layers L1 + L2 of the remediation plan; engines E2 to E4 correspond to layer L3. The engine ladder itself (Foundation -&gt; E2 rebuild a cleaner data structure -&gt; E3 leverage the data for GTM/RevOps -&gt; E4 self-autonomous AI-powered CRM) is the 21/09/26 tracker’s legend. caveat → Quote the rule as two lines attributed to the user (‘foundation : L1+L2’ / ‘E2:E4 : L3’, brief section 5) and label the engine-to-layer reading ‘orchestrator reading of the user’s rule’. Quote the legend verbatim: ‘E2 = After Foundation we start rebuilding a cleaner data structure’; ‘E3 = After the data we can now leverage the data for GTM and Reporting/RevOps’; ‘E4 = Self - autonomous AI powered CRM’. Add: ‘The five Foundation-phase rows of the plan (lines 2-6) are not named in the user’s rule.’ caveat → Show the mapping as ‘the user’s rule, read by the deck as: Foundation engine of the 21/09/26 roadmap &lt;-&gt; layers L1 + L2; engines E2-E4 &lt;-&gt; layer L3’ and state on the slide where the five rows of the CSV’s own Foundation phase (lines 2-6) are placed, since the rule names only L1, L2 and L3. source: projects/crm-three-scenarios/brief.md · locator: line 271 (section 5, user request verbatim) · as-of: 2026-10-12 · tag: brief-2026-10-12</a:t>
+            </a:r>
+          </a:p>
+          <a:p>
+            <a:pPr lvl="0" indent="0" marL="0">
+              <a:buNone/>
+            </a:pPr>
+          </a:p>
+          <a:p>
+            <a:pPr lvl="0" indent="0" marL="0">
+              <a:buNone/>
+            </a:pPr>
+            <a:r>
+              <a:rPr b="1"/>
+              <a:t>C169</a:t>
+            </a:r>
+            <a:r>
+              <a:rPr/>
+              <a:t> caveat · Of the three L1 purge counts, 6,570 ‘orphan contacts’ equals the deck’s live count of contacts with no company association on 2026-10-01 (C111: 6,570 of 26,293, 25.0%); 2,043 ‘companies with neither deals nor contacts’ and 10,574 ‘contacts-only auto-creations’ were measured neither by the live probe (which counted 12,574 companies without a deal, C112) nor by Hs-Logic (9,150 orphan companies in a capped 10,000 scan, C053). The three counts sum to 19,187, which is 45.7% of the 41,944 records measured on 2026-10-01 (13,679 companies + 26,293 contacts + 1,972 deals), not the ‘~33% of total CRM records’ the row states; the 33% is not recomputable from any admissible source. caveat → Slide wording: ‘The L1 purge row (line 8) lists 6,570 orphan contacts, 2,043 companies with neither deals nor contacts and 10,574 contacts-only auto-creations. 6,570 matches the deck’s live count of contacts with no company association on 2026-10-01 (C111, 25.0% of 26,293; same-day re-run 6,571); 2,043 and 10,574 are the plan’s own counts, measured by no admissible source. The row’s “~33% of total CRM records” is attached to “full Orphan companies” and is not recomputable from any admissible source; the three listed counts sum to 19,187, 45.7% of the 41,944 live records of 2026-10-01 (a figure the row does not state).’ caveat → Wording: ‘6,570 orphan contacts equals the deck’s live count of contacts with no company (C111, 2026-10-01 snapshot). 2,043 and 10,574 are the plan’s own counts, measured by no admissible source. The three counts sum to 19,187, 45.7% of the 41,944 records of 2026-10-01; the row’s “~33%” qualifies “Orphan companies” and its denominator is not stated (all companies are 32.6% of those records).’ Drop ‘not the ~33% the row states’ and ‘not recomputable’. source: projects/crm-three-scenarios/sources/tracker2026-10-13_remediation-plan.csv · locator: line 8 · as-of: 2026-10-12 · tag: tracker-remediation-2026-10-13</a:t>
             </a:r>
           </a:p>
         </p:txBody>
@@ -10534,7 +10545,7 @@
             </a:pPr>
             <a:r>
               <a:rPr/>
-              <a:t>Provenance notes: see the first slide of “Scans are capped, snapshots are dated, HubSQL has traps”.</a:t>
+              <a:t>Provenance notes: see the first slide of “Layer L1 — prepare the pass, archive the first pass (from 13 Oct)”.</a:t>
             </a:r>
           </a:p>
         </p:txBody>
@@ -10698,439 +10709,7 @@
             </a:pPr>
             <a:r>
               <a:rPr/>
-              <a:t>Deviation from the metagraph plan: the source table repeats the price claims of V17 / V17b (slides 17–18; C118–C144) so each URL carries the id of the claim it grounds; C146 (refuted) is not cited.</a:t>
-            </a:r>
-          </a:p>
-          <a:p>
-            <a:pPr lvl="0" indent="0" marL="0">
-              <a:buNone/>
-            </a:pPr>
-          </a:p>
-          <a:p>
-            <a:pPr lvl="0" indent="0" marL="0">
-              <a:buNone/>
-            </a:pPr>
-            <a:r>
-              <a:rPr b="1"/>
-              <a:t>C145</a:t>
-            </a:r>
-            <a:r>
-              <a:rPr/>
-              <a:t> confirmed · Not priced — to be quoted: Data Hub onboarding (no fee shown on the Data Hub pricing page; Sales Hub shows USD 1,500 / 3,500), the hermes VPS, handover hours, exit costs (StackSync and Data Hub are billed annually, so exposure is the remaining term), per-record credit consumption, the seat count needed, and the portal’s current tier delta. source: cost-lines.md · locator: ‘Confidence summary’ section · as-of: 2026-10-01 · tag: project-docs-2026-10-01</a:t>
-            </a:r>
-          </a:p>
-          <a:p>
-            <a:pPr lvl="0" indent="0" marL="0">
-              <a:buNone/>
-            </a:pPr>
-          </a:p>
-          <a:p>
-            <a:pPr lvl="0" indent="0" marL="0">
-              <a:buNone/>
-            </a:pPr>
-            <a:r>
-              <a:rPr b="1"/>
-              <a:t>C118</a:t>
-            </a:r>
-            <a:r>
-              <a:rPr/>
-              <a:t> confirmed · HubSpot Data Hub Starter: starts at USD 7 per seat per month (annual) or USD 20 per seat per month (monthly); 500 credits. source: https://www.hubspot.com/pricing/data · locator: as of 2026-10-01, Starter card · as-of: 2026-10-01 · tag: public-pricing-https://www.hubspot.com/pricing/data</a:t>
-            </a:r>
-          </a:p>
-          <a:p>
-            <a:pPr lvl="0" indent="0" marL="0">
-              <a:buNone/>
-            </a:pPr>
-          </a:p>
-          <a:p>
-            <a:pPr lvl="0" indent="0" marL="0">
-              <a:buNone/>
-            </a:pPr>
-            <a:r>
-              <a:rPr b="1"/>
-              <a:t>C120</a:t>
-            </a:r>
-            <a:r>
-              <a:rPr/>
-              <a:t> confirmed · HubSpot Data Hub Enterprise: starts at USD 2,000 per month (annual); includes 1 Core Seat; additional Core Seats from USD 75 per month; 10,000 credits; adds bi-directional Snowflake / BigQuery / AWS S3 warehouse integrations. source: https://www.hubspot.com/pricing/data/enterprise · locator: as of 2026-10-01 · as-of: 2026-10-01 · tag: public-pricing-https://www.hubspot.com/pricing/data/enterprise</a:t>
-            </a:r>
-          </a:p>
-          <a:p>
-            <a:pPr lvl="0" indent="0" marL="0">
-              <a:buNone/>
-            </a:pPr>
-          </a:p>
-          <a:p>
-            <a:pPr lvl="0" indent="0" marL="0">
-              <a:buNone/>
-            </a:pPr>
-            <a:r>
-              <a:rPr b="1"/>
-              <a:t>C124</a:t>
-            </a:r>
-            <a:r>
-              <a:rPr/>
-              <a:t> confirmed · Sales Hub Professional USD 90 per seat per month (annual) / USD 100 (monthly) plus a required one-time Professional Onboarding of USD 1,500; Enterprise USD 150 per seat per month plus USD 3,500 onboarding. source: https://www.hubspot.com/pricing/sales · locator: as of 2026-10-01, tier cards · as-of: 2026-10-01 · tag: public-pricing-https://www.hubspot.com/pricing/sales</a:t>
-            </a:r>
-          </a:p>
-          <a:p>
-            <a:pPr lvl="0" indent="0" marL="0">
-              <a:buNone/>
-            </a:pPr>
-          </a:p>
-          <a:p>
-            <a:pPr lvl="0" indent="0" marL="0">
-              <a:buNone/>
-            </a:pPr>
-            <a:r>
-              <a:rPr b="1"/>
-              <a:t>C125</a:t>
-            </a:r>
-            <a:r>
-              <a:rPr/>
-              <a:t> confirmed · HubSpot seat model: View-only seats are free and unlimited; the Partner Seat is ‘a free seat that gives eligible HubSpot Solutions Partners employees access to all features in a client’s account’; Developer seats are free. source: https://knowledge.hubspot.com/account-management/manage-seats · locator: as of 2026-10-01, seat types · as-of: 2026-10-01 · tag: public-pricing-https://knowledge.hubspot.com/account-management/manage-seats</a:t>
-            </a:r>
-          </a:p>
-          <a:p>
-            <a:pPr lvl="0" indent="0" marL="0">
-              <a:buNone/>
-            </a:pPr>
-          </a:p>
-          <a:p>
-            <a:pPr lvl="0" indent="0" marL="0">
-              <a:buNone/>
-            </a:pPr>
-            <a:r>
-              <a:rPr b="1"/>
-              <a:t>C121</a:t>
-            </a:r>
-            <a:r>
-              <a:rPr/>
-              <a:t> caveat · Data Hub feature gates (official docs): bulk duplicate management and custom duplicate rules (up to 2 per object, 9 properties) need Data Hub Professional+; custom-code workflow actions need Data Hub Professional+ (20 s / 128 MB); Datasets need Professional+; warehouse data sync needs Enterprise. caveat → Replace quote with verbatim text and add the three extra sources (developers.hubspot.com custom-code-actions; KB create-and-use-datasets; hubspot.com/pricing/data Enterprise card). Note the KB custom-code URL redirects to the developer docs. source: https://knowledge.hubspot.com/records/manage-duplicate-records · locator: as of 2026-10-01, requirements box · as-of: 2026-10-01 · tag: public-pricing-https://knowledge.hubspot.com/records/manage-duplicate-records</a:t>
-            </a:r>
-          </a:p>
-          <a:p>
-            <a:pPr lvl="0" indent="0" marL="0">
-              <a:buNone/>
-            </a:pPr>
-          </a:p>
-          <a:p>
-            <a:pPr lvl="0" indent="0" marL="0">
-              <a:buNone/>
-            </a:pPr>
-            <a:r>
-              <a:rPr b="1"/>
-              <a:t>C122</a:t>
-            </a:r>
-            <a:r>
-              <a:rPr/>
-              <a:t> confirmed · Data-quality formatting automation (auto-fix rules) is gated to Data Hub Professional and Enterprise. source: https://knowledge.hubspot.com/reports/data-quality-command-center · locator: as of 2026-10-01, Formatting issues section · as-of: 2026-10-01 · tag: public-pricing-https://knowledge.hubspot.com/reports/data-quality-command-center</a:t>
-            </a:r>
-          </a:p>
-          <a:p>
-            <a:pPr lvl="0" indent="0" marL="0">
-              <a:buNone/>
-            </a:pPr>
-          </a:p>
-          <a:p>
-            <a:pPr lvl="0" indent="0" marL="0">
-              <a:buNone/>
-            </a:pPr>
-            <a:r>
-              <a:rPr b="1"/>
-              <a:t>C144</a:t>
-            </a:r>
-            <a:r>
-              <a:rPr/>
-              <a:t> caveat · A HubSpot private app has no licence price: up to 20 private apps per account; rate limits Free &amp; Starter 100 req per 10 s per app and 250,000 per day; Professional 190 / 625,000; Enterprise 190 / 1,000,000. caveat → State ‘tier of portal 9201667 not confirmed in the brief; Pro = 625,000/day, Enterprise = 1,000,000/day’ and note the 190/10 s limit is per private app while the daily cap is per account. source: https://developers.hubspot.com/docs/guides/apps/private-apps/overview · locator: as of 2026-10-01 · as-of: 2026-10-01 · tag: public-pricing-https://developers.hubspot.com/docs/guides/apps/private-apps/overview</a:t>
-            </a:r>
-          </a:p>
-          <a:p>
-            <a:pPr lvl="0" indent="0" marL="0">
-              <a:buNone/>
-            </a:pPr>
-          </a:p>
-          <a:p>
-            <a:pPr lvl="0" indent="0" marL="0">
-              <a:buNone/>
-            </a:pPr>
-            <a:r>
-              <a:rPr b="1"/>
-              <a:t>C136</a:t>
-            </a:r>
-            <a:r>
-              <a:rPr/>
-              <a:t> caveat · HubSpot Solutions Partner tiers (official page): five tiers (Solutions partner, Gold, Platinum, Diamond, Elite) ranked by sourced / total points and GRR; USD 400 per month membership is the entry requirement; third-party guides say the fetched thresholds are the 2027-01-15 values. caveat → Solutions Partner tiers: five tiers (Solutions partner, Gold, Platinum, Diamond, Elite) set by sourced and total points, with a GRR floor only at Diamond (75%) and Elite (80%); USD 400/month membership from 15 Jul 2026, waived when the partner’s net HubSpot subscription is &gt;= USD 400/month; performance enforcement from January 2027 — thresholds subject to change. source: https://www.hubspot.com/solutions-partners-tiers-and-benefits-2026 · locator: as of 2026-10-01 · as-of: 2026-10-01 · tag: public-pricing-https://www.hubspot.com/solutions-partners-tiers-and-benefits-2026</a:t>
-            </a:r>
-          </a:p>
-          <a:p>
-            <a:pPr lvl="0" indent="0" marL="0">
-              <a:buNone/>
-            </a:pPr>
-          </a:p>
-          <a:p>
-            <a:pPr lvl="0" indent="0" marL="0">
-              <a:buNone/>
-            </a:pPr>
-            <a:r>
-              <a:rPr b="1"/>
-              <a:t>C137</a:t>
-            </a:r>
-            <a:r>
-              <a:rPr/>
-              <a:t> caveat · StackSync list price: Starter USD 1,000 per month billed annually (USD 1,400 month-to-month), 1 active sync, 50K records; Pro USD 3,000 per month annually (USD 3,700), 3 syncs, 1M records; Managed Pro USD 4,200; overage USD 8 per 1,000 records (50K-150K), USD 2 (150K-1M); no free tier; the team’s actual plan is not in the repos. caveat → Replace ‘no free tier’ with ‘no free plan listed on the pricing page (Starter is self-serve)’; mark USD 4,200 as the annual-billing price (USD 4,900 month-to-month). source: https://www.stacksync.com/pricing · locator: as of 2026-10-01, plan cards and usage table · as-of: 2026-10-01 · tag: public-pricing-https://www.stacksync.com/pricing</a:t>
-            </a:r>
-          </a:p>
-          <a:p>
-            <a:pPr lvl="0" indent="0" marL="0">
-              <a:buNone/>
-            </a:pPr>
-          </a:p>
-          <a:p>
-            <a:pPr lvl="0" indent="0" marL="0">
-              <a:buNone/>
-            </a:pPr>
-            <a:r>
-              <a:rPr b="1"/>
-              <a:t>C138</a:t>
-            </a:r>
-            <a:r>
-              <a:rPr/>
-              <a:t> caveat · BigQuery on-demand: USD 6.25 per TiB scanned after the first 1 TiB free per month; active logical storage USD 0.000031507 per GiB-hour (about USD 0.023 per GiB-month, derived at 730 h); long-term USD 0.000021918 per GiB-hour; first 10 GiB free; actual volumes not in the repos. caveat → Add ‘US multi-region / us-central1 list price; europe-west6 (Zurich) rates differ and were not verified’ and state the 730 h/month basis for the ~USD 0.023/GiB-month derivation. source: https://cloud.google.com/bigquery/pricing · locator: as of 2026-10-01, On-demand compute pricing and Storage pricing tables · as-of: 2026-10-01 · tag: public-pricing-https://cloud.google.com/bigquery/pricing</a:t>
-            </a:r>
-          </a:p>
-          <a:p>
-            <a:pPr lvl="0" indent="0" marL="0">
-              <a:buNone/>
-            </a:pPr>
-          </a:p>
-          <a:p>
-            <a:pPr lvl="0" indent="0" marL="0">
-              <a:buNone/>
-            </a:pPr>
-            <a:r>
-              <a:rPr b="1"/>
-              <a:t>C139</a:t>
-            </a:r>
-            <a:r>
-              <a:rPr/>
-              <a:t> caveat · Cloud Run request-based billing: USD 0.000024 per vCPU-second, USD 0.0000025 per GiB-second, USD 0.40 per million requests; free tier 180,000 vCPU-s, 360,000 GiB-s and 2 million requests per month. caveat → Label as ‘Tier 1 (us-central1) list prices; Zurich/europe-west6 is Tier 2 and costs more (amount not verified)’ and keep the region consistent with the VM line. source: https://cloud.google.com/run/pricing · locator: as of 2026-10-01, Services (Requests-based billing) table · as-of: 2026-10-01 · tag: public-pricing-https://cloud.google.com/run/pricing</a:t>
-            </a:r>
-          </a:p>
-          <a:p>
-            <a:pPr lvl="0" indent="0" marL="0">
-              <a:buNone/>
-            </a:pPr>
-          </a:p>
-          <a:p>
-            <a:pPr lvl="0" indent="0" marL="0">
-              <a:buNone/>
-            </a:pPr>
-            <a:r>
-              <a:rPr b="1"/>
-              <a:t>C140</a:t>
-            </a:r>
-            <a:r>
-              <a:rPr/>
-              <a:t> caveat · Compute Engine VM for Mir-Load / Go CDC: e2-micro USD 6.11 per month us-central1 (USD 0 for one e2-micro under the Free Tier in us-west1 / us-central1 / us-east1); e2-medium USD 24.46 per month us-central1, USD 32.04 europe-west6 (Zurich) — order of magnitude from a public mirror; instance size not in the repos. caveat → Attribute USD 6.11 and USD 24.46/32.04 to gcloud-compute.com (third-party mirror, updated 2026-09-27) and the free-tier eligibility (US regions only) to docs.cloud.google.com/free; note Zurich is not a free-tier region. source: https://cloud.google.com/free/docs/free-cloud-features · locator: as of 2026-10-01, Compute Engine row · as-of: 2026-10-01 · tag: public-pricing-https://cloud.google.com/free/docs/free-cloud-features</a:t>
-            </a:r>
-          </a:p>
-          <a:p>
-            <a:pPr lvl="0" indent="0" marL="0">
-              <a:buNone/>
-            </a:pPr>
-          </a:p>
-          <a:p>
-            <a:pPr lvl="0" indent="0" marL="0">
-              <a:buNone/>
-            </a:pPr>
-            <a:r>
-              <a:rPr b="1"/>
-              <a:t>C141</a:t>
-            </a:r>
-            <a:r>
-              <a:rPr/>
-              <a:t> confirmed · dbt Core is free (Apache 2.0); dbt platform Developer USD 0 (1 seat, 3,000 models per month); Starter USD 100 per user per month; Enterprise custom. source: https://github.com/dbt-labs/dbt-core · locator: as of 2026-10-01, README · as-of: 2026-10-01 · tag: public-pricing-https://github.com/dbt-labs/dbt-core</a:t>
-            </a:r>
-          </a:p>
-          <a:p>
-            <a:pPr lvl="0" indent="0" marL="0">
-              <a:buNone/>
-            </a:pPr>
-          </a:p>
-          <a:p>
-            <a:pPr lvl="0" indent="0" marL="0">
-              <a:buNone/>
-            </a:pPr>
-            <a:r>
-              <a:rPr b="1"/>
-              <a:t>C142</a:t>
-            </a:r>
-            <a:r>
-              <a:rPr/>
-              <a:t> confirmed · Oban Pro: USD 150 per month billed monthly or USD 135 per month billed yearly (USD 1,620 per year); Oban open source is free — relevant only if the ‘Elixir sync’ is built. source: https://oban.pro/pricing · locator: as of 2026-10-01 · as-of: 2026-10-01 · tag: public-pricing-https://oban.pro/pricing</a:t>
-            </a:r>
-          </a:p>
-          <a:p>
-            <a:pPr lvl="0" indent="0" marL="0">
-              <a:buNone/>
-            </a:pPr>
-          </a:p>
-          <a:p>
-            <a:pPr lvl="0" indent="0" marL="0">
-              <a:buNone/>
-            </a:pPr>
-            <a:r>
-              <a:rPr b="1"/>
-              <a:t>C143</a:t>
-            </a:r>
-            <a:r>
-              <a:rPr/>
-              <a:t> caveat · Anthropic Claude API list prices: three published model tiers at USD 1 / 2 / 4 per MTok in and USD 5 / 10 / 20 per MTok out; Batch API 50% off; cache reads 0.1x input (0.05x on the top tier). At an ASSUMED 1,000 calls per month x (5,000 in + 1,000 out tokens): about USD 40 / 20 / 10 per month — order of magnitude, assumption stated; real volume not in the repos. caveat → Add: ‘the two larger tiers use a newer tokenizer that yields ~30% more tokens for the same text than the smallest tier, so the 5k/1k token assumption understates their cost by roughly that margin; prices exclude prompt-caching and tool-use overhead.’ source: https://platform.claude.com/docs/en/about-claude/pricing · locator: as of 2026-10-01, Model pricing and Batch processing tables · as-of: 2026-10-01 · tag: public-pricing-https://platform.claude.com/docs/en/about-claude/pricing</a:t>
-            </a:r>
-          </a:p>
-          <a:p>
-            <a:pPr lvl="0" indent="0" marL="0">
-              <a:buNone/>
-            </a:pPr>
-          </a:p>
-          <a:p>
-            <a:pPr lvl="0" indent="0" marL="0">
-              <a:buNone/>
-            </a:pPr>
-            <a:r>
-              <a:rPr b="1"/>
-              <a:t>C130</a:t>
-            </a:r>
-            <a:r>
-              <a:rPr/>
-              <a:t> confirmed · INSIDEA (HubSpot partner) managed-operations retainer: from USD 2,000 per month, 6-12 month minimum commitment, licences separate at partner-discount rates. source: https://insidea.com/hubspot/managed-operations · locator: as of 2026-10-01, pricing block · as-of: 2026-10-01 · tag: public-pricing-https://insidea.com/hubspot/managed-operations</a:t>
-            </a:r>
-          </a:p>
-          <a:p>
-            <a:pPr lvl="0" indent="0" marL="0">
-              <a:buNone/>
-            </a:pPr>
-          </a:p>
-          <a:p>
-            <a:pPr lvl="0" indent="0" marL="0">
-              <a:buNone/>
-            </a:pPr>
-            <a:r>
-              <a:rPr b="1"/>
-              <a:t>C131</a:t>
-            </a:r>
-            <a:r>
-              <a:rPr/>
-              <a:t> confirmed · HIVE Strategy menu: Fractional Admin from USD 2,000 per month (10 h); Essential retainer from USD 5,000; Growth from USD 7,500; Enterprise from USD 15,000 per month; Audit from USD 3,000; Advanced onboarding from USD 5,000; Training from USD 200 per hour. source: https://www.hivestrategy.com/pricing · locator: as of 2026-10-01 · as-of: 2026-10-01 · tag: public-pricing-https://www.hivestrategy.com/pricing</a:t>
-            </a:r>
-          </a:p>
-          <a:p>
-            <a:pPr lvl="0" indent="0" marL="0">
-              <a:buNone/>
-            </a:pPr>
-          </a:p>
-          <a:p>
-            <a:pPr lvl="0" indent="0" marL="0">
-              <a:buNone/>
-            </a:pPr>
-            <a:r>
-              <a:rPr b="1"/>
-              <a:t>C132</a:t>
-            </a:r>
-            <a:r>
-              <a:rPr/>
-              <a:t> caveat · Lean Labs (HubSpot Diamond partner): free assessment; onboarding from USD 2,000; migrations from USD 7,000; integrations from USD 15,000 (one-time). caveat → Replace the quote with the verbatim page text: ‘HubSpot assessment — FREE … We offer free HubSpot assessments and consults. No cost or obligation. HubSpot onboarding — Starting at $2k. HubSpot migrations — Starting at $7k. HubSpot integrations — Starting at $15k.’ source: https://www.leanlabs.com/pricing.md · locator: as of 2026-10-01 · as-of: 2026-10-01 · tag: public-pricing-https://www.leanlabs.com/pricing.md</a:t>
-            </a:r>
-          </a:p>
-          <a:p>
-            <a:pPr lvl="0" indent="0" marL="0">
-              <a:buNone/>
-            </a:pPr>
-          </a:p>
-          <a:p>
-            <a:pPr lvl="0" indent="0" marL="0">
-              <a:buNone/>
-            </a:pPr>
-            <a:r>
-              <a:rPr b="1"/>
-              <a:t>C133</a:t>
-            </a:r>
-            <a:r>
-              <a:rPr/>
-              <a:t> confirmed · HubSpot portal audit ranges (vendor blog dated 2026-01-30): standard audit USD 2,000-5,000; enterprise USD 5,000-10,000+; ongoing advisory USD 150-300 per hour; one cited partner quote USD 8,200; the DIY audit costs USD 1,350-4,500 of staff time per 20-40 h run (USD 5,400-18,000 per year if quarterly) — illustrative proxy for the S1 ‘your time’ line, not measured. source: https://portalpilot.io/blog/hubspot-audit-cost · locator: as of 2026-10-01, article dated January 30, 2026 · as-of: 2026-10-01 · tag: public-pricing-https://portalpilot.io/blog/hubspot-audit-cost</a:t>
-            </a:r>
-          </a:p>
-          <a:p>
-            <a:pPr lvl="0" indent="0" marL="0">
-              <a:buNone/>
-            </a:pPr>
-          </a:p>
-          <a:p>
-            <a:pPr lvl="0" indent="0" marL="0">
-              <a:buNone/>
-            </a:pPr>
-            <a:r>
-              <a:rPr b="1"/>
-              <a:t>C134</a:t>
-            </a:r>
-            <a:r>
-              <a:rPr/>
-              <a:t> confirmed · IMPACT (HubSpot Elite partner) cost guide (article dated 2024-06-09, older): ongoing DevOps / RevOps retainers USD 2,500-10,000 per month; basic onboarding USD 3,000-6,000 one-time; complex multi-hub implementations USD 10,000-25,000+. source: https://www.impactplus.com/blog/how-much-does-working-with-a-hubspot-partner-agency-cost · locator: as of 2026-10-01, article dated June 9, 2024 · as-of: 2026-10-01 · tag: public-pricing-https://www.impactplus.com/blog/how-much-does-working-with-a-hubspot-partner-agency-cost</a:t>
-            </a:r>
-          </a:p>
-          <a:p>
-            <a:pPr lvl="0" indent="0" marL="0">
-              <a:buNone/>
-            </a:pPr>
-          </a:p>
-          <a:p>
-            <a:pPr lvl="0" indent="0" marL="0">
-              <a:buNone/>
-            </a:pPr>
-            <a:r>
-              <a:rPr b="1"/>
-              <a:t>C135</a:t>
-            </a:r>
-            <a:r>
-              <a:rPr/>
-              <a:t> confirmed · Secondary benchmark: SmartBug USD 185 per hour (15 h guided onboarding = USD 2,775); Orbital ongoing platform management USD 2,000 per month. source: https://www.getmonetizely.com/articles/how-do-hubspot-implementation-partners-price-their-services-in-2025 · locator: as of 2026-10-01 · as-of: 2026-10-01 · tag: public-pricing-https://www.getmonetizely.com/articles/how-do-hubspot-implementation-partners-price-their-services-in-2025</a:t>
-            </a:r>
-          </a:p>
-          <a:p>
-            <a:pPr lvl="0" indent="0" marL="0">
-              <a:buNone/>
-            </a:pPr>
-          </a:p>
-          <a:p>
-            <a:pPr lvl="0" indent="0" marL="0">
-              <a:buNone/>
-            </a:pPr>
-            <a:r>
-              <a:rPr b="1"/>
-              <a:t>C127</a:t>
-            </a:r>
-            <a:r>
-              <a:rPr/>
-              <a:t> confirmed · Insycle (record-count priced): USD 100 / 150 / 200 per month billed annually (Starter 1 module / Growth 2 / Professional all); Enterprise custom; monthly billing for databases up to 500K records. source: https://www.insycle.com/pricing · locator: as of 2026-10-01 · as-of: 2026-10-01 · tag: public-pricing-https://www.insycle.com/pricing</a:t>
-            </a:r>
-          </a:p>
-          <a:p>
-            <a:pPr lvl="0" indent="0" marL="0">
-              <a:buNone/>
-            </a:pPr>
-          </a:p>
-          <a:p>
-            <a:pPr lvl="0" indent="0" marL="0">
-              <a:buNone/>
-            </a:pPr>
-            <a:r>
-              <a:rPr b="1"/>
-              <a:t>C129</a:t>
-            </a:r>
-            <a:r>
-              <a:rPr/>
-              <a:t> caveat · Dedupely: Starter USD 32 per month up to 30,000 records; Basic 60K / Pro 120K / Premium 240K / Gold 480K tiers (prices not shown; vendor site unreachable via proxy); portal contacts + companies = 39,972 exceed Starter. caveat → Dedupely Starter USD 32/month covers up to 30,000 records; the portal’s 13,679 companies + 26,29x contacts (~39,97x, live 2026-10-01, moves with inbound creation) exceed Starter, so the Basic tier (60,000) would apply — its price is not shown on the listing and Dedupely does not state which object types count as records. source: https://ecosystem.hubspot.com/marketplace/apps/dedupely · locator: as of 2026-10-01, pricing tab · as-of: 2026-10-01 · tag: public-pricing-https://ecosystem.hubspot.com/marketplace/apps/dedupely</a:t>
+              <a:t>Provenance notes: see the first slide of “Layer L1 — prepare the pass, archive the first pass (from 13 Oct)”.</a:t>
             </a:r>
           </a:p>
         </p:txBody>
@@ -11212,7 +10791,7 @@
             </a:pPr>
             <a:r>
               <a:rPr/>
-              <a:t>Provenance notes: see the first slide of “Where every price comes from”.</a:t>
+              <a:t>Provenance notes: see the first slide of “Layer L1 — prepare the pass, archive the first pass (from 13 Oct)”.</a:t>
             </a:r>
           </a:p>
         </p:txBody>
@@ -11294,7 +10873,7 @@
             </a:pPr>
             <a:r>
               <a:rPr/>
-              <a:t>Provenance notes: see the first slide of “Where every price comes from”.</a:t>
+              <a:t>Provenance notes: see the first slide of “Layer L1 — prepare the pass, archive the first pass (from 13 Oct)”.</a:t>
             </a:r>
           </a:p>
         </p:txBody>
@@ -11376,7 +10955,7 @@
             </a:pPr>
             <a:r>
               <a:rPr/>
-              <a:t>Provenance notes: see the first slide of “Where every price comes from”.</a:t>
+              <a:t>Provenance notes: see the first slide of “Layer L1 — prepare the pass, archive the first pass (from 13 Oct)”.</a:t>
             </a:r>
           </a:p>
         </p:txBody>
@@ -11458,7 +11037,169 @@
             </a:pPr>
             <a:r>
               <a:rPr/>
-              <a:t>Provenance notes: see the first slide of “Where every price comes from”.</a:t>
+              <a:t>Sequel slides added 2026-10-12 from the remediation-plan tracker (projects/crm-three-scenarios/sources/tracker2026-10-13_remediation-plan.csv, tag tracker-remediation-2026-10-13); verified second pass of 2026-10-12 (metagraph.json meta.verification.second_pass: claims C158–C171, 13 caveated, 1 confirmed, 0 refuted; side findings C172–C187 filed). The tracker is the user’s plan: admissible as what is planned, never as a measurement. Chunking: the user’s two lines ‘foundation : L1+L2’ / ‘E2:E4 : L3’ (brief.md section 5), read by this deck as Foundation engine of the 21/09/26 roadmap ↔ layers L1 + L2 and engines E2–E4 ↔ layer L3; the plan’s own Foundation phase (lines 2–6) is not named in the rule and is shown beside L1 as a reading. Deviation from the metagraph plan: C159 (the L2 window and the ESTIMATED DURATION column) and C158 (plan-wide status: pending, 0%, no owner) are cited here as well as on slides 23 and 25 because the chip row carries them.</a:t>
+            </a:r>
+          </a:p>
+          <a:p>
+            <a:pPr lvl="0" indent="0" marL="0">
+              <a:buNone/>
+            </a:pPr>
+          </a:p>
+          <a:p>
+            <a:pPr lvl="0" indent="0" marL="0">
+              <a:buNone/>
+            </a:pPr>
+            <a:r>
+              <a:rPr b="1"/>
+              <a:t>C112</a:t>
+            </a:r>
+            <a:r>
+              <a:rPr/>
+              <a:t> confirmed · Companies with no deal association: 12,574 of 13,679 (91.9%); only 1,105 companies carry a deal (live, uncapped; complements the capped Hs-Logic 9,150 orphans). source: live-hubsql-2026-10-01 · locator: SELECT COUNT(*) FROM COMPANY WHERE hs_object_id IS NOT NULL AND associations.DEAL IS NULL · as-of: 2026-10-01 · tag: live-hubsql-2026-10-01</a:t>
+            </a:r>
+          </a:p>
+          <a:p>
+            <a:pPr lvl="0" indent="0" marL="0">
+              <a:buNone/>
+            </a:pPr>
+          </a:p>
+          <a:p>
+            <a:pPr lvl="0" indent="0" marL="0">
+              <a:buNone/>
+            </a:pPr>
+            <a:r>
+              <a:rPr b="1"/>
+              <a:t>C158</a:t>
+            </a:r>
+            <a:r>
+              <a:rPr/>
+              <a:t> caveat · Remediation plan tracker dated 13-Oct-26: 22 tasks in four phases (Foundation 5, L1 5, L2 8, L3 4), engine ‘Remediation’ on every row, status pending, progress 0%, owner and priority empty on every row. caveat → Slide wording: ‘Tracker export dated 13-Oct-26 (plan start date; one day after this deck’s date): 22 tasks, all pending, 0% progress, no owner, no priority — the plan as written before its start, not a measurement of progress.’ source: projects/crm-three-scenarios/sources/tracker2026-10-13_remediation-plan.csv · locator: lines 2-23 (PHASE, ENGINE, OWNER, PROGRESS, Status columns) · as-of: 2026-10-12 · tag: tracker-remediation-2026-10-13</a:t>
+            </a:r>
+          </a:p>
+          <a:p>
+            <a:pPr lvl="0" indent="0" marL="0">
+              <a:buNone/>
+            </a:pPr>
+          </a:p>
+          <a:p>
+            <a:pPr lvl="0" indent="0" marL="0">
+              <a:buNone/>
+            </a:pPr>
+            <a:r>
+              <a:rPr b="1"/>
+              <a:t>C159</a:t>
+            </a:r>
+            <a:r>
+              <a:rPr/>
+              <a:t> caveat · Foundation (5 rows) and L1 (5 rows) start 13-Oct-26 with no end date or duration; L2 (8 rows) runs 16-Nov-26 to 30-Nov-26, 11 days, every row Critical = yes; L3 (4 rows) runs 01-Dec-26 to 20-Dec-26, 14 days, every row Critical = yes. caveat → Slide wording: ‘L2 16-30 Nov-26, estimated duration 11 (tracker column; equals the weekday count of the span, which is 15 calendar days); L3 1-20 Dec-26, estimated duration 14 (weekday count; 20 calendar days). Foundation and L1: start 13-Oct-26, no duration, no end date.’ caveat → Show as: ‘L2 16-30 Nov 2026 (tracker estimate 11 working days; 15 calendar days), L3 1-20 Dec 2026 (tracker estimate 14 working days; 20 calendar days, END falls on a Sunday)’. Label 11 and 14 as the plan’s ESTIMATED DURATION column. source: projects/crm-three-scenarios/sources/tracker2026-10-13_remediation-plan.csv · locator: lines 2-11 (START 13-Oct-26, END empty); lines 12-19 (16-Nov-26,11,30-Nov-26,…,yes); lines 20-23 (01-Dec-26,14,20-Dec-26,…,yes) · as-of: 2026-10-12 · tag: tracker-remediation-2026-10-13</a:t>
+            </a:r>
+          </a:p>
+          <a:p>
+            <a:pPr lvl="0" indent="0" marL="0">
+              <a:buNone/>
+            </a:pPr>
+          </a:p>
+          <a:p>
+            <a:pPr lvl="0" indent="0" marL="0">
+              <a:buNone/>
+            </a:pPr>
+            <a:r>
+              <a:rPr b="1"/>
+              <a:t>C163</a:t>
+            </a:r>
+            <a:r>
+              <a:rPr/>
+              <a:t> caveat · L2, eight tasks (16-30 Nov, all critical): solve the final-customer target ‘91.9%; only 1,105 companies have a deal’; delete all contacts without a legitimate source (no owner, no recent activities); delete all duplicates with no record attached (goal ‘50% of duplicates suppressed’); implement reports and quality checks generated automatically via Quarto-BQ (HS-Standalone connector); reduce friction in form settings for new records; add the ‘project type’ property; surface/audit the property set based on L1 and remove unfilled properties (goal ‘Remove 25% of SEALSQ properties’); define a co-owner of quality metrics in the CRM. caveat → Slide wording: ‘Eight L2 tasks, 16-30 Nov-26, all marked critical; goals and percentages are the plan’s targets as written, not measurements. 91.9% / 1,105 restate the deck’s portal-wide live figures of 2026-10-01 (C112); 50% of duplicates and 25% of SEALSQ properties are targets against baselines that are capped (C051, C053) or snapshot-dated 2026-09-14 (C062, C086).’ source: projects/crm-three-scenarios/sources/tracker2026-10-13_remediation-plan.csv · locator: lines 12-19 · as-of: 2026-10-12 · tag: tracker-remediation-2026-10-13</a:t>
+            </a:r>
+          </a:p>
+          <a:p>
+            <a:pPr lvl="0" indent="0" marL="0">
+              <a:buNone/>
+            </a:pPr>
+          </a:p>
+          <a:p>
+            <a:pPr lvl="0" indent="0" marL="0">
+              <a:buNone/>
+            </a:pPr>
+            <a:r>
+              <a:rPr b="1"/>
+              <a:t>C164</a:t>
+            </a:r>
+            <a:r>
+              <a:rPr/>
+              <a:t> caveat · The L2 target ‘91.9%; only 1,105 companies have a deal’ is the deck’s own live measurement of 2026-10-01 (claim C112: 12,574 of 13,679 companies carry no deal, 91.9%; 1,105 carry one); the plan quotes the measurement as its target. caveat → Slide wording: ‘The L2 row restates the deck’s live, portal-wide figures of 2026-10-01 (C112: 12,574 of 13,679 companies without a deal, 91.9%; 1,105 with one) as the condition to solve; the row sets no numeric target of its own and no SEALSQ-only baseline was measured.’ Replace ‘quotes the measurement as its target’ with ‘restates the measurement as the condition to solve’. caveat → Carry: ‘The L2 row restates the deck’s live 2026-10-01 measurement (C112: 12,574 of 13,679 companies, 91.9%, with no deal; 1,105 with at least one deal) as the state to solve; the row names no target value. Cross-reference, not a new measurement.’ source: projects/crm-three-scenarios/sources/tracker2026-10-13_remediation-plan.csv · locator: line 12 · as-of: 2026-10-12 · tag: tracker-remediation-2026-10-13</a:t>
+            </a:r>
+          </a:p>
+          <a:p>
+            <a:pPr lvl="0" indent="0" marL="0">
+              <a:buNone/>
+            </a:pPr>
+          </a:p>
+          <a:p>
+            <a:pPr lvl="0" indent="0" marL="0">
+              <a:buNone/>
+            </a:pPr>
+            <a:r>
+              <a:rPr b="1"/>
+              <a:t>C166</a:t>
+            </a:r>
+            <a:r>
+              <a:rPr/>
+              <a:t> caveat · The user’s chunking rule for the three appended slides: the Foundation engine of the 21/09/26 roadmap corresponds to layers L1 + L2 of the remediation plan; engines E2 to E4 correspond to layer L3. The engine ladder itself (Foundation -&gt; E2 rebuild a cleaner data structure -&gt; E3 leverage the data for GTM/RevOps -&gt; E4 self-autonomous AI-powered CRM) is the 21/09/26 tracker’s legend. caveat → Quote the rule as two lines attributed to the user (‘foundation : L1+L2’ / ‘E2:E4 : L3’, brief section 5) and label the engine-to-layer reading ‘orchestrator reading of the user’s rule’. Quote the legend verbatim: ‘E2 = After Foundation we start rebuilding a cleaner data structure’; ‘E3 = After the data we can now leverage the data for GTM and Reporting/RevOps’; ‘E4 = Self - autonomous AI powered CRM’. Add: ‘The five Foundation-phase rows of the plan (lines 2-6) are not named in the user’s rule.’ caveat → Show the mapping as ‘the user’s rule, read by the deck as: Foundation engine of the 21/09/26 roadmap &lt;-&gt; layers L1 + L2; engines E2-E4 &lt;-&gt; layer L3’ and state on the slide where the five rows of the CSV’s own Foundation phase (lines 2-6) are placed, since the rule names only L1, L2 and L3. source: projects/crm-three-scenarios/brief.md · locator: line 271 (section 5, user request verbatim) · as-of: 2026-10-12 · tag: brief-2026-10-12</a:t>
+            </a:r>
+          </a:p>
+          <a:p>
+            <a:pPr lvl="0" indent="0" marL="0">
+              <a:buNone/>
+            </a:pPr>
+          </a:p>
+          <a:p>
+            <a:pPr lvl="0" indent="0" marL="0">
+              <a:buNone/>
+            </a:pPr>
+            <a:r>
+              <a:rPr b="1"/>
+              <a:t>C168</a:t>
+            </a:r>
+            <a:r>
+              <a:rPr/>
+              <a:t> caveat · The L2 task ‘reports and quality checks automatically generated via Quarto-BQ (HS-Standalone connector)’ names two items of the implementation health check: Hs-Logic / hs-standalone (rank 6, verdict simplify) and the DBT + BigQuery pipeline Bq-dbt (rank 1, verdict keep); neither repository contains a Quarto document today. caveat → Slide wording: ‘L2 row (line 15) names “Quarto-BQ (HS-Standalone connector)”. By name: HS-Standalone is the user’s label for Hs-Logic (brief, “hs-standalone project = Hs-Logic”; health check rank 6, simplify); BQ read as BigQuery points at the Bq-dbt pipeline (rank 1, keep), whose code is in none of the three repositories. No file in Hs-Logic or HubSpot-Ruler mentions Quarto (grep 2026-10-12).’ Replace the composite quote with the two cell texts. caveat → Wording: ‘The row’s names match, by name only, two health-check items: Hs-Logic / hs-standalone (rank 6, simplify) and the Bq-dbt pipeline (rank 1, keep, code in no repository available). No Quarto file exists in Hs-Logic or HubSpot-Ruler; Bq-dbt’s code cannot be inspected.’ source: projects/crm-three-scenarios/sources/tracker2026-10-13_remediation-plan.csv · locator: line 15 · as-of: 2026-10-12 · tag: tracker-remediation-2026-10-13</a:t>
+            </a:r>
+          </a:p>
+          <a:p>
+            <a:pPr lvl="0" indent="0" marL="0">
+              <a:buNone/>
+            </a:pPr>
+          </a:p>
+          <a:p>
+            <a:pPr lvl="0" indent="0" marL="0">
+              <a:buNone/>
+            </a:pPr>
+            <a:r>
+              <a:rPr b="1"/>
+              <a:t>C170</a:t>
+            </a:r>
+            <a:r>
+              <a:rPr/>
+              <a:t> caveat · The plan’s ratio targets, read against the baselines already in the ledger: ‘50% of duplicates suppressed’ against 226 company and 281 contact duplicate clusters found by exact match in a capped 10,000-record scan (C051, C053: floors, not counts); ‘remove 25% of SEALSQ properties’ (L2) then ‘50%’ (L3) against the 2026-09-14 snapshots: 498 deal / 30 company / 30 contact properties in the SEALSQ-scope set (C062) and 565 DEAL / 40 COMPANY / 24 CONTACT rows in the Data-Toolkit schema (C086); ‘90% of SEALSQ companies not orphaned’ against 8.1% of companies carrying a deal portal-wide on 2026-10-01 (C112; SEALSQ-only baseline not measured); ‘80% of contacts with email + telephone/LinkedIn’ against phone missing on 53.3% and email on 1.7% of the first 10,000 contacts (C052, capped; LinkedIn not measured). caveat → Slide wording: ‘Baselines in the ledger, none SEALSQ-only: duplicates = 226 company and 281 contact exact-match clusters in the first 10,000 records scanned (floors, not totals; the plan counts only duplicates “with no record attached”); SEALSQ property set = 498 deal / 30 contact / 30 company properties captured 2026-09-14 (the portal-wide schema holds 565 deal / 40 company / 24 contact); companies with a deal = 1,105 of 13,679 portal-wide on 2026-10-01 (8.1%, derived from the 91.9% without); phone missing on 53.3% and email on 1.7% of the first 10,000 contacts, portal-wide; LinkedIn not measured.’ Write the C053 quote as ‘226 Duplicate clusters’ and keep the ‘[Data]’ prefixes in task quotes. caveat → Say ‘property entries’ for C086; state both orphan baselines (C112 portal-wide 91.9% without a deal; C053 9,150 of first 10,000 by Hs-Logic’s definition) and that the plan’s ‘orphaned’ is undefined; label all baselines portal-wide or capped, never SEALSQ-only; for the 80% target cite phone missing 53.3% and email 1.7% separately and mark LinkedIn and the compound as not measured. source: projects/crm-three-scenarios/sources/tracker2026-10-13_remediation-plan.csv · locator: lines 14, 18, 20, 21, 23 (Goal and TASK columns) · as-of: 2026-10-12 · tag: tracker-remediation-2026-10-13</a:t>
+            </a:r>
+          </a:p>
+          <a:p>
+            <a:pPr lvl="0" indent="0" marL="0">
+              <a:buNone/>
+            </a:pPr>
+          </a:p>
+          <a:p>
+            <a:pPr lvl="0" indent="0" marL="0">
+              <a:buNone/>
+            </a:pPr>
+            <a:r>
+              <a:rPr b="1"/>
+              <a:t>C171</a:t>
+            </a:r>
+            <a:r>
+              <a:rPr/>
+              <a:t> caveat · The plan names no owner on any of its 22 rows and no priority; Foundation and L1 rows carry no end date or duration; the ‘co-owner of quality metrics’ row gives one example name in parentheses; the L2 property-audit row and the L3 deal-documentation row carry different removal targets for the same SEALSQ property set (25% then 50%). caveat → Slide wording: ‘No owner and no priority on any of the 22 rows; Foundation and L1 rows (lines 2-11) carry a start date (13-Oct-26) but no duration or end; the co-owner row (line 19) gives one example name in parentheses; property removal is set at 25% in L2 (line 18) and 50% in L3 (line 23), both worded “SEALSQ properties”, and the plan does not state whether the 50% is cumulative.’ source: projects/crm-three-scenarios/sources/tracker2026-10-13_remediation-plan.csv · locator: OWNER and ‘Priority level’ columns, lines 2-23; line 19; lines 18 and 23 · as-of: 2026-10-12 · tag: tracker-remediation-2026-10-13</a:t>
             </a:r>
           </a:p>
         </p:txBody>
@@ -11481,6 +11222,614 @@
             <a:fld id="{18BDFEC3-8487-43E8-A154-7C12CBC1FFF2}" type="slidenum">
               <a:rPr lang="en-US"/>
               <a:t>75</a:t>
+            </a:fld>
+            <a:endParaRPr lang="en-US"/>
+          </a:p>
+        </p:txBody>
+      </p:sp>
+    </p:spTree>
+  </p:cSld>
+</p:notes>
+</file>
+
+<file path=ppt/notesSlides/notesSlide75.xml><?xml version="1.0" encoding="utf-8"?>
+<p:notes xmlns:a="http://schemas.openxmlformats.org/drawingml/2006/main" xmlns:r="http://schemas.openxmlformats.org/officeDocument/2006/relationships" xmlns:p="http://schemas.openxmlformats.org/presentationml/2006/main">
+  <p:cSld>
+    <p:spTree>
+      <p:nvGrpSpPr>
+        <p:cNvPr id="1" name=""/>
+        <p:cNvGrpSpPr/>
+        <p:nvPr/>
+      </p:nvGrpSpPr>
+      <p:grpSpPr>
+        <a:xfrm>
+          <a:off x="0" y="0"/>
+          <a:ext cx="0" cy="0"/>
+          <a:chOff x="0" y="0"/>
+          <a:chExt cx="0" cy="0"/>
+        </a:xfrm>
+      </p:grpSpPr>
+      <p:sp>
+        <p:nvSpPr>
+          <p:cNvPr id="2" name="Slide Image Placeholder 1"/>
+          <p:cNvSpPr>
+            <a:spLocks noGrp="1" noRot="1" noChangeAspect="1"/>
+          </p:cNvSpPr>
+          <p:nvPr>
+            <p:ph type="sldImg"/>
+          </p:nvPr>
+        </p:nvSpPr>
+        <p:spPr/>
+      </p:sp>
+      <p:sp>
+        <p:nvSpPr>
+          <p:cNvPr id="3" name="Notes Placeholder 2"/>
+          <p:cNvSpPr>
+            <a:spLocks noGrp="1"/>
+          </p:cNvSpPr>
+          <p:nvPr>
+            <p:ph type="body" idx="1"/>
+          </p:nvPr>
+        </p:nvSpPr>
+        <p:spPr/>
+        <p:txBody>
+          <a:bodyPr/>
+          <a:lstStyle/>
+          <a:p>
+            <a:pPr lvl="0" indent="0" marL="0">
+              <a:buNone/>
+            </a:pPr>
+            <a:r>
+              <a:rPr/>
+              <a:t>Provenance notes: see the first slide of “Layer L2 — 16 to 30 November, eight critical tasks”.</a:t>
+            </a:r>
+          </a:p>
+        </p:txBody>
+      </p:sp>
+      <p:sp>
+        <p:nvSpPr>
+          <p:cNvPr id="4" name="Slide Number Placeholder 3"/>
+          <p:cNvSpPr>
+            <a:spLocks noGrp="1"/>
+          </p:cNvSpPr>
+          <p:nvPr>
+            <p:ph type="sldNum" sz="quarter" idx="10"/>
+          </p:nvPr>
+        </p:nvSpPr>
+        <p:spPr/>
+        <p:txBody>
+          <a:bodyPr/>
+          <a:lstStyle/>
+          <a:p>
+            <a:fld id="{18BDFEC3-8487-43E8-A154-7C12CBC1FFF2}" type="slidenum">
+              <a:rPr lang="en-US"/>
+              <a:t>76</a:t>
+            </a:fld>
+            <a:endParaRPr lang="en-US"/>
+          </a:p>
+        </p:txBody>
+      </p:sp>
+    </p:spTree>
+  </p:cSld>
+</p:notes>
+</file>
+
+<file path=ppt/notesSlides/notesSlide76.xml><?xml version="1.0" encoding="utf-8"?>
+<p:notes xmlns:a="http://schemas.openxmlformats.org/drawingml/2006/main" xmlns:r="http://schemas.openxmlformats.org/officeDocument/2006/relationships" xmlns:p="http://schemas.openxmlformats.org/presentationml/2006/main">
+  <p:cSld>
+    <p:spTree>
+      <p:nvGrpSpPr>
+        <p:cNvPr id="1" name=""/>
+        <p:cNvGrpSpPr/>
+        <p:nvPr/>
+      </p:nvGrpSpPr>
+      <p:grpSpPr>
+        <a:xfrm>
+          <a:off x="0" y="0"/>
+          <a:ext cx="0" cy="0"/>
+          <a:chOff x="0" y="0"/>
+          <a:chExt cx="0" cy="0"/>
+        </a:xfrm>
+      </p:grpSpPr>
+      <p:sp>
+        <p:nvSpPr>
+          <p:cNvPr id="2" name="Slide Image Placeholder 1"/>
+          <p:cNvSpPr>
+            <a:spLocks noGrp="1" noRot="1" noChangeAspect="1"/>
+          </p:cNvSpPr>
+          <p:nvPr>
+            <p:ph type="sldImg"/>
+          </p:nvPr>
+        </p:nvSpPr>
+        <p:spPr/>
+      </p:sp>
+      <p:sp>
+        <p:nvSpPr>
+          <p:cNvPr id="3" name="Notes Placeholder 2"/>
+          <p:cNvSpPr>
+            <a:spLocks noGrp="1"/>
+          </p:cNvSpPr>
+          <p:nvPr>
+            <p:ph type="body" idx="1"/>
+          </p:nvPr>
+        </p:nvSpPr>
+        <p:spPr/>
+        <p:txBody>
+          <a:bodyPr/>
+          <a:lstStyle/>
+          <a:p>
+            <a:pPr lvl="0" indent="0" marL="0">
+              <a:buNone/>
+            </a:pPr>
+            <a:r>
+              <a:rPr/>
+              <a:t>Provenance notes: see the first slide of “Layer L2 — 16 to 30 November, eight critical tasks”.</a:t>
+            </a:r>
+          </a:p>
+        </p:txBody>
+      </p:sp>
+      <p:sp>
+        <p:nvSpPr>
+          <p:cNvPr id="4" name="Slide Number Placeholder 3"/>
+          <p:cNvSpPr>
+            <a:spLocks noGrp="1"/>
+          </p:cNvSpPr>
+          <p:nvPr>
+            <p:ph type="sldNum" sz="quarter" idx="10"/>
+          </p:nvPr>
+        </p:nvSpPr>
+        <p:spPr/>
+        <p:txBody>
+          <a:bodyPr/>
+          <a:lstStyle/>
+          <a:p>
+            <a:fld id="{18BDFEC3-8487-43E8-A154-7C12CBC1FFF2}" type="slidenum">
+              <a:rPr lang="en-US"/>
+              <a:t>77</a:t>
+            </a:fld>
+            <a:endParaRPr lang="en-US"/>
+          </a:p>
+        </p:txBody>
+      </p:sp>
+    </p:spTree>
+  </p:cSld>
+</p:notes>
+</file>
+
+<file path=ppt/notesSlides/notesSlide77.xml><?xml version="1.0" encoding="utf-8"?>
+<p:notes xmlns:a="http://schemas.openxmlformats.org/drawingml/2006/main" xmlns:r="http://schemas.openxmlformats.org/officeDocument/2006/relationships" xmlns:p="http://schemas.openxmlformats.org/presentationml/2006/main">
+  <p:cSld>
+    <p:spTree>
+      <p:nvGrpSpPr>
+        <p:cNvPr id="1" name=""/>
+        <p:cNvGrpSpPr/>
+        <p:nvPr/>
+      </p:nvGrpSpPr>
+      <p:grpSpPr>
+        <a:xfrm>
+          <a:off x="0" y="0"/>
+          <a:ext cx="0" cy="0"/>
+          <a:chOff x="0" y="0"/>
+          <a:chExt cx="0" cy="0"/>
+        </a:xfrm>
+      </p:grpSpPr>
+      <p:sp>
+        <p:nvSpPr>
+          <p:cNvPr id="2" name="Slide Image Placeholder 1"/>
+          <p:cNvSpPr>
+            <a:spLocks noGrp="1" noRot="1" noChangeAspect="1"/>
+          </p:cNvSpPr>
+          <p:nvPr>
+            <p:ph type="sldImg"/>
+          </p:nvPr>
+        </p:nvSpPr>
+        <p:spPr/>
+      </p:sp>
+      <p:sp>
+        <p:nvSpPr>
+          <p:cNvPr id="3" name="Notes Placeholder 2"/>
+          <p:cNvSpPr>
+            <a:spLocks noGrp="1"/>
+          </p:cNvSpPr>
+          <p:nvPr>
+            <p:ph type="body" idx="1"/>
+          </p:nvPr>
+        </p:nvSpPr>
+        <p:spPr/>
+        <p:txBody>
+          <a:bodyPr/>
+          <a:lstStyle/>
+          <a:p>
+            <a:pPr lvl="0" indent="0" marL="0">
+              <a:buNone/>
+            </a:pPr>
+            <a:r>
+              <a:rPr/>
+              <a:t>Provenance notes: see the first slide of “Layer L2 — 16 to 30 November, eight critical tasks”.</a:t>
+            </a:r>
+          </a:p>
+        </p:txBody>
+      </p:sp>
+      <p:sp>
+        <p:nvSpPr>
+          <p:cNvPr id="4" name="Slide Number Placeholder 3"/>
+          <p:cNvSpPr>
+            <a:spLocks noGrp="1"/>
+          </p:cNvSpPr>
+          <p:nvPr>
+            <p:ph type="sldNum" sz="quarter" idx="10"/>
+          </p:nvPr>
+        </p:nvSpPr>
+        <p:spPr/>
+        <p:txBody>
+          <a:bodyPr/>
+          <a:lstStyle/>
+          <a:p>
+            <a:fld id="{18BDFEC3-8487-43E8-A154-7C12CBC1FFF2}" type="slidenum">
+              <a:rPr lang="en-US"/>
+              <a:t>78</a:t>
+            </a:fld>
+            <a:endParaRPr lang="en-US"/>
+          </a:p>
+        </p:txBody>
+      </p:sp>
+    </p:spTree>
+  </p:cSld>
+</p:notes>
+</file>
+
+<file path=ppt/notesSlides/notesSlide78.xml><?xml version="1.0" encoding="utf-8"?>
+<p:notes xmlns:a="http://schemas.openxmlformats.org/drawingml/2006/main" xmlns:r="http://schemas.openxmlformats.org/officeDocument/2006/relationships" xmlns:p="http://schemas.openxmlformats.org/presentationml/2006/main">
+  <p:cSld>
+    <p:spTree>
+      <p:nvGrpSpPr>
+        <p:cNvPr id="1" name=""/>
+        <p:cNvGrpSpPr/>
+        <p:nvPr/>
+      </p:nvGrpSpPr>
+      <p:grpSpPr>
+        <a:xfrm>
+          <a:off x="0" y="0"/>
+          <a:ext cx="0" cy="0"/>
+          <a:chOff x="0" y="0"/>
+          <a:chExt cx="0" cy="0"/>
+        </a:xfrm>
+      </p:grpSpPr>
+      <p:sp>
+        <p:nvSpPr>
+          <p:cNvPr id="2" name="Slide Image Placeholder 1"/>
+          <p:cNvSpPr>
+            <a:spLocks noGrp="1" noRot="1" noChangeAspect="1"/>
+          </p:cNvSpPr>
+          <p:nvPr>
+            <p:ph type="sldImg"/>
+          </p:nvPr>
+        </p:nvSpPr>
+        <p:spPr/>
+      </p:sp>
+      <p:sp>
+        <p:nvSpPr>
+          <p:cNvPr id="3" name="Notes Placeholder 2"/>
+          <p:cNvSpPr>
+            <a:spLocks noGrp="1"/>
+          </p:cNvSpPr>
+          <p:nvPr>
+            <p:ph type="body" idx="1"/>
+          </p:nvPr>
+        </p:nvSpPr>
+        <p:spPr/>
+        <p:txBody>
+          <a:bodyPr/>
+          <a:lstStyle/>
+          <a:p>
+            <a:pPr lvl="0" indent="0" marL="0">
+              <a:buNone/>
+            </a:pPr>
+            <a:r>
+              <a:rPr/>
+              <a:t>Provenance notes: see the first slide of “Layer L2 — 16 to 30 November, eight critical tasks”.</a:t>
+            </a:r>
+          </a:p>
+        </p:txBody>
+      </p:sp>
+      <p:sp>
+        <p:nvSpPr>
+          <p:cNvPr id="4" name="Slide Number Placeholder 3"/>
+          <p:cNvSpPr>
+            <a:spLocks noGrp="1"/>
+          </p:cNvSpPr>
+          <p:nvPr>
+            <p:ph type="sldNum" sz="quarter" idx="10"/>
+          </p:nvPr>
+        </p:nvSpPr>
+        <p:spPr/>
+        <p:txBody>
+          <a:bodyPr/>
+          <a:lstStyle/>
+          <a:p>
+            <a:fld id="{18BDFEC3-8487-43E8-A154-7C12CBC1FFF2}" type="slidenum">
+              <a:rPr lang="en-US"/>
+              <a:t>79</a:t>
+            </a:fld>
+            <a:endParaRPr lang="en-US"/>
+          </a:p>
+        </p:txBody>
+      </p:sp>
+    </p:spTree>
+  </p:cSld>
+</p:notes>
+</file>
+
+<file path=ppt/notesSlides/notesSlide79.xml><?xml version="1.0" encoding="utf-8"?>
+<p:notes xmlns:a="http://schemas.openxmlformats.org/drawingml/2006/main" xmlns:r="http://schemas.openxmlformats.org/officeDocument/2006/relationships" xmlns:p="http://schemas.openxmlformats.org/presentationml/2006/main">
+  <p:cSld>
+    <p:spTree>
+      <p:nvGrpSpPr>
+        <p:cNvPr id="1" name=""/>
+        <p:cNvGrpSpPr/>
+        <p:nvPr/>
+      </p:nvGrpSpPr>
+      <p:grpSpPr>
+        <a:xfrm>
+          <a:off x="0" y="0"/>
+          <a:ext cx="0" cy="0"/>
+          <a:chOff x="0" y="0"/>
+          <a:chExt cx="0" cy="0"/>
+        </a:xfrm>
+      </p:grpSpPr>
+      <p:sp>
+        <p:nvSpPr>
+          <p:cNvPr id="2" name="Slide Image Placeholder 1"/>
+          <p:cNvSpPr>
+            <a:spLocks noGrp="1" noRot="1" noChangeAspect="1"/>
+          </p:cNvSpPr>
+          <p:nvPr>
+            <p:ph type="sldImg"/>
+          </p:nvPr>
+        </p:nvSpPr>
+        <p:spPr/>
+      </p:sp>
+      <p:sp>
+        <p:nvSpPr>
+          <p:cNvPr id="3" name="Notes Placeholder 2"/>
+          <p:cNvSpPr>
+            <a:spLocks noGrp="1"/>
+          </p:cNvSpPr>
+          <p:nvPr>
+            <p:ph type="body" idx="1"/>
+          </p:nvPr>
+        </p:nvSpPr>
+        <p:spPr/>
+        <p:txBody>
+          <a:bodyPr/>
+          <a:lstStyle/>
+          <a:p>
+            <a:pPr lvl="0" indent="0" marL="0">
+              <a:buNone/>
+            </a:pPr>
+            <a:r>
+              <a:rPr/>
+              <a:t>Sequel slides added 2026-10-12 from the remediation-plan tracker (projects/crm-three-scenarios/sources/tracker2026-10-13_remediation-plan.csv, tag tracker-remediation-2026-10-13); verified second pass of 2026-10-12 (metagraph.json meta.verification.second_pass: claims C158–C171, 13 caveated, 1 confirmed, 0 refuted; side findings C172–C187 filed). The tracker is the user’s plan: admissible as what is planned, never as a measurement. Chunking: the user’s two lines ‘foundation : L1+L2’ / ‘E2:E4 : L3’ (brief.md section 5), read by this deck as Foundation engine of the 21/09/26 roadmap ↔ layers L1 + L2 and engines E2–E4 ↔ layer L3; the plan’s own Foundation phase (lines 2–6) is not named in the rule and is shown beside L1 as a reading. Deviation from the metagraph plan: the training-baseline tile cites C039 (21/09/26 tracker training rows at 0%, planned under V14/V17) and C016 (5 training/onboarding sessions, planned under V11/V14), and the foot line cites C158 (planned under V23); the Team B line quotes ‘we are not there yet’ from the brief (Image 4, brief.md line 100) under C150, added to view V25 at the QA pass of 2026-10-12.</a:t>
+            </a:r>
+          </a:p>
+          <a:p>
+            <a:pPr lvl="0" indent="0" marL="0">
+              <a:buNone/>
+            </a:pPr>
+          </a:p>
+          <a:p>
+            <a:pPr lvl="0" indent="0" marL="0">
+              <a:buNone/>
+            </a:pPr>
+            <a:r>
+              <a:rPr b="1"/>
+              <a:t>C150</a:t>
+            </a:r>
+            <a:r>
+              <a:rPr/>
+              <a:t> caveat · The stories and images are the user’s own visual metaphors (iceberg, sports team, speedometer, messy landlord, Team B); their wording is the brief’s, and where no measurement grounds an element the deck labels it ‘illustrative, not measured’. caveat → Stories and images are the user’s own metaphors (iceberg, sports team, speedometer, messy landlord, Team B) per BRIEF lines 62-101; the brief (lines 9-10) requires ungrounded elements to be labelled ‘illustrative, not measured’ — applied in the project docs, to be carried into the deck’s speaker notes when the deck is built. source: projects/crm-three-scenarios/brief.md · locator: lines 62-101 · as-of: 2026-10-01 · tag: brief-2026-10-01</a:t>
+            </a:r>
+          </a:p>
+          <a:p>
+            <a:pPr lvl="0" indent="0" marL="0">
+              <a:buNone/>
+            </a:pPr>
+          </a:p>
+          <a:p>
+            <a:pPr lvl="0" indent="0" marL="0">
+              <a:buNone/>
+            </a:pPr>
+            <a:r>
+              <a:rPr b="1"/>
+              <a:t>C016</a:t>
+            </a:r>
+            <a:r>
+              <a:rPr/>
+              <a:t> caveat · 5 training or onboarding sessions; nine reported weeks carry a training or onboarding session; ‘Onboarding and training colleagues’ 10 weeks on the list. caveat → 5 training/onboarding sessions delivered (slide 9); the ‘Onboarding and training colleagues’ item was active in 10 of 21 reported weeks (slides 13/23 strip; slide 23’s callout says nine) - the deck does not reconcile sessions with weeks. source: projects/crm-three-scenarios/sources/aya-work2026-pptx-extract.txt · locator: SLIDE 9 Text 15-16 · as-of: 2026-10-01 · tag: deck-aya-work2026-pptx</a:t>
+            </a:r>
+          </a:p>
+          <a:p>
+            <a:pPr lvl="0" indent="0" marL="0">
+              <a:buNone/>
+            </a:pPr>
+          </a:p>
+          <a:p>
+            <a:pPr lvl="0" indent="0" marL="0">
+              <a:buNone/>
+            </a:pPr>
+            <a:r>
+              <a:rPr b="1"/>
+              <a:t>C039</a:t>
+            </a:r>
+            <a:r>
+              <a:rPr/>
+              <a:t> caveat · Tracker: ‘[ADMIN] Train former users on duplicate prevention &amp; formatting standards*’ 0%; ‘[DOC] Train Miraex and Wecan companies on CRM usage’ 0%, not started. caveat → ‘[ADMIN] Train former users on duplicate prevention &amp; formatting standards’ 0% (status: in progress); ‘[DOC] Train Miraex and Wecan companies on CRM usage’ 0% (status: Not started). source: projects/crm-three-scenarios/sources/AYA_trackerv4_210926-xlsx-extract.txt · locator: sheet ‘RevOps 6-month plan (2)’ line 14 · as-of: 2026-10-01 · tag: tracker-210926</a:t>
+            </a:r>
+          </a:p>
+          <a:p>
+            <a:pPr lvl="0" indent="0" marL="0">
+              <a:buNone/>
+            </a:pPr>
+          </a:p>
+          <a:p>
+            <a:pPr lvl="0" indent="0" marL="0">
+              <a:buNone/>
+            </a:pPr>
+            <a:r>
+              <a:rPr b="1"/>
+              <a:t>C052</a:t>
+            </a:r>
+            <a:r>
+              <a:rPr/>
+              <a:t> confirmed · Missing fields across the 10,000 scanned contacts: email 1.7% (170), phone 53.3% (5,329), name 16.5% (1,651), company 31.4% (3,135). source: projects/crm-three-scenarios/sources/hs-logic-contact-health-2026-09.png · locator: Missing field prevalence row · as-of: 2026-10-01 · tag: hs-logic-screenshot-2026-09</a:t>
+            </a:r>
+          </a:p>
+          <a:p>
+            <a:pPr lvl="0" indent="0" marL="0">
+              <a:buNone/>
+            </a:pPr>
+          </a:p>
+          <a:p>
+            <a:pPr lvl="0" indent="0" marL="0">
+              <a:buNone/>
+            </a:pPr>
+            <a:r>
+              <a:rPr b="1"/>
+              <a:t>C062</a:t>
+            </a:r>
+            <a:r>
+              <a:rPr/>
+              <a:t> caveat · SEALSQ property set captured 2026-09-14 by direct HubSpot MCP calls; scope SealSQ Hardware, SealSQ Services, Icalps_hardware, SEALCOIN = 1,820 of 1,960 deals; 498 deal / 30 contact / 30 company / 14 ticket properties. caveat → Cite sealsq_property_set.json (meta.sealsq_scope: deals_in_scope 1,820 of deals_total 1,960; 7 pipelines: 728 HW + 303 Services + 788 Icalps_hardware + 1 SEALCOIN in scope, 140 Wisekey Services + PKI out of scope, Wise.Sat and Quantum &amp; AI 0) and its 498 deal / 30 contact / 30 company / 14 ticket property arrays, alongside line 3 of the md. source: SEALSQ_Property_Resource.md · locator: line 3 · as-of: 2026-10-01 · tag: sealsq-property-set-2026-09-14</a:t>
+            </a:r>
+          </a:p>
+          <a:p>
+            <a:pPr lvl="0" indent="0" marL="0">
+              <a:buNone/>
+            </a:pPr>
+          </a:p>
+          <a:p>
+            <a:pPr lvl="0" indent="0" marL="0">
+              <a:buNone/>
+            </a:pPr>
+            <a:r>
+              <a:rPr b="1"/>
+              <a:t>C158</a:t>
+            </a:r>
+            <a:r>
+              <a:rPr/>
+              <a:t> caveat · Remediation plan tracker dated 13-Oct-26: 22 tasks in four phases (Foundation 5, L1 5, L2 8, L3 4), engine ‘Remediation’ on every row, status pending, progress 0%, owner and priority empty on every row. caveat → Slide wording: ‘Tracker export dated 13-Oct-26 (plan start date; one day after this deck’s date): 22 tasks, all pending, 0% progress, no owner, no priority — the plan as written before its start, not a measurement of progress.’ source: projects/crm-three-scenarios/sources/tracker2026-10-13_remediation-plan.csv · locator: lines 2-23 (PHASE, ENGINE, OWNER, PROGRESS, Status columns) · as-of: 2026-10-12 · tag: tracker-remediation-2026-10-13</a:t>
+            </a:r>
+          </a:p>
+          <a:p>
+            <a:pPr lvl="0" indent="0" marL="0">
+              <a:buNone/>
+            </a:pPr>
+          </a:p>
+          <a:p>
+            <a:pPr lvl="0" indent="0" marL="0">
+              <a:buNone/>
+            </a:pPr>
+            <a:r>
+              <a:rPr b="1"/>
+              <a:t>C159</a:t>
+            </a:r>
+            <a:r>
+              <a:rPr/>
+              <a:t> caveat · Foundation (5 rows) and L1 (5 rows) start 13-Oct-26 with no end date or duration; L2 (8 rows) runs 16-Nov-26 to 30-Nov-26, 11 days, every row Critical = yes; L3 (4 rows) runs 01-Dec-26 to 20-Dec-26, 14 days, every row Critical = yes. caveat → Slide wording: ‘L2 16-30 Nov-26, estimated duration 11 (tracker column; equals the weekday count of the span, which is 15 calendar days); L3 1-20 Dec-26, estimated duration 14 (weekday count; 20 calendar days). Foundation and L1: start 13-Oct-26, no duration, no end date.’ caveat → Show as: ‘L2 16-30 Nov 2026 (tracker estimate 11 working days; 15 calendar days), L3 1-20 Dec 2026 (tracker estimate 14 working days; 20 calendar days, END falls on a Sunday)’. Label 11 and 14 as the plan’s ESTIMATED DURATION column. source: projects/crm-three-scenarios/sources/tracker2026-10-13_remediation-plan.csv · locator: lines 2-11 (START 13-Oct-26, END empty); lines 12-19 (16-Nov-26,11,30-Nov-26,…,yes); lines 20-23 (01-Dec-26,14,20-Dec-26,…,yes) · as-of: 2026-10-12 · tag: tracker-remediation-2026-10-13</a:t>
+            </a:r>
+          </a:p>
+          <a:p>
+            <a:pPr lvl="0" indent="0" marL="0">
+              <a:buNone/>
+            </a:pPr>
+          </a:p>
+          <a:p>
+            <a:pPr lvl="0" indent="0" marL="0">
+              <a:buNone/>
+            </a:pPr>
+            <a:r>
+              <a:rPr b="1"/>
+              <a:t>C165</a:t>
+            </a:r>
+            <a:r>
+              <a:rPr/>
+              <a:t> caveat · L3, four confirmation tasks (1-20 Dec, all critical): confirm 90% of SEALSQ companies are not orphaned; confirm 80% of SEALSQ contacts have at least email + telephone/LinkedIn; confirm all users are trained for CRM best practice in data; confirm all deals are properly documented and categorised (goal ‘Remove 50% of SEALSQ properties’). caveat → Slide wording: ‘L3 (1-20 Dec 2026, 4 rows, all Critical = yes, status pending, 0%, no owner) as written in the remediation tracker of 13-Oct-26: targets, not measurements. The SEALSQ-only baselines these confirmations assume (companies not orphaned, contacts with phone/LinkedIn, users trained, deals categorised) have not been measured by any admissible source.’ source: projects/crm-three-scenarios/sources/tracker2026-10-13_remediation-plan.csv · locator: lines 20-23 · as-of: 2026-10-12 · tag: tracker-remediation-2026-10-13</a:t>
+            </a:r>
+          </a:p>
+          <a:p>
+            <a:pPr lvl="0" indent="0" marL="0">
+              <a:buNone/>
+            </a:pPr>
+          </a:p>
+          <a:p>
+            <a:pPr lvl="0" indent="0" marL="0">
+              <a:buNone/>
+            </a:pPr>
+            <a:r>
+              <a:rPr b="1"/>
+              <a:t>C166</a:t>
+            </a:r>
+            <a:r>
+              <a:rPr/>
+              <a:t> caveat · The user’s chunking rule for the three appended slides: the Foundation engine of the 21/09/26 roadmap corresponds to layers L1 + L2 of the remediation plan; engines E2 to E4 correspond to layer L3. The engine ladder itself (Foundation -&gt; E2 rebuild a cleaner data structure -&gt; E3 leverage the data for GTM/RevOps -&gt; E4 self-autonomous AI-powered CRM) is the 21/09/26 tracker’s legend. caveat → Quote the rule as two lines attributed to the user (‘foundation : L1+L2’ / ‘E2:E4 : L3’, brief section 5) and label the engine-to-layer reading ‘orchestrator reading of the user’s rule’. Quote the legend verbatim: ‘E2 = After Foundation we start rebuilding a cleaner data structure’; ‘E3 = After the data we can now leverage the data for GTM and Reporting/RevOps’; ‘E4 = Self - autonomous AI powered CRM’. Add: ‘The five Foundation-phase rows of the plan (lines 2-6) are not named in the user’s rule.’ caveat → Show the mapping as ‘the user’s rule, read by the deck as: Foundation engine of the 21/09/26 roadmap &lt;-&gt; layers L1 + L2; engines E2-E4 &lt;-&gt; layer L3’ and state on the slide where the five rows of the CSV’s own Foundation phase (lines 2-6) are placed, since the rule names only L1, L2 and L3. source: projects/crm-three-scenarios/brief.md · locator: line 271 (section 5, user request verbatim) · as-of: 2026-10-12 · tag: brief-2026-10-12</a:t>
+            </a:r>
+          </a:p>
+          <a:p>
+            <a:pPr lvl="0" indent="0" marL="0">
+              <a:buNone/>
+            </a:pPr>
+          </a:p>
+          <a:p>
+            <a:pPr lvl="0" indent="0" marL="0">
+              <a:buNone/>
+            </a:pPr>
+            <a:r>
+              <a:rPr b="1"/>
+              <a:t>C170</a:t>
+            </a:r>
+            <a:r>
+              <a:rPr/>
+              <a:t> caveat · The plan’s ratio targets, read against the baselines already in the ledger: ‘50% of duplicates suppressed’ against 226 company and 281 contact duplicate clusters found by exact match in a capped 10,000-record scan (C051, C053: floors, not counts); ‘remove 25% of SEALSQ properties’ (L2) then ‘50%’ (L3) against the 2026-09-14 snapshots: 498 deal / 30 company / 30 contact properties in the SEALSQ-scope set (C062) and 565 DEAL / 40 COMPANY / 24 CONTACT rows in the Data-Toolkit schema (C086); ‘90% of SEALSQ companies not orphaned’ against 8.1% of companies carrying a deal portal-wide on 2026-10-01 (C112; SEALSQ-only baseline not measured); ‘80% of contacts with email + telephone/LinkedIn’ against phone missing on 53.3% and email on 1.7% of the first 10,000 contacts (C052, capped; LinkedIn not measured). caveat → Slide wording: ‘Baselines in the ledger, none SEALSQ-only: duplicates = 226 company and 281 contact exact-match clusters in the first 10,000 records scanned (floors, not totals; the plan counts only duplicates “with no record attached”); SEALSQ property set = 498 deal / 30 contact / 30 company properties captured 2026-09-14 (the portal-wide schema holds 565 deal / 40 company / 24 contact); companies with a deal = 1,105 of 13,679 portal-wide on 2026-10-01 (8.1%, derived from the 91.9% without); phone missing on 53.3% and email on 1.7% of the first 10,000 contacts, portal-wide; LinkedIn not measured.’ Write the C053 quote as ‘226 Duplicate clusters’ and keep the ‘[Data]’ prefixes in task quotes. caveat → Say ‘property entries’ for C086; state both orphan baselines (C112 portal-wide 91.9% without a deal; C053 9,150 of first 10,000 by Hs-Logic’s definition) and that the plan’s ‘orphaned’ is undefined; label all baselines portal-wide or capped, never SEALSQ-only; for the 80% target cite phone missing 53.3% and email 1.7% separately and mark LinkedIn and the compound as not measured. source: projects/crm-three-scenarios/sources/tracker2026-10-13_remediation-plan.csv · locator: lines 14, 18, 20, 21, 23 (Goal and TASK columns) · as-of: 2026-10-12 · tag: tracker-remediation-2026-10-13</a:t>
+            </a:r>
+          </a:p>
+          <a:p>
+            <a:pPr lvl="0" indent="0" marL="0">
+              <a:buNone/>
+            </a:pPr>
+          </a:p>
+          <a:p>
+            <a:pPr lvl="0" indent="0" marL="0">
+              <a:buNone/>
+            </a:pPr>
+            <a:r>
+              <a:rPr b="1"/>
+              <a:t>Illustrative, not measured:</a:t>
+            </a:r>
+            <a:r>
+              <a:rPr/>
+              <a:t> the gating of engines E2–E4 by the four L3 confirmations is this deck’s reading of the user’s mapping (‘E2:E4 : L3’); the engine legend is the 21/09/26 tracker’s (C166). The remediation plan has not started (project start 13-Oct-26), so no L3 outcome is measured.</a:t>
+            </a:r>
+          </a:p>
+        </p:txBody>
+      </p:sp>
+      <p:sp>
+        <p:nvSpPr>
+          <p:cNvPr id="4" name="Slide Number Placeholder 3"/>
+          <p:cNvSpPr>
+            <a:spLocks noGrp="1"/>
+          </p:cNvSpPr>
+          <p:nvPr>
+            <p:ph type="sldNum" sz="quarter" idx="10"/>
+          </p:nvPr>
+        </p:nvSpPr>
+        <p:spPr/>
+        <p:txBody>
+          <a:bodyPr/>
+          <a:lstStyle/>
+          <a:p>
+            <a:fld id="{18BDFEC3-8487-43E8-A154-7C12CBC1FFF2}" type="slidenum">
+              <a:rPr lang="en-US"/>
+              <a:t>80</a:t>
             </a:fld>
             <a:endParaRPr lang="en-US"/>
           </a:p>
@@ -11765,6 +12114,1424 @@
             <a:fld id="{18BDFEC3-8487-43E8-A154-7C12CBC1FFF2}" type="slidenum">
               <a:rPr lang="en-US"/>
               <a:t>9</a:t>
+            </a:fld>
+            <a:endParaRPr lang="en-US"/>
+          </a:p>
+        </p:txBody>
+      </p:sp>
+    </p:spTree>
+  </p:cSld>
+</p:notes>
+</file>
+
+<file path=ppt/notesSlides/notesSlide80.xml><?xml version="1.0" encoding="utf-8"?>
+<p:notes xmlns:a="http://schemas.openxmlformats.org/drawingml/2006/main" xmlns:r="http://schemas.openxmlformats.org/officeDocument/2006/relationships" xmlns:p="http://schemas.openxmlformats.org/presentationml/2006/main">
+  <p:cSld>
+    <p:spTree>
+      <p:nvGrpSpPr>
+        <p:cNvPr id="1" name=""/>
+        <p:cNvGrpSpPr/>
+        <p:nvPr/>
+      </p:nvGrpSpPr>
+      <p:grpSpPr>
+        <a:xfrm>
+          <a:off x="0" y="0"/>
+          <a:ext cx="0" cy="0"/>
+          <a:chOff x="0" y="0"/>
+          <a:chExt cx="0" cy="0"/>
+        </a:xfrm>
+      </p:grpSpPr>
+      <p:sp>
+        <p:nvSpPr>
+          <p:cNvPr id="2" name="Slide Image Placeholder 1"/>
+          <p:cNvSpPr>
+            <a:spLocks noGrp="1" noRot="1" noChangeAspect="1"/>
+          </p:cNvSpPr>
+          <p:nvPr>
+            <p:ph type="sldImg"/>
+          </p:nvPr>
+        </p:nvSpPr>
+        <p:spPr/>
+      </p:sp>
+      <p:sp>
+        <p:nvSpPr>
+          <p:cNvPr id="3" name="Notes Placeholder 2"/>
+          <p:cNvSpPr>
+            <a:spLocks noGrp="1"/>
+          </p:cNvSpPr>
+          <p:nvPr>
+            <p:ph type="body" idx="1"/>
+          </p:nvPr>
+        </p:nvSpPr>
+        <p:spPr/>
+        <p:txBody>
+          <a:bodyPr/>
+          <a:lstStyle/>
+          <a:p>
+            <a:pPr lvl="0" indent="0" marL="0">
+              <a:buNone/>
+            </a:pPr>
+            <a:r>
+              <a:rPr/>
+              <a:t>Provenance notes: see the first slide of “Layer L3 — 1 to 20 December, four confirmations”.</a:t>
+            </a:r>
+          </a:p>
+        </p:txBody>
+      </p:sp>
+      <p:sp>
+        <p:nvSpPr>
+          <p:cNvPr id="4" name="Slide Number Placeholder 3"/>
+          <p:cNvSpPr>
+            <a:spLocks noGrp="1"/>
+          </p:cNvSpPr>
+          <p:nvPr>
+            <p:ph type="sldNum" sz="quarter" idx="10"/>
+          </p:nvPr>
+        </p:nvSpPr>
+        <p:spPr/>
+        <p:txBody>
+          <a:bodyPr/>
+          <a:lstStyle/>
+          <a:p>
+            <a:fld id="{18BDFEC3-8487-43E8-A154-7C12CBC1FFF2}" type="slidenum">
+              <a:rPr lang="en-US"/>
+              <a:t>81</a:t>
+            </a:fld>
+            <a:endParaRPr lang="en-US"/>
+          </a:p>
+        </p:txBody>
+      </p:sp>
+    </p:spTree>
+  </p:cSld>
+</p:notes>
+</file>
+
+<file path=ppt/notesSlides/notesSlide81.xml><?xml version="1.0" encoding="utf-8"?>
+<p:notes xmlns:a="http://schemas.openxmlformats.org/drawingml/2006/main" xmlns:r="http://schemas.openxmlformats.org/officeDocument/2006/relationships" xmlns:p="http://schemas.openxmlformats.org/presentationml/2006/main">
+  <p:cSld>
+    <p:spTree>
+      <p:nvGrpSpPr>
+        <p:cNvPr id="1" name=""/>
+        <p:cNvGrpSpPr/>
+        <p:nvPr/>
+      </p:nvGrpSpPr>
+      <p:grpSpPr>
+        <a:xfrm>
+          <a:off x="0" y="0"/>
+          <a:ext cx="0" cy="0"/>
+          <a:chOff x="0" y="0"/>
+          <a:chExt cx="0" cy="0"/>
+        </a:xfrm>
+      </p:grpSpPr>
+      <p:sp>
+        <p:nvSpPr>
+          <p:cNvPr id="2" name="Slide Image Placeholder 1"/>
+          <p:cNvSpPr>
+            <a:spLocks noGrp="1" noRot="1" noChangeAspect="1"/>
+          </p:cNvSpPr>
+          <p:nvPr>
+            <p:ph type="sldImg"/>
+          </p:nvPr>
+        </p:nvSpPr>
+        <p:spPr/>
+      </p:sp>
+      <p:sp>
+        <p:nvSpPr>
+          <p:cNvPr id="3" name="Notes Placeholder 2"/>
+          <p:cNvSpPr>
+            <a:spLocks noGrp="1"/>
+          </p:cNvSpPr>
+          <p:nvPr>
+            <p:ph type="body" idx="1"/>
+          </p:nvPr>
+        </p:nvSpPr>
+        <p:spPr/>
+        <p:txBody>
+          <a:bodyPr/>
+          <a:lstStyle/>
+          <a:p>
+            <a:pPr lvl="0" indent="0" marL="0">
+              <a:buNone/>
+            </a:pPr>
+            <a:r>
+              <a:rPr/>
+              <a:t>Provenance notes: see the first slide of “Layer L3 — 1 to 20 December, four confirmations”.</a:t>
+            </a:r>
+          </a:p>
+        </p:txBody>
+      </p:sp>
+      <p:sp>
+        <p:nvSpPr>
+          <p:cNvPr id="4" name="Slide Number Placeholder 3"/>
+          <p:cNvSpPr>
+            <a:spLocks noGrp="1"/>
+          </p:cNvSpPr>
+          <p:nvPr>
+            <p:ph type="sldNum" sz="quarter" idx="10"/>
+          </p:nvPr>
+        </p:nvSpPr>
+        <p:spPr/>
+        <p:txBody>
+          <a:bodyPr/>
+          <a:lstStyle/>
+          <a:p>
+            <a:fld id="{18BDFEC3-8487-43E8-A154-7C12CBC1FFF2}" type="slidenum">
+              <a:rPr lang="en-US"/>
+              <a:t>82</a:t>
+            </a:fld>
+            <a:endParaRPr lang="en-US"/>
+          </a:p>
+        </p:txBody>
+      </p:sp>
+    </p:spTree>
+  </p:cSld>
+</p:notes>
+</file>
+
+<file path=ppt/notesSlides/notesSlide82.xml><?xml version="1.0" encoding="utf-8"?>
+<p:notes xmlns:a="http://schemas.openxmlformats.org/drawingml/2006/main" xmlns:r="http://schemas.openxmlformats.org/officeDocument/2006/relationships" xmlns:p="http://schemas.openxmlformats.org/presentationml/2006/main">
+  <p:cSld>
+    <p:spTree>
+      <p:nvGrpSpPr>
+        <p:cNvPr id="1" name=""/>
+        <p:cNvGrpSpPr/>
+        <p:nvPr/>
+      </p:nvGrpSpPr>
+      <p:grpSpPr>
+        <a:xfrm>
+          <a:off x="0" y="0"/>
+          <a:ext cx="0" cy="0"/>
+          <a:chOff x="0" y="0"/>
+          <a:chExt cx="0" cy="0"/>
+        </a:xfrm>
+      </p:grpSpPr>
+      <p:sp>
+        <p:nvSpPr>
+          <p:cNvPr id="2" name="Slide Image Placeholder 1"/>
+          <p:cNvSpPr>
+            <a:spLocks noGrp="1" noRot="1" noChangeAspect="1"/>
+          </p:cNvSpPr>
+          <p:nvPr>
+            <p:ph type="sldImg"/>
+          </p:nvPr>
+        </p:nvSpPr>
+        <p:spPr/>
+      </p:sp>
+      <p:sp>
+        <p:nvSpPr>
+          <p:cNvPr id="3" name="Notes Placeholder 2"/>
+          <p:cNvSpPr>
+            <a:spLocks noGrp="1"/>
+          </p:cNvSpPr>
+          <p:nvPr>
+            <p:ph type="body" idx="1"/>
+          </p:nvPr>
+        </p:nvSpPr>
+        <p:spPr/>
+        <p:txBody>
+          <a:bodyPr/>
+          <a:lstStyle/>
+          <a:p>
+            <a:pPr lvl="0" indent="0" marL="0">
+              <a:buNone/>
+            </a:pPr>
+            <a:r>
+              <a:rPr/>
+              <a:t>Provenance notes: see the first slide of “Layer L3 — 1 to 20 December, four confirmations”.</a:t>
+            </a:r>
+          </a:p>
+        </p:txBody>
+      </p:sp>
+      <p:sp>
+        <p:nvSpPr>
+          <p:cNvPr id="4" name="Slide Number Placeholder 3"/>
+          <p:cNvSpPr>
+            <a:spLocks noGrp="1"/>
+          </p:cNvSpPr>
+          <p:nvPr>
+            <p:ph type="sldNum" sz="quarter" idx="10"/>
+          </p:nvPr>
+        </p:nvSpPr>
+        <p:spPr/>
+        <p:txBody>
+          <a:bodyPr/>
+          <a:lstStyle/>
+          <a:p>
+            <a:fld id="{18BDFEC3-8487-43E8-A154-7C12CBC1FFF2}" type="slidenum">
+              <a:rPr lang="en-US"/>
+              <a:t>83</a:t>
+            </a:fld>
+            <a:endParaRPr lang="en-US"/>
+          </a:p>
+        </p:txBody>
+      </p:sp>
+    </p:spTree>
+  </p:cSld>
+</p:notes>
+</file>
+
+<file path=ppt/notesSlides/notesSlide83.xml><?xml version="1.0" encoding="utf-8"?>
+<p:notes xmlns:a="http://schemas.openxmlformats.org/drawingml/2006/main" xmlns:r="http://schemas.openxmlformats.org/officeDocument/2006/relationships" xmlns:p="http://schemas.openxmlformats.org/presentationml/2006/main">
+  <p:cSld>
+    <p:spTree>
+      <p:nvGrpSpPr>
+        <p:cNvPr id="1" name=""/>
+        <p:cNvGrpSpPr/>
+        <p:nvPr/>
+      </p:nvGrpSpPr>
+      <p:grpSpPr>
+        <a:xfrm>
+          <a:off x="0" y="0"/>
+          <a:ext cx="0" cy="0"/>
+          <a:chOff x="0" y="0"/>
+          <a:chExt cx="0" cy="0"/>
+        </a:xfrm>
+      </p:grpSpPr>
+      <p:sp>
+        <p:nvSpPr>
+          <p:cNvPr id="2" name="Slide Image Placeholder 1"/>
+          <p:cNvSpPr>
+            <a:spLocks noGrp="1" noRot="1" noChangeAspect="1"/>
+          </p:cNvSpPr>
+          <p:nvPr>
+            <p:ph type="sldImg"/>
+          </p:nvPr>
+        </p:nvSpPr>
+        <p:spPr/>
+      </p:sp>
+      <p:sp>
+        <p:nvSpPr>
+          <p:cNvPr id="3" name="Notes Placeholder 2"/>
+          <p:cNvSpPr>
+            <a:spLocks noGrp="1"/>
+          </p:cNvSpPr>
+          <p:nvPr>
+            <p:ph type="body" idx="1"/>
+          </p:nvPr>
+        </p:nvSpPr>
+        <p:spPr/>
+        <p:txBody>
+          <a:bodyPr/>
+          <a:lstStyle/>
+          <a:p>
+            <a:pPr lvl="0" indent="0" marL="0">
+              <a:buNone/>
+            </a:pPr>
+            <a:r>
+              <a:rPr b="1"/>
+              <a:t>C055</a:t>
+            </a:r>
+            <a:r>
+              <a:rPr/>
+              <a:t> caveat · Duplicate detection is exact-match on normalised name / domain / email (lowercase, whitespace collapsed) and duplicate_ids under-count for clusters larger than 10; the 226 / 281 clusters are a floor, not a count. caveat → Reword: ‘Duplicate detection is exact-match on lowercased, whitespace-collapsed name/domain (companies) or email/full name (contacts), so fuzzy duplicates are missed and the scan stops at 10,000 records: the real duplicate volume is at least what is shown. Separately, the exported duplicate_ids list is truncated to 10 members per cluster (README line 75), so the ID list, not the cluster count, under-counts large clusters.’ source: README.md · locator: line 74 · as-of: 2026-10-01 · tag: repo-hs-logic</a:t>
+            </a:r>
+          </a:p>
+          <a:p>
+            <a:pPr lvl="0" indent="0" marL="0">
+              <a:buNone/>
+            </a:pPr>
+          </a:p>
+          <a:p>
+            <a:pPr lvl="0" indent="0" marL="0">
+              <a:buNone/>
+            </a:pPr>
+            <a:r>
+              <a:rPr b="1"/>
+              <a:t>C056</a:t>
+            </a:r>
+            <a:r>
+              <a:rPr/>
+              <a:t> caveat · Both scans stop at CAP = 10000 and flag ‘cap reached — results partial’; against live totals the company scan covered 10,000 of 13,679 (73.1%) and the contact scan 10,000 of 26,293 (38.0%), paged in default list order (not random). caveat → Use ‘contact scan 10,000 of ~26.3k (38.0%; live total 26,294 on 2026-10-01, totals drift daily)’ and note that the denominators are live 2026-10-01 counts while the scans date from 2026-09. source: hubspot.py · locator: lines 320, 465, 536, 698 · as-of: 2026-10-01 · tag: repo-hs-logic</a:t>
+            </a:r>
+          </a:p>
+          <a:p>
+            <a:pPr lvl="0" indent="0" marL="0">
+              <a:buNone/>
+            </a:pPr>
+          </a:p>
+          <a:p>
+            <a:pPr lvl="0" indent="0" marL="0">
+              <a:buNone/>
+            </a:pPr>
+            <a:r>
+              <a:rPr b="1"/>
+              <a:t>C062</a:t>
+            </a:r>
+            <a:r>
+              <a:rPr/>
+              <a:t> caveat · SEALSQ property set captured 2026-09-14 by direct HubSpot MCP calls; scope SealSQ Hardware, SealSQ Services, Icalps_hardware, SEALCOIN = 1,820 of 1,960 deals; 498 deal / 30 contact / 30 company / 14 ticket properties. caveat → Cite sealsq_property_set.json (meta.sealsq_scope: deals_in_scope 1,820 of deals_total 1,960; 7 pipelines: 728 HW + 303 Services + 788 Icalps_hardware + 1 SEALCOIN in scope, 140 Wisekey Services + PKI out of scope, Wise.Sat and Quantum &amp; AI 0) and its 498 deal / 30 contact / 30 company / 14 ticket property arrays, alongside line 3 of the md. source: SEALSQ_Property_Resource.md · locator: line 3 · as-of: 2026-10-01 · tag: sealsq-property-set-2026-09-14</a:t>
+            </a:r>
+          </a:p>
+          <a:p>
+            <a:pPr lvl="0" indent="0" marL="0">
+              <a:buNone/>
+            </a:pPr>
+          </a:p>
+          <a:p>
+            <a:pPr lvl="0" indent="0" marL="0">
+              <a:buNone/>
+            </a:pPr>
+            <a:r>
+              <a:rPr b="1"/>
+              <a:t>C079</a:t>
+            </a:r>
+            <a:r>
+              <a:rPr/>
+              <a:t> caveat · 822 deals have no product assigned (largest ‘product’ bucket); Breeze free-text matching on deal names under-counts (2 vs 32 for ‘QVault TPM IOT’). caveat → 822 of 1,960 deals (42%, whole portal, open and closed, capture 2026-09-14) have no prod___product_name_new_; Breeze free-text on the deal name returned 2 vs 32 by property filter for QVault TPM IOT. source: Prompt_Resource.md · locator: lines 9-12, 79 · as-of: 2026-10-01 · tag: sealsq-property-set-2026-09-14</a:t>
+            </a:r>
+          </a:p>
+          <a:p>
+            <a:pPr lvl="0" indent="0" marL="0">
+              <a:buNone/>
+            </a:pPr>
+          </a:p>
+          <a:p>
+            <a:pPr lvl="0" indent="0" marL="0">
+              <a:buNone/>
+            </a:pPr>
+            <a:r>
+              <a:rPr b="1"/>
+              <a:t>C087</a:t>
+            </a:r>
+            <a:r>
+              <a:rPr/>
+              <a:t> caveat · The Data-Toolkit encodes the S1 sampling-probe practice: 14 HubSQL rules (one object per query, no JOIN, max 2 associated objects), a 10,000-result ceiling on the CRM Search API, and a prompt template forbidding dealname matching. caveat → HubSQL practice: 14 cheat-sheet rules (one object per query, no JOIN/UNION/subqueries, max 2 associated object types); dealname matching is a flagged last resort, never for product counts. Separately, the CRM Search API (used by Hs-Logic and the hermes agent) stops at 10,000 results per query. source: Prompt_Resource.md · locator: lines 175-190, 215-225 · as-of: 2026-10-01 · tag: sealsq-property-set-2026-09-14</a:t>
+            </a:r>
+          </a:p>
+          <a:p>
+            <a:pPr lvl="0" indent="0" marL="0">
+              <a:buNone/>
+            </a:pPr>
+          </a:p>
+          <a:p>
+            <a:pPr lvl="0" indent="0" marL="0">
+              <a:buNone/>
+            </a:pPr>
+            <a:r>
+              <a:rPr b="1"/>
+              <a:t>C089</a:t>
+            </a:r>
+            <a:r>
+              <a:rPr/>
+              <a:t> caveat · Object volumes at the 2026-09-14 capture: 25,782 contacts (SEALSQ flag set on 176 = 0.68%), 13,422 companies, 1,960 deals. caveat → Add locator: HubSpot-Ruler/SEALSQ/sealsq_property_set.json meta.captured=‘2026-09-14’, meta.sealsq_scope.deals_total=1960 (per pipeline: SealSQ HW 728, Services 303, Icalps 788, SEALCOIN 1, Wisekey Services+PKI 140, Wise.Sat 0, Quantum &amp; AI 0). State that 25,782 / 13,422 are the denominators used in the property utilisation columns. source: SEALSQ_Property_Resource.md · locator: lines 238, 273 · as-of: 2026-10-01 · tag: sealsq-property-set-2026-09-14</a:t>
+            </a:r>
+          </a:p>
+          <a:p>
+            <a:pPr lvl="0" indent="0" marL="0">
+              <a:buNone/>
+            </a:pPr>
+          </a:p>
+          <a:p>
+            <a:pPr lvl="0" indent="0" marL="0">
+              <a:buNone/>
+            </a:pPr>
+            <a:r>
+              <a:rPr b="1"/>
+              <a:t>C091</a:t>
+            </a:r>
+            <a:r>
+              <a:rPr/>
+              <a:t> confirmed · Total deals in the portal: 1,972 (live, 2026-10-01). source: live-hubsql-2026-10-01 · locator: SELECT COUNT(*) FROM DEAL · as-of: 2026-10-01 · tag: live-hubsql-2026-10-01</a:t>
+            </a:r>
+          </a:p>
+          <a:p>
+            <a:pPr lvl="0" indent="0" marL="0">
+              <a:buNone/>
+            </a:pPr>
+          </a:p>
+          <a:p>
+            <a:pPr lvl="0" indent="0" marL="0">
+              <a:buNone/>
+            </a:pPr>
+            <a:r>
+              <a:rPr b="1"/>
+              <a:t>C103</a:t>
+            </a:r>
+            <a:r>
+              <a:rPr/>
+              <a:t> confirmed · The year fields are non-null on virtually every deal because they are calculated fields evaluating to 0 (pipeline_2029__k__ 1,972; calculation___pipeline_2025__k__ 1,972; calculation___cumulative_pipeline_2026 1,964; calculation___pipeline_2026__k__ 1,972), so IS NOT NULL cannot measure fill. source: live-hubsql-2026-10-01 · locator: SELECT COUNT(*) FROM DEAL WHERE pipeline_2029__k__ IS NOT NULL · as-of: 2026-10-01 · tag: live-hubsql-2026-10-01</a:t>
+            </a:r>
+          </a:p>
+          <a:p>
+            <a:pPr lvl="0" indent="0" marL="0">
+              <a:buNone/>
+            </a:pPr>
+          </a:p>
+          <a:p>
+            <a:pPr lvl="0" indent="0" marL="0">
+              <a:buNone/>
+            </a:pPr>
+            <a:r>
+              <a:rPr b="1"/>
+              <a:t>C108</a:t>
+            </a:r>
+            <a:r>
+              <a:rPr/>
+              <a:t> confirmed · Sum of year fields over ALL deals (k$, live): Pipeline 2029 79,646.67; Pipeline 2025 78,512.3; ‘Cumulative Pipeline 2027’ [calculation___cumulative_pipeline_2026] 434,772.8; Pipeline 2026 103,895.2. source: live-hubsql-2026-10-01 · locator: SELECT SUM(pipeline_2029__k__), SUM(calculation___pipeline_2025__k__), SUM(calculation___cumulative_pipeline_2026), SUM(calculation___pipeline_2026__k__) FROM DEAL · as-of: 2026-10-01 · tag: live-hubsql-2026-10-01</a:t>
+            </a:r>
+          </a:p>
+          <a:p>
+            <a:pPr lvl="0" indent="0" marL="0">
+              <a:buNone/>
+            </a:pPr>
+          </a:p>
+          <a:p>
+            <a:pPr lvl="0" indent="0" marL="0">
+              <a:buNone/>
+            </a:pPr>
+            <a:r>
+              <a:rPr b="1"/>
+              <a:t>C116</a:t>
+            </a:r>
+            <a:r>
+              <a:rPr/>
+              <a:t> caveat · The HubSpot SQL probe has traps: COUNT(hs_object_id) is executed as a SUM of record IDs (18944500703385 for SealSQ Hardware vs 730 with COUNT(*)), and association filters are silently dropped in GROUP BY and some single-filter queries; only COUNT(*) results are used as facts. caveat → Reword: ‘association filters are silently dropped when combined with GROUP BY (verified 2026-10-01: grouped counts sum to the full 1,972); the plain single-filter COUNT(*) honoured the filter (160) in the verification run.’ source: live-hubsql-2026-10-01 · locator: SELECT pipeline, COUNT(hs_object_id) FROM DEAL GROUP BY pipeline · as-of: 2026-10-01 · tag: live-hubsql-2026-10-01</a:t>
+            </a:r>
+          </a:p>
+        </p:txBody>
+      </p:sp>
+      <p:sp>
+        <p:nvSpPr>
+          <p:cNvPr id="4" name="Slide Number Placeholder 3"/>
+          <p:cNvSpPr>
+            <a:spLocks noGrp="1"/>
+          </p:cNvSpPr>
+          <p:nvPr>
+            <p:ph type="sldNum" sz="quarter" idx="10"/>
+          </p:nvPr>
+        </p:nvSpPr>
+        <p:spPr/>
+        <p:txBody>
+          <a:bodyPr/>
+          <a:lstStyle/>
+          <a:p>
+            <a:fld id="{18BDFEC3-8487-43E8-A154-7C12CBC1FFF2}" type="slidenum">
+              <a:rPr lang="en-US"/>
+              <a:t>84</a:t>
+            </a:fld>
+            <a:endParaRPr lang="en-US"/>
+          </a:p>
+        </p:txBody>
+      </p:sp>
+    </p:spTree>
+  </p:cSld>
+</p:notes>
+</file>
+
+<file path=ppt/notesSlides/notesSlide84.xml><?xml version="1.0" encoding="utf-8"?>
+<p:notes xmlns:a="http://schemas.openxmlformats.org/drawingml/2006/main" xmlns:r="http://schemas.openxmlformats.org/officeDocument/2006/relationships" xmlns:p="http://schemas.openxmlformats.org/presentationml/2006/main">
+  <p:cSld>
+    <p:spTree>
+      <p:nvGrpSpPr>
+        <p:cNvPr id="1" name=""/>
+        <p:cNvGrpSpPr/>
+        <p:nvPr/>
+      </p:nvGrpSpPr>
+      <p:grpSpPr>
+        <a:xfrm>
+          <a:off x="0" y="0"/>
+          <a:ext cx="0" cy="0"/>
+          <a:chOff x="0" y="0"/>
+          <a:chExt cx="0" cy="0"/>
+        </a:xfrm>
+      </p:grpSpPr>
+      <p:sp>
+        <p:nvSpPr>
+          <p:cNvPr id="2" name="Slide Image Placeholder 1"/>
+          <p:cNvSpPr>
+            <a:spLocks noGrp="1" noRot="1" noChangeAspect="1"/>
+          </p:cNvSpPr>
+          <p:nvPr>
+            <p:ph type="sldImg"/>
+          </p:nvPr>
+        </p:nvSpPr>
+        <p:spPr/>
+      </p:sp>
+      <p:sp>
+        <p:nvSpPr>
+          <p:cNvPr id="3" name="Notes Placeholder 2"/>
+          <p:cNvSpPr>
+            <a:spLocks noGrp="1"/>
+          </p:cNvSpPr>
+          <p:nvPr>
+            <p:ph type="body" idx="1"/>
+          </p:nvPr>
+        </p:nvSpPr>
+        <p:spPr/>
+        <p:txBody>
+          <a:bodyPr/>
+          <a:lstStyle/>
+          <a:p>
+            <a:pPr lvl="0" indent="0" marL="0">
+              <a:buNone/>
+            </a:pPr>
+            <a:r>
+              <a:rPr/>
+              <a:t>Provenance notes: see the first slide of “Scans are capped, snapshots are dated, HubSQL has traps”.</a:t>
+            </a:r>
+          </a:p>
+        </p:txBody>
+      </p:sp>
+      <p:sp>
+        <p:nvSpPr>
+          <p:cNvPr id="4" name="Slide Number Placeholder 3"/>
+          <p:cNvSpPr>
+            <a:spLocks noGrp="1"/>
+          </p:cNvSpPr>
+          <p:nvPr>
+            <p:ph type="sldNum" sz="quarter" idx="10"/>
+          </p:nvPr>
+        </p:nvSpPr>
+        <p:spPr/>
+        <p:txBody>
+          <a:bodyPr/>
+          <a:lstStyle/>
+          <a:p>
+            <a:fld id="{18BDFEC3-8487-43E8-A154-7C12CBC1FFF2}" type="slidenum">
+              <a:rPr lang="en-US"/>
+              <a:t>85</a:t>
+            </a:fld>
+            <a:endParaRPr lang="en-US"/>
+          </a:p>
+        </p:txBody>
+      </p:sp>
+    </p:spTree>
+  </p:cSld>
+</p:notes>
+</file>
+
+<file path=ppt/notesSlides/notesSlide85.xml><?xml version="1.0" encoding="utf-8"?>
+<p:notes xmlns:a="http://schemas.openxmlformats.org/drawingml/2006/main" xmlns:r="http://schemas.openxmlformats.org/officeDocument/2006/relationships" xmlns:p="http://schemas.openxmlformats.org/presentationml/2006/main">
+  <p:cSld>
+    <p:spTree>
+      <p:nvGrpSpPr>
+        <p:cNvPr id="1" name=""/>
+        <p:cNvGrpSpPr/>
+        <p:nvPr/>
+      </p:nvGrpSpPr>
+      <p:grpSpPr>
+        <a:xfrm>
+          <a:off x="0" y="0"/>
+          <a:ext cx="0" cy="0"/>
+          <a:chOff x="0" y="0"/>
+          <a:chExt cx="0" cy="0"/>
+        </a:xfrm>
+      </p:grpSpPr>
+      <p:sp>
+        <p:nvSpPr>
+          <p:cNvPr id="2" name="Slide Image Placeholder 1"/>
+          <p:cNvSpPr>
+            <a:spLocks noGrp="1" noRot="1" noChangeAspect="1"/>
+          </p:cNvSpPr>
+          <p:nvPr>
+            <p:ph type="sldImg"/>
+          </p:nvPr>
+        </p:nvSpPr>
+        <p:spPr/>
+      </p:sp>
+      <p:sp>
+        <p:nvSpPr>
+          <p:cNvPr id="3" name="Notes Placeholder 2"/>
+          <p:cNvSpPr>
+            <a:spLocks noGrp="1"/>
+          </p:cNvSpPr>
+          <p:nvPr>
+            <p:ph type="body" idx="1"/>
+          </p:nvPr>
+        </p:nvSpPr>
+        <p:spPr/>
+        <p:txBody>
+          <a:bodyPr/>
+          <a:lstStyle/>
+          <a:p>
+            <a:pPr lvl="0" indent="0" marL="0">
+              <a:buNone/>
+            </a:pPr>
+            <a:r>
+              <a:rPr/>
+              <a:t>Deviation from the metagraph plan: the source table repeats the price claims of V17 / V17b (slides 17–18; C118–C144) so each URL carries the id of the claim it grounds; C146 (refuted) is not cited.</a:t>
+            </a:r>
+          </a:p>
+          <a:p>
+            <a:pPr lvl="0" indent="0" marL="0">
+              <a:buNone/>
+            </a:pPr>
+          </a:p>
+          <a:p>
+            <a:pPr lvl="0" indent="0" marL="0">
+              <a:buNone/>
+            </a:pPr>
+            <a:r>
+              <a:rPr b="1"/>
+              <a:t>C145</a:t>
+            </a:r>
+            <a:r>
+              <a:rPr/>
+              <a:t> confirmed · Not priced — to be quoted: Data Hub onboarding (no fee shown on the Data Hub pricing page; Sales Hub shows USD 1,500 / 3,500), the hermes VPS, handover hours, exit costs (StackSync and Data Hub are billed annually, so exposure is the remaining term), per-record credit consumption, the seat count needed, and the portal’s current tier delta. source: cost-lines.md · locator: ‘Confidence summary’ section · as-of: 2026-10-01 · tag: project-docs-2026-10-01</a:t>
+            </a:r>
+          </a:p>
+          <a:p>
+            <a:pPr lvl="0" indent="0" marL="0">
+              <a:buNone/>
+            </a:pPr>
+          </a:p>
+          <a:p>
+            <a:pPr lvl="0" indent="0" marL="0">
+              <a:buNone/>
+            </a:pPr>
+            <a:r>
+              <a:rPr b="1"/>
+              <a:t>C118</a:t>
+            </a:r>
+            <a:r>
+              <a:rPr/>
+              <a:t> confirmed · HubSpot Data Hub Starter: starts at USD 7 per seat per month (annual) or USD 20 per seat per month (monthly); 500 credits. source: https://www.hubspot.com/pricing/data · locator: as of 2026-10-01, Starter card · as-of: 2026-10-01 · tag: public-pricing-https://www.hubspot.com/pricing/data</a:t>
+            </a:r>
+          </a:p>
+          <a:p>
+            <a:pPr lvl="0" indent="0" marL="0">
+              <a:buNone/>
+            </a:pPr>
+          </a:p>
+          <a:p>
+            <a:pPr lvl="0" indent="0" marL="0">
+              <a:buNone/>
+            </a:pPr>
+            <a:r>
+              <a:rPr b="1"/>
+              <a:t>C120</a:t>
+            </a:r>
+            <a:r>
+              <a:rPr/>
+              <a:t> confirmed · HubSpot Data Hub Enterprise: starts at USD 2,000 per month (annual); includes 1 Core Seat; additional Core Seats from USD 75 per month; 10,000 credits; adds bi-directional Snowflake / BigQuery / AWS S3 warehouse integrations. source: https://www.hubspot.com/pricing/data/enterprise · locator: as of 2026-10-01 · as-of: 2026-10-01 · tag: public-pricing-https://www.hubspot.com/pricing/data/enterprise</a:t>
+            </a:r>
+          </a:p>
+          <a:p>
+            <a:pPr lvl="0" indent="0" marL="0">
+              <a:buNone/>
+            </a:pPr>
+          </a:p>
+          <a:p>
+            <a:pPr lvl="0" indent="0" marL="0">
+              <a:buNone/>
+            </a:pPr>
+            <a:r>
+              <a:rPr b="1"/>
+              <a:t>C124</a:t>
+            </a:r>
+            <a:r>
+              <a:rPr/>
+              <a:t> confirmed · Sales Hub Professional USD 90 per seat per month (annual) / USD 100 (monthly) plus a required one-time Professional Onboarding of USD 1,500; Enterprise USD 150 per seat per month plus USD 3,500 onboarding. source: https://www.hubspot.com/pricing/sales · locator: as of 2026-10-01, tier cards · as-of: 2026-10-01 · tag: public-pricing-https://www.hubspot.com/pricing/sales</a:t>
+            </a:r>
+          </a:p>
+          <a:p>
+            <a:pPr lvl="0" indent="0" marL="0">
+              <a:buNone/>
+            </a:pPr>
+          </a:p>
+          <a:p>
+            <a:pPr lvl="0" indent="0" marL="0">
+              <a:buNone/>
+            </a:pPr>
+            <a:r>
+              <a:rPr b="1"/>
+              <a:t>C125</a:t>
+            </a:r>
+            <a:r>
+              <a:rPr/>
+              <a:t> confirmed · HubSpot seat model: View-only seats are free and unlimited; the Partner Seat is ‘a free seat that gives eligible HubSpot Solutions Partners employees access to all features in a client’s account’; Developer seats are free. source: https://knowledge.hubspot.com/account-management/manage-seats · locator: as of 2026-10-01, seat types · as-of: 2026-10-01 · tag: public-pricing-https://knowledge.hubspot.com/account-management/manage-seats</a:t>
+            </a:r>
+          </a:p>
+          <a:p>
+            <a:pPr lvl="0" indent="0" marL="0">
+              <a:buNone/>
+            </a:pPr>
+          </a:p>
+          <a:p>
+            <a:pPr lvl="0" indent="0" marL="0">
+              <a:buNone/>
+            </a:pPr>
+            <a:r>
+              <a:rPr b="1"/>
+              <a:t>C121</a:t>
+            </a:r>
+            <a:r>
+              <a:rPr/>
+              <a:t> caveat · Data Hub feature gates (official docs): bulk duplicate management and custom duplicate rules (up to 2 per object, 9 properties) need Data Hub Professional+; custom-code workflow actions need Data Hub Professional+ (20 s / 128 MB); Datasets need Professional+; warehouse data sync needs Enterprise. caveat → Replace quote with verbatim text and add the three extra sources (developers.hubspot.com custom-code-actions; KB create-and-use-datasets; hubspot.com/pricing/data Enterprise card). Note the KB custom-code URL redirects to the developer docs. source: https://knowledge.hubspot.com/records/manage-duplicate-records · locator: as of 2026-10-01, requirements box · as-of: 2026-10-01 · tag: public-pricing-https://knowledge.hubspot.com/records/manage-duplicate-records</a:t>
+            </a:r>
+          </a:p>
+          <a:p>
+            <a:pPr lvl="0" indent="0" marL="0">
+              <a:buNone/>
+            </a:pPr>
+          </a:p>
+          <a:p>
+            <a:pPr lvl="0" indent="0" marL="0">
+              <a:buNone/>
+            </a:pPr>
+            <a:r>
+              <a:rPr b="1"/>
+              <a:t>C122</a:t>
+            </a:r>
+            <a:r>
+              <a:rPr/>
+              <a:t> confirmed · Data-quality formatting automation (auto-fix rules) is gated to Data Hub Professional and Enterprise. source: https://knowledge.hubspot.com/reports/data-quality-command-center · locator: as of 2026-10-01, Formatting issues section · as-of: 2026-10-01 · tag: public-pricing-https://knowledge.hubspot.com/reports/data-quality-command-center</a:t>
+            </a:r>
+          </a:p>
+          <a:p>
+            <a:pPr lvl="0" indent="0" marL="0">
+              <a:buNone/>
+            </a:pPr>
+          </a:p>
+          <a:p>
+            <a:pPr lvl="0" indent="0" marL="0">
+              <a:buNone/>
+            </a:pPr>
+            <a:r>
+              <a:rPr b="1"/>
+              <a:t>C144</a:t>
+            </a:r>
+            <a:r>
+              <a:rPr/>
+              <a:t> caveat · A HubSpot private app has no licence price: up to 20 private apps per account; rate limits Free &amp; Starter 100 req per 10 s per app and 250,000 per day; Professional 190 / 625,000; Enterprise 190 / 1,000,000. caveat → State ‘tier of portal 9201667 not confirmed in the brief; Pro = 625,000/day, Enterprise = 1,000,000/day’ and note the 190/10 s limit is per private app while the daily cap is per account. source: https://developers.hubspot.com/docs/guides/apps/private-apps/overview · locator: as of 2026-10-01 · as-of: 2026-10-01 · tag: public-pricing-https://developers.hubspot.com/docs/guides/apps/private-apps/overview</a:t>
+            </a:r>
+          </a:p>
+          <a:p>
+            <a:pPr lvl="0" indent="0" marL="0">
+              <a:buNone/>
+            </a:pPr>
+          </a:p>
+          <a:p>
+            <a:pPr lvl="0" indent="0" marL="0">
+              <a:buNone/>
+            </a:pPr>
+            <a:r>
+              <a:rPr b="1"/>
+              <a:t>C136</a:t>
+            </a:r>
+            <a:r>
+              <a:rPr/>
+              <a:t> caveat · HubSpot Solutions Partner tiers (official page): five tiers (Solutions partner, Gold, Platinum, Diamond, Elite) ranked by sourced / total points and GRR; USD 400 per month membership is the entry requirement; third-party guides say the fetched thresholds are the 2027-01-15 values. caveat → Solutions Partner tiers: five tiers (Solutions partner, Gold, Platinum, Diamond, Elite) set by sourced and total points, with a GRR floor only at Diamond (75%) and Elite (80%); USD 400/month membership from 15 Jul 2026, waived when the partner’s net HubSpot subscription is &gt;= USD 400/month; performance enforcement from January 2027 — thresholds subject to change. source: https://www.hubspot.com/solutions-partners-tiers-and-benefits-2026 · locator: as of 2026-10-01 · as-of: 2026-10-01 · tag: public-pricing-https://www.hubspot.com/solutions-partners-tiers-and-benefits-2026</a:t>
+            </a:r>
+          </a:p>
+          <a:p>
+            <a:pPr lvl="0" indent="0" marL="0">
+              <a:buNone/>
+            </a:pPr>
+          </a:p>
+          <a:p>
+            <a:pPr lvl="0" indent="0" marL="0">
+              <a:buNone/>
+            </a:pPr>
+            <a:r>
+              <a:rPr b="1"/>
+              <a:t>C137</a:t>
+            </a:r>
+            <a:r>
+              <a:rPr/>
+              <a:t> caveat · StackSync list price: Starter USD 1,000 per month billed annually (USD 1,400 month-to-month), 1 active sync, 50K records; Pro USD 3,000 per month annually (USD 3,700), 3 syncs, 1M records; Managed Pro USD 4,200; overage USD 8 per 1,000 records (50K-150K), USD 2 (150K-1M); no free tier; the team’s actual plan is not in the repos. caveat → Replace ‘no free tier’ with ‘no free plan listed on the pricing page (Starter is self-serve)’; mark USD 4,200 as the annual-billing price (USD 4,900 month-to-month). source: https://www.stacksync.com/pricing · locator: as of 2026-10-01, plan cards and usage table · as-of: 2026-10-01 · tag: public-pricing-https://www.stacksync.com/pricing</a:t>
+            </a:r>
+          </a:p>
+          <a:p>
+            <a:pPr lvl="0" indent="0" marL="0">
+              <a:buNone/>
+            </a:pPr>
+          </a:p>
+          <a:p>
+            <a:pPr lvl="0" indent="0" marL="0">
+              <a:buNone/>
+            </a:pPr>
+            <a:r>
+              <a:rPr b="1"/>
+              <a:t>C138</a:t>
+            </a:r>
+            <a:r>
+              <a:rPr/>
+              <a:t> caveat · BigQuery on-demand: USD 6.25 per TiB scanned after the first 1 TiB free per month; active logical storage USD 0.000031507 per GiB-hour (about USD 0.023 per GiB-month, derived at 730 h); long-term USD 0.000021918 per GiB-hour; first 10 GiB free; actual volumes not in the repos. caveat → Add ‘US multi-region / us-central1 list price; europe-west6 (Zurich) rates differ and were not verified’ and state the 730 h/month basis for the ~USD 0.023/GiB-month derivation. source: https://cloud.google.com/bigquery/pricing · locator: as of 2026-10-01, On-demand compute pricing and Storage pricing tables · as-of: 2026-10-01 · tag: public-pricing-https://cloud.google.com/bigquery/pricing</a:t>
+            </a:r>
+          </a:p>
+          <a:p>
+            <a:pPr lvl="0" indent="0" marL="0">
+              <a:buNone/>
+            </a:pPr>
+          </a:p>
+          <a:p>
+            <a:pPr lvl="0" indent="0" marL="0">
+              <a:buNone/>
+            </a:pPr>
+            <a:r>
+              <a:rPr b="1"/>
+              <a:t>C139</a:t>
+            </a:r>
+            <a:r>
+              <a:rPr/>
+              <a:t> caveat · Cloud Run request-based billing: USD 0.000024 per vCPU-second, USD 0.0000025 per GiB-second, USD 0.40 per million requests; free tier 180,000 vCPU-s, 360,000 GiB-s and 2 million requests per month. caveat → Label as ‘Tier 1 (us-central1) list prices; Zurich/europe-west6 is Tier 2 and costs more (amount not verified)’ and keep the region consistent with the VM line. source: https://cloud.google.com/run/pricing · locator: as of 2026-10-01, Services (Requests-based billing) table · as-of: 2026-10-01 · tag: public-pricing-https://cloud.google.com/run/pricing</a:t>
+            </a:r>
+          </a:p>
+          <a:p>
+            <a:pPr lvl="0" indent="0" marL="0">
+              <a:buNone/>
+            </a:pPr>
+          </a:p>
+          <a:p>
+            <a:pPr lvl="0" indent="0" marL="0">
+              <a:buNone/>
+            </a:pPr>
+            <a:r>
+              <a:rPr b="1"/>
+              <a:t>C140</a:t>
+            </a:r>
+            <a:r>
+              <a:rPr/>
+              <a:t> caveat · Compute Engine VM for Mir-Load / Go CDC: e2-micro USD 6.11 per month us-central1 (USD 0 for one e2-micro under the Free Tier in us-west1 / us-central1 / us-east1); e2-medium USD 24.46 per month us-central1, USD 32.04 europe-west6 (Zurich) — order of magnitude from a public mirror; instance size not in the repos. caveat → Attribute USD 6.11 and USD 24.46/32.04 to gcloud-compute.com (third-party mirror, updated 2026-09-27) and the free-tier eligibility (US regions only) to docs.cloud.google.com/free; note Zurich is not a free-tier region. source: https://cloud.google.com/free/docs/free-cloud-features · locator: as of 2026-10-01, Compute Engine row · as-of: 2026-10-01 · tag: public-pricing-https://cloud.google.com/free/docs/free-cloud-features</a:t>
+            </a:r>
+          </a:p>
+          <a:p>
+            <a:pPr lvl="0" indent="0" marL="0">
+              <a:buNone/>
+            </a:pPr>
+          </a:p>
+          <a:p>
+            <a:pPr lvl="0" indent="0" marL="0">
+              <a:buNone/>
+            </a:pPr>
+            <a:r>
+              <a:rPr b="1"/>
+              <a:t>C141</a:t>
+            </a:r>
+            <a:r>
+              <a:rPr/>
+              <a:t> confirmed · dbt Core is free (Apache 2.0); dbt platform Developer USD 0 (1 seat, 3,000 models per month); Starter USD 100 per user per month; Enterprise custom. source: https://github.com/dbt-labs/dbt-core · locator: as of 2026-10-01, README · as-of: 2026-10-01 · tag: public-pricing-https://github.com/dbt-labs/dbt-core</a:t>
+            </a:r>
+          </a:p>
+          <a:p>
+            <a:pPr lvl="0" indent="0" marL="0">
+              <a:buNone/>
+            </a:pPr>
+          </a:p>
+          <a:p>
+            <a:pPr lvl="0" indent="0" marL="0">
+              <a:buNone/>
+            </a:pPr>
+            <a:r>
+              <a:rPr b="1"/>
+              <a:t>C142</a:t>
+            </a:r>
+            <a:r>
+              <a:rPr/>
+              <a:t> confirmed · Oban Pro: USD 150 per month billed monthly or USD 135 per month billed yearly (USD 1,620 per year); Oban open source is free — relevant only if the ‘Elixir sync’ is built. source: https://oban.pro/pricing · locator: as of 2026-10-01 · as-of: 2026-10-01 · tag: public-pricing-https://oban.pro/pricing</a:t>
+            </a:r>
+          </a:p>
+          <a:p>
+            <a:pPr lvl="0" indent="0" marL="0">
+              <a:buNone/>
+            </a:pPr>
+          </a:p>
+          <a:p>
+            <a:pPr lvl="0" indent="0" marL="0">
+              <a:buNone/>
+            </a:pPr>
+            <a:r>
+              <a:rPr b="1"/>
+              <a:t>C143</a:t>
+            </a:r>
+            <a:r>
+              <a:rPr/>
+              <a:t> caveat · Anthropic Claude API list prices: three published model tiers at USD 1 / 2 / 4 per MTok in and USD 5 / 10 / 20 per MTok out; Batch API 50% off; cache reads 0.1x input (0.05x on the top tier). At an ASSUMED 1,000 calls per month x (5,000 in + 1,000 out tokens): about USD 40 / 20 / 10 per month — order of magnitude, assumption stated; real volume not in the repos. caveat → Add: ‘the two larger tiers use a newer tokenizer that yields ~30% more tokens for the same text than the smallest tier, so the 5k/1k token assumption understates their cost by roughly that margin; prices exclude prompt-caching and tool-use overhead.’ source: https://platform.claude.com/docs/en/about-claude/pricing · locator: as of 2026-10-01, Model pricing and Batch processing tables · as-of: 2026-10-01 · tag: public-pricing-https://platform.claude.com/docs/en/about-claude/pricing</a:t>
+            </a:r>
+          </a:p>
+          <a:p>
+            <a:pPr lvl="0" indent="0" marL="0">
+              <a:buNone/>
+            </a:pPr>
+          </a:p>
+          <a:p>
+            <a:pPr lvl="0" indent="0" marL="0">
+              <a:buNone/>
+            </a:pPr>
+            <a:r>
+              <a:rPr b="1"/>
+              <a:t>C130</a:t>
+            </a:r>
+            <a:r>
+              <a:rPr/>
+              <a:t> confirmed · INSIDEA (HubSpot partner) managed-operations retainer: from USD 2,000 per month, 6-12 month minimum commitment, licences separate at partner-discount rates. source: https://insidea.com/hubspot/managed-operations · locator: as of 2026-10-01, pricing block · as-of: 2026-10-01 · tag: public-pricing-https://insidea.com/hubspot/managed-operations</a:t>
+            </a:r>
+          </a:p>
+          <a:p>
+            <a:pPr lvl="0" indent="0" marL="0">
+              <a:buNone/>
+            </a:pPr>
+          </a:p>
+          <a:p>
+            <a:pPr lvl="0" indent="0" marL="0">
+              <a:buNone/>
+            </a:pPr>
+            <a:r>
+              <a:rPr b="1"/>
+              <a:t>C131</a:t>
+            </a:r>
+            <a:r>
+              <a:rPr/>
+              <a:t> confirmed · HIVE Strategy menu: Fractional Admin from USD 2,000 per month (10 h); Essential retainer from USD 5,000; Growth from USD 7,500; Enterprise from USD 15,000 per month; Audit from USD 3,000; Advanced onboarding from USD 5,000; Training from USD 200 per hour. source: https://www.hivestrategy.com/pricing · locator: as of 2026-10-01 · as-of: 2026-10-01 · tag: public-pricing-https://www.hivestrategy.com/pricing</a:t>
+            </a:r>
+          </a:p>
+          <a:p>
+            <a:pPr lvl="0" indent="0" marL="0">
+              <a:buNone/>
+            </a:pPr>
+          </a:p>
+          <a:p>
+            <a:pPr lvl="0" indent="0" marL="0">
+              <a:buNone/>
+            </a:pPr>
+            <a:r>
+              <a:rPr b="1"/>
+              <a:t>C132</a:t>
+            </a:r>
+            <a:r>
+              <a:rPr/>
+              <a:t> caveat · Lean Labs (HubSpot Diamond partner): free assessment; onboarding from USD 2,000; migrations from USD 7,000; integrations from USD 15,000 (one-time). caveat → Replace the quote with the verbatim page text: ‘HubSpot assessment — FREE … We offer free HubSpot assessments and consults. No cost or obligation. HubSpot onboarding — Starting at $2k. HubSpot migrations — Starting at $7k. HubSpot integrations — Starting at $15k.’ source: https://www.leanlabs.com/pricing.md · locator: as of 2026-10-01 · as-of: 2026-10-01 · tag: public-pricing-https://www.leanlabs.com/pricing.md</a:t>
+            </a:r>
+          </a:p>
+          <a:p>
+            <a:pPr lvl="0" indent="0" marL="0">
+              <a:buNone/>
+            </a:pPr>
+          </a:p>
+          <a:p>
+            <a:pPr lvl="0" indent="0" marL="0">
+              <a:buNone/>
+            </a:pPr>
+            <a:r>
+              <a:rPr b="1"/>
+              <a:t>C133</a:t>
+            </a:r>
+            <a:r>
+              <a:rPr/>
+              <a:t> confirmed · HubSpot portal audit ranges (vendor blog dated 2026-01-30): standard audit USD 2,000-5,000; enterprise USD 5,000-10,000+; ongoing advisory USD 150-300 per hour; one cited partner quote USD 8,200; the DIY audit costs USD 1,350-4,500 of staff time per 20-40 h run (USD 5,400-18,000 per year if quarterly) — illustrative proxy for the S1 ‘your time’ line, not measured. source: https://portalpilot.io/blog/hubspot-audit-cost · locator: as of 2026-10-01, article dated January 30, 2026 · as-of: 2026-10-01 · tag: public-pricing-https://portalpilot.io/blog/hubspot-audit-cost</a:t>
+            </a:r>
+          </a:p>
+          <a:p>
+            <a:pPr lvl="0" indent="0" marL="0">
+              <a:buNone/>
+            </a:pPr>
+          </a:p>
+          <a:p>
+            <a:pPr lvl="0" indent="0" marL="0">
+              <a:buNone/>
+            </a:pPr>
+            <a:r>
+              <a:rPr b="1"/>
+              <a:t>C134</a:t>
+            </a:r>
+            <a:r>
+              <a:rPr/>
+              <a:t> confirmed · IMPACT (HubSpot Elite partner) cost guide (article dated 2024-06-09, older): ongoing DevOps / RevOps retainers USD 2,500-10,000 per month; basic onboarding USD 3,000-6,000 one-time; complex multi-hub implementations USD 10,000-25,000+. source: https://www.impactplus.com/blog/how-much-does-working-with-a-hubspot-partner-agency-cost · locator: as of 2026-10-01, article dated June 9, 2024 · as-of: 2026-10-01 · tag: public-pricing-https://www.impactplus.com/blog/how-much-does-working-with-a-hubspot-partner-agency-cost</a:t>
+            </a:r>
+          </a:p>
+          <a:p>
+            <a:pPr lvl="0" indent="0" marL="0">
+              <a:buNone/>
+            </a:pPr>
+          </a:p>
+          <a:p>
+            <a:pPr lvl="0" indent="0" marL="0">
+              <a:buNone/>
+            </a:pPr>
+            <a:r>
+              <a:rPr b="1"/>
+              <a:t>C135</a:t>
+            </a:r>
+            <a:r>
+              <a:rPr/>
+              <a:t> confirmed · Secondary benchmark: SmartBug USD 185 per hour (15 h guided onboarding = USD 2,775); Orbital ongoing platform management USD 2,000 per month. source: https://www.getmonetizely.com/articles/how-do-hubspot-implementation-partners-price-their-services-in-2025 · locator: as of 2026-10-01 · as-of: 2026-10-01 · tag: public-pricing-https://www.getmonetizely.com/articles/how-do-hubspot-implementation-partners-price-their-services-in-2025</a:t>
+            </a:r>
+          </a:p>
+          <a:p>
+            <a:pPr lvl="0" indent="0" marL="0">
+              <a:buNone/>
+            </a:pPr>
+          </a:p>
+          <a:p>
+            <a:pPr lvl="0" indent="0" marL="0">
+              <a:buNone/>
+            </a:pPr>
+            <a:r>
+              <a:rPr b="1"/>
+              <a:t>C127</a:t>
+            </a:r>
+            <a:r>
+              <a:rPr/>
+              <a:t> confirmed · Insycle (record-count priced): USD 100 / 150 / 200 per month billed annually (Starter 1 module / Growth 2 / Professional all); Enterprise custom; monthly billing for databases up to 500K records. source: https://www.insycle.com/pricing · locator: as of 2026-10-01 · as-of: 2026-10-01 · tag: public-pricing-https://www.insycle.com/pricing</a:t>
+            </a:r>
+          </a:p>
+          <a:p>
+            <a:pPr lvl="0" indent="0" marL="0">
+              <a:buNone/>
+            </a:pPr>
+          </a:p>
+          <a:p>
+            <a:pPr lvl="0" indent="0" marL="0">
+              <a:buNone/>
+            </a:pPr>
+            <a:r>
+              <a:rPr b="1"/>
+              <a:t>C129</a:t>
+            </a:r>
+            <a:r>
+              <a:rPr/>
+              <a:t> caveat · Dedupely: Starter USD 32 per month up to 30,000 records; Basic 60K / Pro 120K / Premium 240K / Gold 480K tiers (prices not shown; vendor site unreachable via proxy); portal contacts + companies = 39,972 exceed Starter. caveat → Dedupely Starter USD 32/month covers up to 30,000 records; the portal’s 13,679 companies + 26,29x contacts (~39,97x, live 2026-10-01, moves with inbound creation) exceed Starter, so the Basic tier (60,000) would apply — its price is not shown on the listing and Dedupely does not state which object types count as records. source: https://ecosystem.hubspot.com/marketplace/apps/dedupely · locator: as of 2026-10-01, pricing tab · as-of: 2026-10-01 · tag: public-pricing-https://ecosystem.hubspot.com/marketplace/apps/dedupely</a:t>
+            </a:r>
+          </a:p>
+        </p:txBody>
+      </p:sp>
+      <p:sp>
+        <p:nvSpPr>
+          <p:cNvPr id="4" name="Slide Number Placeholder 3"/>
+          <p:cNvSpPr>
+            <a:spLocks noGrp="1"/>
+          </p:cNvSpPr>
+          <p:nvPr>
+            <p:ph type="sldNum" sz="quarter" idx="10"/>
+          </p:nvPr>
+        </p:nvSpPr>
+        <p:spPr/>
+        <p:txBody>
+          <a:bodyPr/>
+          <a:lstStyle/>
+          <a:p>
+            <a:fld id="{18BDFEC3-8487-43E8-A154-7C12CBC1FFF2}" type="slidenum">
+              <a:rPr lang="en-US"/>
+              <a:t>86</a:t>
+            </a:fld>
+            <a:endParaRPr lang="en-US"/>
+          </a:p>
+        </p:txBody>
+      </p:sp>
+    </p:spTree>
+  </p:cSld>
+</p:notes>
+</file>
+
+<file path=ppt/notesSlides/notesSlide86.xml><?xml version="1.0" encoding="utf-8"?>
+<p:notes xmlns:a="http://schemas.openxmlformats.org/drawingml/2006/main" xmlns:r="http://schemas.openxmlformats.org/officeDocument/2006/relationships" xmlns:p="http://schemas.openxmlformats.org/presentationml/2006/main">
+  <p:cSld>
+    <p:spTree>
+      <p:nvGrpSpPr>
+        <p:cNvPr id="1" name=""/>
+        <p:cNvGrpSpPr/>
+        <p:nvPr/>
+      </p:nvGrpSpPr>
+      <p:grpSpPr>
+        <a:xfrm>
+          <a:off x="0" y="0"/>
+          <a:ext cx="0" cy="0"/>
+          <a:chOff x="0" y="0"/>
+          <a:chExt cx="0" cy="0"/>
+        </a:xfrm>
+      </p:grpSpPr>
+      <p:sp>
+        <p:nvSpPr>
+          <p:cNvPr id="2" name="Slide Image Placeholder 1"/>
+          <p:cNvSpPr>
+            <a:spLocks noGrp="1" noRot="1" noChangeAspect="1"/>
+          </p:cNvSpPr>
+          <p:nvPr>
+            <p:ph type="sldImg"/>
+          </p:nvPr>
+        </p:nvSpPr>
+        <p:spPr/>
+      </p:sp>
+      <p:sp>
+        <p:nvSpPr>
+          <p:cNvPr id="3" name="Notes Placeholder 2"/>
+          <p:cNvSpPr>
+            <a:spLocks noGrp="1"/>
+          </p:cNvSpPr>
+          <p:nvPr>
+            <p:ph type="body" idx="1"/>
+          </p:nvPr>
+        </p:nvSpPr>
+        <p:spPr/>
+        <p:txBody>
+          <a:bodyPr/>
+          <a:lstStyle/>
+          <a:p>
+            <a:pPr lvl="0" indent="0" marL="0">
+              <a:buNone/>
+            </a:pPr>
+            <a:r>
+              <a:rPr/>
+              <a:t>Provenance notes: see the first slide of “Where every price comes from”.</a:t>
+            </a:r>
+          </a:p>
+        </p:txBody>
+      </p:sp>
+      <p:sp>
+        <p:nvSpPr>
+          <p:cNvPr id="4" name="Slide Number Placeholder 3"/>
+          <p:cNvSpPr>
+            <a:spLocks noGrp="1"/>
+          </p:cNvSpPr>
+          <p:nvPr>
+            <p:ph type="sldNum" sz="quarter" idx="10"/>
+          </p:nvPr>
+        </p:nvSpPr>
+        <p:spPr/>
+        <p:txBody>
+          <a:bodyPr/>
+          <a:lstStyle/>
+          <a:p>
+            <a:fld id="{18BDFEC3-8487-43E8-A154-7C12CBC1FFF2}" type="slidenum">
+              <a:rPr lang="en-US"/>
+              <a:t>87</a:t>
+            </a:fld>
+            <a:endParaRPr lang="en-US"/>
+          </a:p>
+        </p:txBody>
+      </p:sp>
+    </p:spTree>
+  </p:cSld>
+</p:notes>
+</file>
+
+<file path=ppt/notesSlides/notesSlide87.xml><?xml version="1.0" encoding="utf-8"?>
+<p:notes xmlns:a="http://schemas.openxmlformats.org/drawingml/2006/main" xmlns:r="http://schemas.openxmlformats.org/officeDocument/2006/relationships" xmlns:p="http://schemas.openxmlformats.org/presentationml/2006/main">
+  <p:cSld>
+    <p:spTree>
+      <p:nvGrpSpPr>
+        <p:cNvPr id="1" name=""/>
+        <p:cNvGrpSpPr/>
+        <p:nvPr/>
+      </p:nvGrpSpPr>
+      <p:grpSpPr>
+        <a:xfrm>
+          <a:off x="0" y="0"/>
+          <a:ext cx="0" cy="0"/>
+          <a:chOff x="0" y="0"/>
+          <a:chExt cx="0" cy="0"/>
+        </a:xfrm>
+      </p:grpSpPr>
+      <p:sp>
+        <p:nvSpPr>
+          <p:cNvPr id="2" name="Slide Image Placeholder 1"/>
+          <p:cNvSpPr>
+            <a:spLocks noGrp="1" noRot="1" noChangeAspect="1"/>
+          </p:cNvSpPr>
+          <p:nvPr>
+            <p:ph type="sldImg"/>
+          </p:nvPr>
+        </p:nvSpPr>
+        <p:spPr/>
+      </p:sp>
+      <p:sp>
+        <p:nvSpPr>
+          <p:cNvPr id="3" name="Notes Placeholder 2"/>
+          <p:cNvSpPr>
+            <a:spLocks noGrp="1"/>
+          </p:cNvSpPr>
+          <p:nvPr>
+            <p:ph type="body" idx="1"/>
+          </p:nvPr>
+        </p:nvSpPr>
+        <p:spPr/>
+        <p:txBody>
+          <a:bodyPr/>
+          <a:lstStyle/>
+          <a:p>
+            <a:pPr lvl="0" indent="0" marL="0">
+              <a:buNone/>
+            </a:pPr>
+            <a:r>
+              <a:rPr/>
+              <a:t>Provenance notes: see the first slide of “Where every price comes from”.</a:t>
+            </a:r>
+          </a:p>
+        </p:txBody>
+      </p:sp>
+      <p:sp>
+        <p:nvSpPr>
+          <p:cNvPr id="4" name="Slide Number Placeholder 3"/>
+          <p:cNvSpPr>
+            <a:spLocks noGrp="1"/>
+          </p:cNvSpPr>
+          <p:nvPr>
+            <p:ph type="sldNum" sz="quarter" idx="10"/>
+          </p:nvPr>
+        </p:nvSpPr>
+        <p:spPr/>
+        <p:txBody>
+          <a:bodyPr/>
+          <a:lstStyle/>
+          <a:p>
+            <a:fld id="{18BDFEC3-8487-43E8-A154-7C12CBC1FFF2}" type="slidenum">
+              <a:rPr lang="en-US"/>
+              <a:t>88</a:t>
+            </a:fld>
+            <a:endParaRPr lang="en-US"/>
+          </a:p>
+        </p:txBody>
+      </p:sp>
+    </p:spTree>
+  </p:cSld>
+</p:notes>
+</file>
+
+<file path=ppt/notesSlides/notesSlide88.xml><?xml version="1.0" encoding="utf-8"?>
+<p:notes xmlns:a="http://schemas.openxmlformats.org/drawingml/2006/main" xmlns:r="http://schemas.openxmlformats.org/officeDocument/2006/relationships" xmlns:p="http://schemas.openxmlformats.org/presentationml/2006/main">
+  <p:cSld>
+    <p:spTree>
+      <p:nvGrpSpPr>
+        <p:cNvPr id="1" name=""/>
+        <p:cNvGrpSpPr/>
+        <p:nvPr/>
+      </p:nvGrpSpPr>
+      <p:grpSpPr>
+        <a:xfrm>
+          <a:off x="0" y="0"/>
+          <a:ext cx="0" cy="0"/>
+          <a:chOff x="0" y="0"/>
+          <a:chExt cx="0" cy="0"/>
+        </a:xfrm>
+      </p:grpSpPr>
+      <p:sp>
+        <p:nvSpPr>
+          <p:cNvPr id="2" name="Slide Image Placeholder 1"/>
+          <p:cNvSpPr>
+            <a:spLocks noGrp="1" noRot="1" noChangeAspect="1"/>
+          </p:cNvSpPr>
+          <p:nvPr>
+            <p:ph type="sldImg"/>
+          </p:nvPr>
+        </p:nvSpPr>
+        <p:spPr/>
+      </p:sp>
+      <p:sp>
+        <p:nvSpPr>
+          <p:cNvPr id="3" name="Notes Placeholder 2"/>
+          <p:cNvSpPr>
+            <a:spLocks noGrp="1"/>
+          </p:cNvSpPr>
+          <p:nvPr>
+            <p:ph type="body" idx="1"/>
+          </p:nvPr>
+        </p:nvSpPr>
+        <p:spPr/>
+        <p:txBody>
+          <a:bodyPr/>
+          <a:lstStyle/>
+          <a:p>
+            <a:pPr lvl="0" indent="0" marL="0">
+              <a:buNone/>
+            </a:pPr>
+            <a:r>
+              <a:rPr/>
+              <a:t>Provenance notes: see the first slide of “Where every price comes from”.</a:t>
+            </a:r>
+          </a:p>
+        </p:txBody>
+      </p:sp>
+      <p:sp>
+        <p:nvSpPr>
+          <p:cNvPr id="4" name="Slide Number Placeholder 3"/>
+          <p:cNvSpPr>
+            <a:spLocks noGrp="1"/>
+          </p:cNvSpPr>
+          <p:nvPr>
+            <p:ph type="sldNum" sz="quarter" idx="10"/>
+          </p:nvPr>
+        </p:nvSpPr>
+        <p:spPr/>
+        <p:txBody>
+          <a:bodyPr/>
+          <a:lstStyle/>
+          <a:p>
+            <a:fld id="{18BDFEC3-8487-43E8-A154-7C12CBC1FFF2}" type="slidenum">
+              <a:rPr lang="en-US"/>
+              <a:t>89</a:t>
+            </a:fld>
+            <a:endParaRPr lang="en-US"/>
+          </a:p>
+        </p:txBody>
+      </p:sp>
+    </p:spTree>
+  </p:cSld>
+</p:notes>
+</file>
+
+<file path=ppt/notesSlides/notesSlide89.xml><?xml version="1.0" encoding="utf-8"?>
+<p:notes xmlns:a="http://schemas.openxmlformats.org/drawingml/2006/main" xmlns:r="http://schemas.openxmlformats.org/officeDocument/2006/relationships" xmlns:p="http://schemas.openxmlformats.org/presentationml/2006/main">
+  <p:cSld>
+    <p:spTree>
+      <p:nvGrpSpPr>
+        <p:cNvPr id="1" name=""/>
+        <p:cNvGrpSpPr/>
+        <p:nvPr/>
+      </p:nvGrpSpPr>
+      <p:grpSpPr>
+        <a:xfrm>
+          <a:off x="0" y="0"/>
+          <a:ext cx="0" cy="0"/>
+          <a:chOff x="0" y="0"/>
+          <a:chExt cx="0" cy="0"/>
+        </a:xfrm>
+      </p:grpSpPr>
+      <p:sp>
+        <p:nvSpPr>
+          <p:cNvPr id="2" name="Slide Image Placeholder 1"/>
+          <p:cNvSpPr>
+            <a:spLocks noGrp="1" noRot="1" noChangeAspect="1"/>
+          </p:cNvSpPr>
+          <p:nvPr>
+            <p:ph type="sldImg"/>
+          </p:nvPr>
+        </p:nvSpPr>
+        <p:spPr/>
+      </p:sp>
+      <p:sp>
+        <p:nvSpPr>
+          <p:cNvPr id="3" name="Notes Placeholder 2"/>
+          <p:cNvSpPr>
+            <a:spLocks noGrp="1"/>
+          </p:cNvSpPr>
+          <p:nvPr>
+            <p:ph type="body" idx="1"/>
+          </p:nvPr>
+        </p:nvSpPr>
+        <p:spPr/>
+        <p:txBody>
+          <a:bodyPr/>
+          <a:lstStyle/>
+          <a:p>
+            <a:pPr lvl="0" indent="0" marL="0">
+              <a:buNone/>
+            </a:pPr>
+            <a:r>
+              <a:rPr/>
+              <a:t>Provenance notes: see the first slide of “Where every price comes from”.</a:t>
+            </a:r>
+          </a:p>
+        </p:txBody>
+      </p:sp>
+      <p:sp>
+        <p:nvSpPr>
+          <p:cNvPr id="4" name="Slide Number Placeholder 3"/>
+          <p:cNvSpPr>
+            <a:spLocks noGrp="1"/>
+          </p:cNvSpPr>
+          <p:nvPr>
+            <p:ph type="sldNum" sz="quarter" idx="10"/>
+          </p:nvPr>
+        </p:nvSpPr>
+        <p:spPr/>
+        <p:txBody>
+          <a:bodyPr/>
+          <a:lstStyle/>
+          <a:p>
+            <a:fld id="{18BDFEC3-8487-43E8-A154-7C12CBC1FFF2}" type="slidenum">
+              <a:rPr lang="en-US"/>
+              <a:t>90</a:t>
             </a:fld>
             <a:endParaRPr lang="en-US"/>
           </a:p>
@@ -22535,7 +24302,7 @@
             </a:pPr>
             <a:r>
               <a:rPr/>
-              <a:t>Scans are capped, snapshots are dated, HubSQL has traps (1/2)</a:t>
+              <a:t>Layer L1 — prepare the pass, archive the first pass (from 13 Oct) (1/6)</a:t>
             </a:r>
           </a:p>
         </p:txBody>
@@ -22560,61 +24327,16 @@
             </a:pPr>
             <a:r>
               <a:rPr i="1"/>
-              <a:t>Appendix A · Evidence and method</a:t>
-            </a:r>
-          </a:p>
-          <a:p>
-            <a:pPr lvl="0" indent="0" marL="0">
-              <a:buNone/>
-            </a:pPr>
-            <a:r>
-              <a:rPr b="1"/>
-              <a:t>Snapshots and scope</a:t>
-            </a:r>
-          </a:p>
-          <a:p>
-            <a:pPr lvl="0" indent="0" marL="0">
-              <a:buNone/>
-            </a:pPr>
-            <a:r>
-              <a:rPr/>
-              <a:t>SEALSQ property set captured 2026-09-14 by direct HubSpot MCP calls: 1,820 of 1,960 deals in scope (SealSQ HW 728 · Services 303 · Icalps_hardware 788 · SEALCOIN 1); 498 deal / 30 contact / 30 company / 14 ticket properties</a:t>
-            </a:r>
-          </a:p>
-          <a:p>
-            <a:pPr lvl="0" indent="0" marL="0">
-              <a:buNone/>
-            </a:pPr>
-            <a:r>
-              <a:rPr/>
-              <a:t>Object volumes at capture: 25,782 contacts · 13,422 companies · 1,960 deals (denominators of the utilisation columns)</a:t>
-            </a:r>
-          </a:p>
-          <a:p>
-            <a:pPr lvl="0" indent="0" marL="0">
-              <a:buNone/>
-            </a:pPr>
-            <a:r>
-              <a:rPr/>
-              <a:t>Live 2026-10-01: 1,972 deals · 822 of 1,960 deals had no product assigned at capture</a:t>
-            </a:r>
-          </a:p>
-          <a:p>
-            <a:pPr lvl="0" indent="0" marL="0">
-              <a:buNone/>
-            </a:pPr>
-            <a:r>
-              <a:rPr b="1"/>
-              <a:t>Hs-Logic scans</a:t>
-            </a:r>
-          </a:p>
-          <a:p>
-            <a:pPr lvl="0" indent="0" marL="0">
-              <a:buNone/>
-            </a:pPr>
-            <a:r>
-              <a:rPr/>
-              <a:t>CAP = 10,000: companies 73.1% covered, contacts 38.0%, paged in default list order; screenshots undated (2026-09), denominators live 2026-10-01</a:t>
+              <a:t>Sequel · Remediation plan, tracker 13-Oct-26 · the user’s chunking: Foundation engine = L1 + L2</a:t>
+            </a:r>
+          </a:p>
+          <a:p>
+            <a:pPr lvl="0" indent="0" marL="0">
+              <a:buNone/>
+            </a:pPr>
+            <a:r>
+              <a:rPr/>
+              <a:t>The user’s rule, two lines: “foundation : L1+L2” · “E2:E4 : L3” — read by this deck as the Foundation engine of the 21/09/26 roadmap ↔ layers L1 + L2 and engines E2–E4 ↔ layer L3 (orchestrator reading of the user’s rule). The plan’s own “Foundation” phase (five rows, lines 2–6) is not named in the rule; it is shown here beside L1.</a:t>
             </a:r>
           </a:p>
         </p:txBody>
@@ -22793,7 +24515,7 @@
             </a:pPr>
             <a:r>
               <a:rPr/>
-              <a:t>Scans are capped, snapshots are dated, HubSQL has traps (2/2)</a:t>
+              <a:t>Layer L1 — prepare the pass, archive the first pass (from 13 Oct) (2/6)</a:t>
             </a:r>
           </a:p>
         </p:txBody>
@@ -22817,44 +24539,43 @@
               <a:buNone/>
             </a:pPr>
             <a:r>
-              <a:rPr/>
-              <a:t>duplicates = exact match on lower-cased, whitespace-collapsed name/domain or email/full name; duplicate_ids truncated to 10 members per cluster (README line 75)</a:t>
-            </a:r>
-          </a:p>
-          <a:p>
-            <a:pPr lvl="0" indent="0" marL="0">
-              <a:buNone/>
-            </a:pPr>
-            <a:r>
-              <a:rPr b="1"/>
-              <a:t>HubSQL probe rules and traps</a:t>
-            </a:r>
-          </a:p>
-          <a:p>
-            <a:pPr lvl="0" indent="0" marL="0">
-              <a:buNone/>
-            </a:pPr>
-            <a:r>
-              <a:rPr/>
-              <a:t>14 cheat-sheet rules: one object per query, no JOIN / UNION / subqueries, max 2 associated object types; dealname matching a flagged last resort; CRM Search API stops at 10,000 results</a:t>
-            </a:r>
-          </a:p>
-          <a:p>
-            <a:pPr lvl="0" indent="0" marL="0">
-              <a:buNone/>
-            </a:pPr>
-            <a:r>
-              <a:rPr/>
-              <a:t>COUNT(hs_object_id) executes as a SUM of ids (18,944,500,703,385 vs 730 with COUNT(*)); association filters silently drop inside GROUP BY → only COUNT(*) results are used</a:t>
-            </a:r>
-          </a:p>
-          <a:p>
-            <a:pPr lvl="0" indent="0" marL="0">
-              <a:buNone/>
-            </a:pPr>
-            <a:r>
-              <a:rPr/>
-              <a:t>Year fields are calculated and evaluate to 0 on 1,972 deals, so IS NOT NULL cannot measure fill · summed over ALL deals: “2027”-labelled 434,773 k$ · 2026 103,895 · 2029 79,647 · 2025 78,512</a:t>
+              <a:rPr b="1"/>
+              <a:t>Plan phase “Foundation” · 5 tasks · lines 2–6 · start 13-Oct-26, no duration, no end</a:t>
+            </a:r>
+          </a:p>
+          <a:p>
+            <a:pPr lvl="0"/>
+            <a:r>
+              <a:rPr/>
+              <a:t>[Data] Score each object in the CRM pertaining to defined criteria — goal: “Realistic assessment of stale records in the CRM” (the only one of the five rows with a goal)</a:t>
+            </a:r>
+          </a:p>
+          <a:p>
+            <a:pPr lvl="0"/>
+            <a:r>
+              <a:rPr/>
+              <a:t>[Data] Define each bucket in the CRM based on their total ratio in the pipeline</a:t>
+            </a:r>
+          </a:p>
+          <a:p>
+            <a:pPr lvl="0"/>
+            <a:r>
+              <a:rPr/>
+              <a:t>[Data] Write the script to archive stale records in the CRM (SEALSQ only)</a:t>
+            </a:r>
+          </a:p>
+          <a:p>
+            <a:pPr lvl="0"/>
+            <a:r>
+              <a:rPr/>
+              <a:t>[Data] Prevent the entry of non-relevant records in the CRM</a:t>
+            </a:r>
+          </a:p>
+          <a:p>
+            <a:pPr lvl="0"/>
+            <a:r>
+              <a:rPr/>
+              <a:t>[Data] Document the set of properties: SEALSQ, IC’Alps, Connex</a:t>
             </a:r>
           </a:p>
         </p:txBody>
@@ -22901,7 +24622,7 @@
             </a:pPr>
             <a:r>
               <a:rPr/>
-              <a:t>Where every price comes from (1/5)</a:t>
+              <a:t>Layer L1 — prepare the pass, archive the first pass (from 13 Oct) (3/6)</a:t>
             </a:r>
           </a:p>
         </p:txBody>
@@ -22925,107 +24646,8 @@
               <a:buNone/>
             </a:pPr>
             <a:r>
-              <a:rPr i="1"/>
-              <a:t>Appendix B · Pricing sources · all fetched 2026-10-01 · USD</a:t>
-            </a:r>
-          </a:p>
-          <a:p>
-            <a:pPr lvl="0" indent="0" marL="0">
-              <a:buNone/>
-            </a:pPr>
-            <a:r>
-              <a:rPr b="1"/>
-              <a:t>Sources and confidence tier</a:t>
-            </a:r>
-          </a:p>
-          <a:p>
-            <a:pPr lvl="0"/>
-            <a:r>
-              <a:rPr b="1"/>
-              <a:t>hubspot.com/pricing/data (Starter · Professional):</a:t>
-            </a:r>
-            <a:r>
-              <a:rPr/>
-              <a:t> </a:t>
-            </a:r>
-            <a:r>
-              <a:rPr i="1"/>
-              <a:t>(official list)</a:t>
-            </a:r>
-          </a:p>
-          <a:p>
-            <a:pPr lvl="0"/>
-            <a:r>
-              <a:rPr b="1"/>
-              <a:t>hubspot.com/pricing/data/enterprise:</a:t>
-            </a:r>
-            <a:r>
-              <a:rPr/>
-              <a:t> </a:t>
-            </a:r>
-            <a:r>
-              <a:rPr i="1"/>
-              <a:t>(official list)</a:t>
-            </a:r>
-          </a:p>
-          <a:p>
-            <a:pPr lvl="0"/>
-            <a:r>
-              <a:rPr b="1"/>
-              <a:t>hubspot.com/pricing/sales (seats, onboarding):</a:t>
-            </a:r>
-            <a:r>
-              <a:rPr/>
-              <a:t> </a:t>
-            </a:r>
-            <a:r>
-              <a:rPr i="1"/>
-              <a:t>(official list)</a:t>
-            </a:r>
-          </a:p>
-          <a:p>
-            <a:pPr lvl="0"/>
-            <a:r>
-              <a:rPr b="1"/>
-              <a:t>knowledge.hubspot.com/account-management/manage-seats:</a:t>
-            </a:r>
-            <a:r>
-              <a:rPr/>
-              <a:t> </a:t>
-            </a:r>
-            <a:r>
-              <a:rPr i="1"/>
-              <a:t>(official docs)</a:t>
-            </a:r>
-          </a:p>
-          <a:p>
-            <a:pPr lvl="0"/>
-            <a:r>
-              <a:rPr b="1"/>
-              <a:t>knowledge.hubspot.com/records/manage-duplicate-records:</a:t>
-            </a:r>
-            <a:r>
-              <a:rPr/>
-              <a:t> </a:t>
-            </a:r>
-            <a:r>
-              <a:rPr i="1"/>
-              <a:t>(official docs)</a:t>
-            </a:r>
-          </a:p>
-          <a:p>
-            <a:pPr lvl="0"/>
-            <a:r>
-              <a:rPr b="1"/>
-              <a:t>knowledge.hubspot.com/reports/data-quality-command-center:</a:t>
-            </a:r>
-            <a:r>
-              <a:rPr/>
-              <a:t> </a:t>
-            </a:r>
-            <a:r>
-              <a:rPr i="1"/>
-              <a:t>(official docs)</a:t>
+              <a:rPr/>
+              <a:t>A phase label of the plan, distinct from the 21/09/26 roadmap’s Foundation engine; not named in the user’s chunking rule — shown beside L1 under the Foundation engine as a reading, not as the user’s instruction.</a:t>
             </a:r>
           </a:p>
         </p:txBody>
@@ -23072,7 +24694,7 @@
             </a:pPr>
             <a:r>
               <a:rPr/>
-              <a:t>Where every price comes from (2/5)</a:t>
+              <a:t>Layer L1 — prepare the pass, archive the first pass (from 13 Oct) (4/6)</a:t>
             </a:r>
           </a:p>
         </p:txBody>
@@ -23092,93 +24714,47 @@
           <a:bodyPr/>
           <a:lstStyle/>
           <a:p>
+            <a:pPr lvl="0" indent="0" marL="0">
+              <a:buNone/>
+            </a:pPr>
+            <a:r>
+              <a:rPr b="1"/>
+              <a:t>L1 · 5 tasks · lines 7–11 · start 13-Oct-26, no duration, no end</a:t>
+            </a:r>
+          </a:p>
+          <a:p>
             <a:pPr lvl="0"/>
             <a:r>
-              <a:rPr b="1"/>
-              <a:t>developers.hubspot.com/docs/guides/apps/private-apps/overview:</a:t>
-            </a:r>
-            <a:r>
-              <a:rPr/>
-              <a:t> </a:t>
-            </a:r>
-            <a:r>
-              <a:rPr i="1"/>
-              <a:t>(official docs)</a:t>
+              <a:rPr/>
+              <a:t>[Ops] Ledger the previous pass for all records and properties</a:t>
             </a:r>
           </a:p>
           <a:p>
             <a:pPr lvl="0"/>
             <a:r>
-              <a:rPr b="1"/>
-              <a:t>hubspot.com/solutions-partners-tiers-and-benefits-2026:</a:t>
-            </a:r>
-            <a:r>
-              <a:rPr/>
-              <a:t> </a:t>
-            </a:r>
-            <a:r>
-              <a:rPr i="1"/>
-              <a:t>(official (thresholds dated))</a:t>
+              <a:rPr/>
+              <a:t>[Ops] Archive the first pass of records (full NQL, full Orphan companies ~33% of total CRM records) — delete 6,570 orphan contacts, 2,043 companies with neither deals nor contacts, 10,574 contacts-only auto-creations · goal: “Low-risk purge of records strictly polluting the CRM”</a:t>
             </a:r>
           </a:p>
           <a:p>
             <a:pPr lvl="0"/>
             <a:r>
-              <a:rPr b="1"/>
-              <a:t>stacksync.com/pricing:</a:t>
-            </a:r>
-            <a:r>
-              <a:rPr/>
-              <a:t> </a:t>
-            </a:r>
-            <a:r>
-              <a:rPr i="1"/>
-              <a:t>(vendor list)</a:t>
+              <a:rPr/>
+              <a:t>[Ops] Survey the sales director and ensure best practices are applied in the daily workflow</a:t>
             </a:r>
           </a:p>
           <a:p>
             <a:pPr lvl="0"/>
             <a:r>
-              <a:rPr b="1"/>
-              <a:t>cloud.google.com/bigquery/pricing:</a:t>
-            </a:r>
-            <a:r>
-              <a:rPr/>
-              <a:t> </a:t>
-            </a:r>
-            <a:r>
-              <a:rPr i="1"/>
-              <a:t>(official list)</a:t>
+              <a:rPr/>
+              <a:t>[Document] Document the full set of properties within the CRM and the boundaries between SEALSQ and IC’Alps</a:t>
             </a:r>
           </a:p>
           <a:p>
             <a:pPr lvl="0"/>
             <a:r>
-              <a:rPr b="1"/>
-              <a:t>cloud.google.com/run/pricing:</a:t>
-            </a:r>
-            <a:r>
-              <a:rPr/>
-              <a:t> </a:t>
-            </a:r>
-            <a:r>
-              <a:rPr i="1"/>
-              <a:t>(official list)</a:t>
-            </a:r>
-          </a:p>
-          <a:p>
-            <a:pPr lvl="0"/>
-            <a:r>
-              <a:rPr b="1"/>
-              <a:t>cloud.google.com/free + gcloud-compute.com (mirror, 2026-09-27):</a:t>
-            </a:r>
-            <a:r>
-              <a:rPr/>
-              <a:t> </a:t>
-            </a:r>
-            <a:r>
-              <a:rPr i="1"/>
-              <a:t>(official / order of magnitude)</a:t>
+              <a:rPr/>
+              <a:t>[Ops] Remove all object auto-creation workflows</a:t>
             </a:r>
           </a:p>
         </p:txBody>
@@ -23225,7 +24801,7 @@
             </a:pPr>
             <a:r>
               <a:rPr/>
-              <a:t>Where every price comes from (3/5)</a:t>
+              <a:t>Layer L1 — prepare the pass, archive the first pass (from 13 Oct) (5/6)</a:t>
             </a:r>
           </a:p>
         </p:txBody>
@@ -23248,105 +24824,55 @@
             <a:pPr lvl="0"/>
             <a:r>
               <a:rPr b="1"/>
-              <a:t>github.com/dbt-labs/dbt-core · getdbt.com/pricing:</a:t>
-            </a:r>
-            <a:r>
-              <a:rPr/>
-              <a:t> </a:t>
-            </a:r>
-            <a:r>
-              <a:rPr i="1"/>
-              <a:t>(official)</a:t>
+              <a:t>6,570</a:t>
+            </a:r>
+            <a:r>
+              <a:rPr/>
+              <a:t> “orphan contacts”, as written · equals the deck’s live count of contacts with no company association, 1 Oct: 6,570 of 26,293 (25.0%; same-day re-run 6,571)</a:t>
             </a:r>
           </a:p>
           <a:p>
             <a:pPr lvl="0"/>
             <a:r>
               <a:rPr b="1"/>
-              <a:t>oban.pro/pricing:</a:t>
-            </a:r>
-            <a:r>
-              <a:rPr/>
-              <a:t> </a:t>
-            </a:r>
-            <a:r>
-              <a:rPr i="1"/>
-              <a:t>(vendor list)</a:t>
+              <a:t>2,043</a:t>
+            </a:r>
+            <a:r>
+              <a:rPr/>
+              <a:t> companies with neither deals nor contacts · the plan’s own count, measured by no admissible source</a:t>
             </a:r>
           </a:p>
           <a:p>
             <a:pPr lvl="0"/>
             <a:r>
               <a:rPr b="1"/>
-              <a:t>platform.claude.com/docs/en/about-claude/pricing:</a:t>
-            </a:r>
-            <a:r>
-              <a:rPr/>
-              <a:t> </a:t>
-            </a:r>
-            <a:r>
-              <a:rPr i="1"/>
-              <a:t>(official list)</a:t>
+              <a:t>10,574</a:t>
+            </a:r>
+            <a:r>
+              <a:rPr/>
+              <a:t> contacts-only auto-creations · the plan’s own count, measured by no admissible source</a:t>
             </a:r>
           </a:p>
           <a:p>
             <a:pPr lvl="0"/>
             <a:r>
               <a:rPr b="1"/>
-              <a:t>insidea.com/hubspot/managed-operations:</a:t>
-            </a:r>
-            <a:r>
-              <a:rPr/>
-              <a:t> </a:t>
-            </a:r>
-            <a:r>
-              <a:rPr i="1"/>
-              <a:t>(partner range)</a:t>
+              <a:t>19,187</a:t>
+            </a:r>
+            <a:r>
+              <a:rPr/>
+              <a:t> sum of the three = 45.7% of the 41,944 records measured on 1 Oct (a figure the row does not state)</a:t>
             </a:r>
           </a:p>
           <a:p>
             <a:pPr lvl="0"/>
             <a:r>
               <a:rPr b="1"/>
-              <a:t>hivestrategy.com/pricing:</a:t>
-            </a:r>
-            <a:r>
-              <a:rPr/>
-              <a:t> </a:t>
-            </a:r>
-            <a:r>
-              <a:rPr i="1"/>
-              <a:t>(partner range)</a:t>
-            </a:r>
-          </a:p>
-          <a:p>
-            <a:pPr lvl="0"/>
-            <a:r>
-              <a:rPr b="1"/>
-              <a:t>leanlabs.com/pricing.md:</a:t>
-            </a:r>
-            <a:r>
-              <a:rPr/>
-              <a:t> </a:t>
-            </a:r>
-            <a:r>
-              <a:rPr i="1"/>
-              <a:t>(partner range)</a:t>
-            </a:r>
-          </a:p>
-          <a:p>
-            <a:pPr lvl="0"/>
-            <a:r>
-              <a:rPr b="1"/>
-              <a:t>portalpilot.io/blog/hubspot-audit-cost (2026-01-30):</a:t>
-            </a:r>
-            <a:r>
-              <a:rPr/>
-              <a:t> </a:t>
-            </a:r>
-            <a:r>
-              <a:rPr i="1"/>
-              <a:t>(secondary range)</a:t>
+              <a:t>~33%</a:t>
+            </a:r>
+            <a:r>
+              <a:rPr/>
+              <a:t> “of total CRM records”, as written · qualifies “full Orphan companies”; its denominator is not stated (all companies are 32.6% of those records)</a:t>
             </a:r>
           </a:p>
         </p:txBody>
@@ -23393,7 +24919,7 @@
             </a:pPr>
             <a:r>
               <a:rPr/>
-              <a:t>Where every price comes from (4/5)</a:t>
+              <a:t>Layer L1 — prepare the pass, archive the first pass (from 13 Oct) (6/6)</a:t>
             </a:r>
           </a:p>
         </p:txBody>
@@ -23413,81 +24939,21 @@
           <a:bodyPr/>
           <a:lstStyle/>
           <a:p>
-            <a:pPr lvl="0"/>
-            <a:r>
-              <a:rPr b="1"/>
-              <a:t>impactplus.com … partner-agency-cost (2024-06-09):</a:t>
-            </a:r>
-            <a:r>
-              <a:rPr/>
-              <a:t> </a:t>
-            </a:r>
-            <a:r>
-              <a:rPr i="1"/>
-              <a:t>(secondary range, older)</a:t>
-            </a:r>
-          </a:p>
-          <a:p>
-            <a:pPr lvl="0"/>
-            <a:r>
-              <a:rPr b="1"/>
-              <a:t>getmonetizely.com … implementation-partners-price (2025):</a:t>
-            </a:r>
-            <a:r>
-              <a:rPr/>
-              <a:t> </a:t>
-            </a:r>
-            <a:r>
-              <a:rPr i="1"/>
-              <a:t>(secondary range)</a:t>
-            </a:r>
-          </a:p>
-          <a:p>
-            <a:pPr lvl="0"/>
-            <a:r>
-              <a:rPr b="1"/>
-              <a:t>insycle.com/pricing:</a:t>
-            </a:r>
-            <a:r>
-              <a:rPr/>
-              <a:t> </a:t>
-            </a:r>
-            <a:r>
-              <a:rPr i="1"/>
-              <a:t>(vendor list)</a:t>
-            </a:r>
-          </a:p>
-          <a:p>
-            <a:pPr lvl="0"/>
-            <a:r>
-              <a:rPr b="1"/>
-              <a:t>ecosystem.hubspot.com … dedupely:</a:t>
-            </a:r>
-            <a:r>
-              <a:rPr/>
-              <a:t> </a:t>
-            </a:r>
-            <a:r>
-              <a:rPr i="1"/>
-              <a:t>(vendor list, Starter only)</a:t>
-            </a:r>
-          </a:p>
-          <a:p>
-            <a:pPr lvl="0" indent="0" marL="0">
-              <a:buNone/>
-            </a:pPr>
-            <a:r>
-              <a:rPr b="1"/>
-              <a:t>Not priced — to be quoted</a:t>
-            </a:r>
-          </a:p>
-          <a:p>
-            <a:pPr lvl="0" indent="0" marL="0">
-              <a:buNone/>
-            </a:pPr>
-            <a:r>
-              <a:rPr/>
-              <a:t>Data Hub onboarding (no fee shown on the Data Hub pricing page; Sales Hub shows USD 1,500 / 3,500) · the hermes VPS · handover hours · exit costs (StackSync and Data Hub are billed annually, so exposure is the remaining term) · per-record credit consumption · the seat count needed · the portal’s current tier delta</a:t>
+            <a:pPr lvl="0" indent="0" marL="0">
+              <a:buNone/>
+            </a:pPr>
+            <a:r>
+              <a:rPr/>
+              <a:t>5 + 5 tasks on this slide · 22 in the plan · all pending · 0% progress · no owner · no priority · dated 13-Oct-26, one day after this deck: the plan as written before its start, not a measurement of progress</a:t>
+            </a:r>
+          </a:p>
+          <a:p>
+            <a:pPr lvl="0" indent="0" marL="0">
+              <a:buNone/>
+            </a:pPr>
+            <a:r>
+              <a:rPr/>
+              <a:t>Connects to slide 6 (duplicates and orphans, shown with Hs-Logic): across the first 10,000 of ~13.7k companies, 9,150 had zero deal associations, were not tied to any final_customer deal and bore no final_customer name; 226 exact-match duplicate clusters — floors from a capped scan; the plan’s “full Orphan companies” names no denominator.</a:t>
             </a:r>
           </a:p>
         </p:txBody>
@@ -23534,7 +25000,7 @@
             </a:pPr>
             <a:r>
               <a:rPr/>
-              <a:t>Where every price comes from (5/5)</a:t>
+              <a:t>Layer L2 — 16 to 30 November, eight critical tasks (1/5)</a:t>
             </a:r>
           </a:p>
         </p:txBody>
@@ -23558,36 +25024,370 @@
               <a:buNone/>
             </a:pPr>
             <a:r>
-              <a:rPr b="1"/>
-              <a:t>Caveats carried on every price slide</a:t>
+              <a:rPr i="1"/>
+              <a:t>Sequel · Remediation plan, tracker 13-Oct-26 · the user’s chunking: Foundation engine = L1 + L2 · layer L2</a:t>
+            </a:r>
+          </a:p>
+          <a:p>
+            <a:pPr lvl="0" indent="0" marL="0">
+              <a:buNone/>
+            </a:pPr>
+            <a:r>
+              <a:rPr b="1"/>
+              <a:t>Fix the model · 3 of 8 · lines 12–14</a:t>
             </a:r>
           </a:p>
           <a:p>
             <a:pPr lvl="0"/>
             <a:r>
               <a:rPr/>
-              <a:t>List prices, not deltas: the portal’s HubSpot tier and the StackSync plan are recorded nowhere in the repos.</a:t>
+              <a:t>[Ops] Solve the final-customer target: 91.9%; only 1,105 companies have a deal — restates the deck’s live, portal-wide measurement of 1 Oct (12,574 of 13,679 companies without a deal, 91.9%; 1,105 with at least one deal) as the state to solve; the row names no target value; no SEALSQ-only baseline was measured</a:t>
             </a:r>
           </a:p>
           <a:p>
             <a:pPr lvl="0"/>
             <a:r>
               <a:rPr/>
-              <a:t>Partner ranges are US / UK agencies; no Swiss / EUR price list exists in the sources.</a:t>
-            </a:r>
-          </a:p>
+              <a:t>[Ops] Delete all contacts that don’t have a legitimate source (no owner, no recent activities)</a:t>
+            </a:r>
+          </a:p>
+        </p:txBody>
+      </p:sp>
+    </p:spTree>
+  </p:cSld>
+</p:sld>
+</file>
+
+<file path=ppt/slides/slide76.xml><?xml version="1.0" encoding="utf-8"?>
+<p:sld xmlns:a="http://schemas.openxmlformats.org/drawingml/2006/main" xmlns:r="http://schemas.openxmlformats.org/officeDocument/2006/relationships" xmlns:p="http://schemas.openxmlformats.org/presentationml/2006/main">
+  <p:cSld>
+    <p:spTree>
+      <p:nvGrpSpPr>
+        <p:cNvPr id="1" name=""/>
+        <p:cNvGrpSpPr/>
+        <p:nvPr/>
+      </p:nvGrpSpPr>
+      <p:grpSpPr>
+        <a:xfrm>
+          <a:off x="0" y="0"/>
+          <a:ext cx="0" cy="0"/>
+          <a:chOff x="0" y="0"/>
+          <a:chExt cx="0" cy="0"/>
+        </a:xfrm>
+      </p:grpSpPr>
+      <p:sp>
+        <p:nvSpPr>
+          <p:cNvPr id="2" name="Title 1"/>
+          <p:cNvSpPr>
+            <a:spLocks noGrp="1"/>
+          </p:cNvSpPr>
+          <p:nvPr>
+            <p:ph type="title"/>
+          </p:nvPr>
+        </p:nvSpPr>
+        <p:spPr/>
+        <p:txBody>
+          <a:bodyPr/>
+          <a:lstStyle/>
+          <a:p>
+            <a:pPr lvl="0" indent="0" marL="0">
+              <a:buNone/>
+            </a:pPr>
+            <a:r>
+              <a:rPr/>
+              <a:t>Layer L2 — 16 to 30 November, eight critical tasks (2/5)</a:t>
+            </a:r>
+          </a:p>
+        </p:txBody>
+      </p:sp>
+      <p:sp>
+        <p:nvSpPr>
+          <p:cNvPr id="3" name="Content Placeholder 2"/>
+          <p:cNvSpPr>
+            <a:spLocks noGrp="1"/>
+          </p:cNvSpPr>
+          <p:nvPr>
+            <p:ph idx="1"/>
+          </p:nvPr>
+        </p:nvSpPr>
+        <p:spPr/>
+        <p:txBody>
+          <a:bodyPr/>
+          <a:lstStyle/>
           <a:p>
             <a:pPr lvl="0"/>
             <a:r>
               <a:rPr/>
-              <a:t>Two pricing claims were refuted in verification (HubSpot Credits allotments, Koalify tiers) and are not shown.</a:t>
+              <a:t>[Ops] Delete all duplicates with no record attached — goal: “50% of duplicates suppressed” · baseline in the ledger: 226 company and 281 contact exact-match clusters in the first 10,000 records scanned — floors, not totals; the plan counts only duplicates “with no record attached”</a:t>
+            </a:r>
+          </a:p>
+        </p:txBody>
+      </p:sp>
+    </p:spTree>
+  </p:cSld>
+</p:sld>
+</file>
+
+<file path=ppt/slides/slide77.xml><?xml version="1.0" encoding="utf-8"?>
+<p:sld xmlns:a="http://schemas.openxmlformats.org/drawingml/2006/main" xmlns:r="http://schemas.openxmlformats.org/officeDocument/2006/relationships" xmlns:p="http://schemas.openxmlformats.org/presentationml/2006/main">
+  <p:cSld>
+    <p:spTree>
+      <p:nvGrpSpPr>
+        <p:cNvPr id="1" name=""/>
+        <p:cNvGrpSpPr/>
+        <p:nvPr/>
+      </p:nvGrpSpPr>
+      <p:grpSpPr>
+        <a:xfrm>
+          <a:off x="0" y="0"/>
+          <a:ext cx="0" cy="0"/>
+          <a:chOff x="0" y="0"/>
+          <a:chExt cx="0" cy="0"/>
+        </a:xfrm>
+      </p:grpSpPr>
+      <p:sp>
+        <p:nvSpPr>
+          <p:cNvPr id="2" name="Title 1"/>
+          <p:cNvSpPr>
+            <a:spLocks noGrp="1"/>
+          </p:cNvSpPr>
+          <p:nvPr>
+            <p:ph type="title"/>
+          </p:nvPr>
+        </p:nvSpPr>
+        <p:spPr/>
+        <p:txBody>
+          <a:bodyPr/>
+          <a:lstStyle/>
+          <a:p>
+            <a:pPr lvl="0" indent="0" marL="0">
+              <a:buNone/>
+            </a:pPr>
+            <a:r>
+              <a:rPr/>
+              <a:t>Layer L2 — 16 to 30 November, eight critical tasks (3/5)</a:t>
+            </a:r>
+          </a:p>
+        </p:txBody>
+      </p:sp>
+      <p:sp>
+        <p:nvSpPr>
+          <p:cNvPr id="3" name="Content Placeholder 2"/>
+          <p:cNvSpPr>
+            <a:spLocks noGrp="1"/>
+          </p:cNvSpPr>
+          <p:nvPr>
+            <p:ph idx="1"/>
+          </p:nvPr>
+        </p:nvSpPr>
+        <p:spPr/>
+        <p:txBody>
+          <a:bodyPr/>
+          <a:lstStyle/>
+          <a:p>
+            <a:pPr lvl="0" indent="0" marL="0">
+              <a:buNone/>
+            </a:pPr>
+            <a:r>
+              <a:rPr b="1"/>
+              <a:t>Instrument · 2 of 8 · lines 15, 19</a:t>
             </a:r>
           </a:p>
           <a:p>
             <a:pPr lvl="0"/>
             <a:r>
               <a:rPr/>
-              <a:t>Confidence legend: official list · vendor list · partner range · secondary range · order of magnitude · illustrative · tracker words · not priced.</a:t>
+              <a:t>[Ops] Implement reports and quality checks automatically generated via Quarto-BQ (HS-Standalone connector) — by name only: HS-Standalone is the user’s label for Hs-Logic (health check rank 6, simplify); BQ read as BigQuery points at the Bq-dbt pipeline (rank 1, keep), whose code is in none of the three repositories; no file in Hs-Logic or HubSpot-Ruler mentions Quarto (grep 2026-10-12); Bq-dbt’s code cannot be inspected</a:t>
+            </a:r>
+          </a:p>
+          <a:p>
+            <a:pPr lvl="0"/>
+            <a:r>
+              <a:rPr/>
+              <a:t>[Admin] Define a co-owner of quality metrics in the CRM — the row gives one example name in parentheses, not printed here</a:t>
+            </a:r>
+          </a:p>
+          <a:p>
+            <a:pPr lvl="0" indent="0" marL="0">
+              <a:buNone/>
+            </a:pPr>
+            <a:r>
+              <a:rPr/>
+              <a:t>No owner and no priority on any of the 22 rows; the Foundation and L1 rows (lines 2–11) carry a start date, 13-Oct-26, but no duration or end.</a:t>
+            </a:r>
+          </a:p>
+        </p:txBody>
+      </p:sp>
+    </p:spTree>
+  </p:cSld>
+</p:sld>
+</file>
+
+<file path=ppt/slides/slide78.xml><?xml version="1.0" encoding="utf-8"?>
+<p:sld xmlns:a="http://schemas.openxmlformats.org/drawingml/2006/main" xmlns:r="http://schemas.openxmlformats.org/officeDocument/2006/relationships" xmlns:p="http://schemas.openxmlformats.org/presentationml/2006/main">
+  <p:cSld>
+    <p:spTree>
+      <p:nvGrpSpPr>
+        <p:cNvPr id="1" name=""/>
+        <p:cNvGrpSpPr/>
+        <p:nvPr/>
+      </p:nvGrpSpPr>
+      <p:grpSpPr>
+        <a:xfrm>
+          <a:off x="0" y="0"/>
+          <a:ext cx="0" cy="0"/>
+          <a:chOff x="0" y="0"/>
+          <a:chExt cx="0" cy="0"/>
+        </a:xfrm>
+      </p:grpSpPr>
+      <p:sp>
+        <p:nvSpPr>
+          <p:cNvPr id="2" name="Title 1"/>
+          <p:cNvSpPr>
+            <a:spLocks noGrp="1"/>
+          </p:cNvSpPr>
+          <p:nvPr>
+            <p:ph type="title"/>
+          </p:nvPr>
+        </p:nvSpPr>
+        <p:spPr/>
+        <p:txBody>
+          <a:bodyPr/>
+          <a:lstStyle/>
+          <a:p>
+            <a:pPr lvl="0" indent="0" marL="0">
+              <a:buNone/>
+            </a:pPr>
+            <a:r>
+              <a:rPr/>
+              <a:t>Layer L2 — 16 to 30 November, eight critical tasks (4/5)</a:t>
+            </a:r>
+          </a:p>
+        </p:txBody>
+      </p:sp>
+      <p:sp>
+        <p:nvSpPr>
+          <p:cNvPr id="3" name="Content Placeholder 2"/>
+          <p:cNvSpPr>
+            <a:spLocks noGrp="1"/>
+          </p:cNvSpPr>
+          <p:nvPr>
+            <p:ph idx="1"/>
+          </p:nvPr>
+        </p:nvSpPr>
+        <p:spPr/>
+        <p:txBody>
+          <a:bodyPr/>
+          <a:lstStyle/>
+          <a:p>
+            <a:pPr lvl="0" indent="0" marL="0">
+              <a:buNone/>
+            </a:pPr>
+            <a:r>
+              <a:rPr b="1"/>
+              <a:t>Trim the schema · 3 of 8 · lines 16–18</a:t>
+            </a:r>
+          </a:p>
+          <a:p>
+            <a:pPr lvl="0"/>
+            <a:r>
+              <a:rPr/>
+              <a:t>[Data] Reduce friction in form settings for new records</a:t>
+            </a:r>
+          </a:p>
+          <a:p>
+            <a:pPr lvl="0"/>
+            <a:r>
+              <a:rPr/>
+              <a:t>[Data] Add the ‘project type’ property</a:t>
+            </a:r>
+          </a:p>
+          <a:p>
+            <a:pPr lvl="0"/>
+            <a:r>
+              <a:rPr/>
+              <a:t>[Data] Surface/audit the property set based on L1 and remove unfilled properties — goal: “Remove 25% of SEALSQ properties” · baseline: 498 deal / 30 contact / 30 company properties in the SEALSQ-scope set captured 2026-09-14; the portal-wide Data-Toolkit schema holds 565 deal / 40 company / 24 contact property entries · L3 sets 50% (line 23), both rows worded “SEALSQ properties”; the plan does not state whether the 50% is cumulative</a:t>
+            </a:r>
+          </a:p>
+        </p:txBody>
+      </p:sp>
+    </p:spTree>
+  </p:cSld>
+</p:sld>
+</file>
+
+<file path=ppt/slides/slide79.xml><?xml version="1.0" encoding="utf-8"?>
+<p:sld xmlns:a="http://schemas.openxmlformats.org/drawingml/2006/main" xmlns:r="http://schemas.openxmlformats.org/officeDocument/2006/relationships" xmlns:p="http://schemas.openxmlformats.org/presentationml/2006/main">
+  <p:cSld>
+    <p:spTree>
+      <p:nvGrpSpPr>
+        <p:cNvPr id="1" name=""/>
+        <p:cNvGrpSpPr/>
+        <p:nvPr/>
+      </p:nvGrpSpPr>
+      <p:grpSpPr>
+        <a:xfrm>
+          <a:off x="0" y="0"/>
+          <a:ext cx="0" cy="0"/>
+          <a:chOff x="0" y="0"/>
+          <a:chExt cx="0" cy="0"/>
+        </a:xfrm>
+      </p:grpSpPr>
+      <p:sp>
+        <p:nvSpPr>
+          <p:cNvPr id="2" name="Title 1"/>
+          <p:cNvSpPr>
+            <a:spLocks noGrp="1"/>
+          </p:cNvSpPr>
+          <p:nvPr>
+            <p:ph type="title"/>
+          </p:nvPr>
+        </p:nvSpPr>
+        <p:spPr/>
+        <p:txBody>
+          <a:bodyPr/>
+          <a:lstStyle/>
+          <a:p>
+            <a:pPr lvl="0" indent="0" marL="0">
+              <a:buNone/>
+            </a:pPr>
+            <a:r>
+              <a:rPr/>
+              <a:t>Layer L2 — 16 to 30 November, eight critical tasks (5/5)</a:t>
+            </a:r>
+          </a:p>
+        </p:txBody>
+      </p:sp>
+      <p:sp>
+        <p:nvSpPr>
+          <p:cNvPr id="3" name="Content Placeholder 2"/>
+          <p:cNvSpPr>
+            <a:spLocks noGrp="1"/>
+          </p:cNvSpPr>
+          <p:nvPr>
+            <p:ph idx="1"/>
+          </p:nvPr>
+        </p:nvSpPr>
+        <p:spPr/>
+        <p:txBody>
+          <a:bodyPr/>
+          <a:lstStyle/>
+          <a:p>
+            <a:pPr lvl="0" indent="0" marL="0">
+              <a:buNone/>
+            </a:pPr>
+            <a:r>
+              <a:rPr/>
+              <a:t>8 tasks · lines 12–19 · 16 → 30 Nov 2026 · estimated duration 11 — the tracker’s column, no unit; equals the weekday count of the span (15 calendar days) · Critical = yes on all 8 · pending · 0% progress · no owner · no priority</a:t>
+            </a:r>
+          </a:p>
+          <a:p>
+            <a:pPr lvl="0" indent="0" marL="0">
+              <a:buNone/>
+            </a:pPr>
+            <a:r>
+              <a:rPr/>
+              <a:t>Connects to the cardinality trap (slide 7) and the data-modelling gauge (slide 9): the final-customer row is read by this deck as the plan’s answer to a customer typed as a deal string instead of an associated company. Goals and percentages are the plan’s targets as written, not measurements.</a:t>
             </a:r>
           </a:p>
         </p:txBody>
@@ -23714,6 +25514,1268 @@
 </p:sld>
 </file>
 
+<file path=ppt/slides/slide80.xml><?xml version="1.0" encoding="utf-8"?>
+<p:sld xmlns:a="http://schemas.openxmlformats.org/drawingml/2006/main" xmlns:r="http://schemas.openxmlformats.org/officeDocument/2006/relationships" xmlns:p="http://schemas.openxmlformats.org/presentationml/2006/main">
+  <p:cSld>
+    <p:spTree>
+      <p:nvGrpSpPr>
+        <p:cNvPr id="1" name=""/>
+        <p:cNvGrpSpPr/>
+        <p:nvPr/>
+      </p:nvGrpSpPr>
+      <p:grpSpPr>
+        <a:xfrm>
+          <a:off x="0" y="0"/>
+          <a:ext cx="0" cy="0"/>
+          <a:chOff x="0" y="0"/>
+          <a:chExt cx="0" cy="0"/>
+        </a:xfrm>
+      </p:grpSpPr>
+      <p:sp>
+        <p:nvSpPr>
+          <p:cNvPr id="2" name="Title 1"/>
+          <p:cNvSpPr>
+            <a:spLocks noGrp="1"/>
+          </p:cNvSpPr>
+          <p:nvPr>
+            <p:ph type="title"/>
+          </p:nvPr>
+        </p:nvSpPr>
+        <p:spPr/>
+        <p:txBody>
+          <a:bodyPr/>
+          <a:lstStyle/>
+          <a:p>
+            <a:pPr lvl="0" indent="0" marL="0">
+              <a:buNone/>
+            </a:pPr>
+            <a:r>
+              <a:rPr/>
+              <a:t>Layer L3 — 1 to 20 December, four confirmations (1/4)</a:t>
+            </a:r>
+          </a:p>
+        </p:txBody>
+      </p:sp>
+      <p:sp>
+        <p:nvSpPr>
+          <p:cNvPr id="3" name="Content Placeholder 2"/>
+          <p:cNvSpPr>
+            <a:spLocks noGrp="1"/>
+          </p:cNvSpPr>
+          <p:nvPr>
+            <p:ph idx="1"/>
+          </p:nvPr>
+        </p:nvSpPr>
+        <p:spPr/>
+        <p:txBody>
+          <a:bodyPr/>
+          <a:lstStyle/>
+          <a:p>
+            <a:pPr lvl="0" indent="0" marL="0">
+              <a:buNone/>
+            </a:pPr>
+            <a:r>
+              <a:rPr i="1"/>
+              <a:t>Sequel · Remediation plan, tracker 13-Oct-26 · the user’s chunking: engines E2 → E4 = L3</a:t>
+            </a:r>
+          </a:p>
+          <a:p>
+            <a:pPr lvl="0"/>
+            <a:r>
+              <a:rPr b="1"/>
+              <a:t>90%</a:t>
+            </a:r>
+            <a:r>
+              <a:rPr/>
+              <a:t> of SEALSQ companies not orphaned — target as written · baseline, portal-wide 1 Oct: 1,105 of 13,679 companies carry a deal (8.1%, derived from the 91.9% without); Hs-Logic: 9,150 of the first 10,000 by its own definition; the plan’s “orphaned” is undefined; SEALSQ-only not measured</a:t>
+            </a:r>
+          </a:p>
+          <a:p>
+            <a:pPr lvl="0"/>
+            <a:r>
+              <a:rPr b="1"/>
+              <a:t>80%</a:t>
+            </a:r>
+            <a:r>
+              <a:rPr/>
+              <a:t> of SEALSQ contacts with at least email + telephone/LinkedIn — target as written · baseline, first 10,000 contacts, portal-wide: phone missing 53.3%, email missing 1.7%; LinkedIn and the compound not measured</a:t>
+            </a:r>
+          </a:p>
+        </p:txBody>
+      </p:sp>
+    </p:spTree>
+  </p:cSld>
+</p:sld>
+</file>
+
+<file path=ppt/slides/slide81.xml><?xml version="1.0" encoding="utf-8"?>
+<p:sld xmlns:a="http://schemas.openxmlformats.org/drawingml/2006/main" xmlns:r="http://schemas.openxmlformats.org/officeDocument/2006/relationships" xmlns:p="http://schemas.openxmlformats.org/presentationml/2006/main">
+  <p:cSld>
+    <p:spTree>
+      <p:nvGrpSpPr>
+        <p:cNvPr id="1" name=""/>
+        <p:cNvGrpSpPr/>
+        <p:nvPr/>
+      </p:nvGrpSpPr>
+      <p:grpSpPr>
+        <a:xfrm>
+          <a:off x="0" y="0"/>
+          <a:ext cx="0" cy="0"/>
+          <a:chOff x="0" y="0"/>
+          <a:chExt cx="0" cy="0"/>
+        </a:xfrm>
+      </p:grpSpPr>
+      <p:sp>
+        <p:nvSpPr>
+          <p:cNvPr id="2" name="Title 1"/>
+          <p:cNvSpPr>
+            <a:spLocks noGrp="1"/>
+          </p:cNvSpPr>
+          <p:nvPr>
+            <p:ph type="title"/>
+          </p:nvPr>
+        </p:nvSpPr>
+        <p:spPr/>
+        <p:txBody>
+          <a:bodyPr/>
+          <a:lstStyle/>
+          <a:p>
+            <a:pPr lvl="0" indent="0" marL="0">
+              <a:buNone/>
+            </a:pPr>
+            <a:r>
+              <a:rPr/>
+              <a:t>Layer L3 — 1 to 20 December, four confirmations (2/4)</a:t>
+            </a:r>
+          </a:p>
+        </p:txBody>
+      </p:sp>
+      <p:sp>
+        <p:nvSpPr>
+          <p:cNvPr id="3" name="Content Placeholder 2"/>
+          <p:cNvSpPr>
+            <a:spLocks noGrp="1"/>
+          </p:cNvSpPr>
+          <p:nvPr>
+            <p:ph idx="1"/>
+          </p:nvPr>
+        </p:nvSpPr>
+        <p:spPr/>
+        <p:txBody>
+          <a:bodyPr/>
+          <a:lstStyle/>
+          <a:p>
+            <a:pPr lvl="0"/>
+            <a:r>
+              <a:rPr b="1"/>
+              <a:t>all</a:t>
+            </a:r>
+            <a:r>
+              <a:rPr/>
+              <a:t> users trained for CRM best practice in data — target as written · baseline: the 21/09/26 tracker’s training rows at 0%; 5 training/onboarding sessions delivered in 2026 (the review deck does not reconcile sessions with weeks)</a:t>
+            </a:r>
+          </a:p>
+          <a:p>
+            <a:pPr lvl="0"/>
+            <a:r>
+              <a:rPr b="1"/>
+              <a:t>all</a:t>
+            </a:r>
+            <a:r>
+              <a:rPr/>
+              <a:t> deals properly documented and categorised — goal: “Remove 50% of SEALSQ properties” · against 498 deal properties in the SEALSQ-scope set (2026-09-14) and 565 deal property entries in the Data-Toolkit schema; L2 sets 25% first — cumulative or not is not stated</a:t>
+            </a:r>
+          </a:p>
+          <a:p>
+            <a:pPr lvl="0" indent="0" marL="0">
+              <a:buNone/>
+            </a:pPr>
+            <a:r>
+              <a:rPr b="1"/>
+              <a:t>Why E2 → E4 · the user’s mapping, the 21/09/26 legend</a:t>
+            </a:r>
+          </a:p>
+          <a:p>
+            <a:pPr lvl="0" indent="0" marL="0">
+              <a:buNone/>
+            </a:pPr>
+            <a:r>
+              <a:rPr/>
+              <a:t>The user’s rule, two lines: “foundation : L1+L2” · “E2:E4 : L3” — read by this deck as engines E2–E4 ↔ layer L3 (orchestrator reading of the user’s rule).</a:t>
+            </a:r>
+          </a:p>
+        </p:txBody>
+      </p:sp>
+    </p:spTree>
+  </p:cSld>
+</p:sld>
+</file>
+
+<file path=ppt/slides/slide82.xml><?xml version="1.0" encoding="utf-8"?>
+<p:sld xmlns:a="http://schemas.openxmlformats.org/drawingml/2006/main" xmlns:r="http://schemas.openxmlformats.org/officeDocument/2006/relationships" xmlns:p="http://schemas.openxmlformats.org/presentationml/2006/main">
+  <p:cSld>
+    <p:spTree>
+      <p:nvGrpSpPr>
+        <p:cNvPr id="1" name=""/>
+        <p:cNvGrpSpPr/>
+        <p:nvPr/>
+      </p:nvGrpSpPr>
+      <p:grpSpPr>
+        <a:xfrm>
+          <a:off x="0" y="0"/>
+          <a:ext cx="0" cy="0"/>
+          <a:chOff x="0" y="0"/>
+          <a:chExt cx="0" cy="0"/>
+        </a:xfrm>
+      </p:grpSpPr>
+      <p:sp>
+        <p:nvSpPr>
+          <p:cNvPr id="2" name="Title 1"/>
+          <p:cNvSpPr>
+            <a:spLocks noGrp="1"/>
+          </p:cNvSpPr>
+          <p:nvPr>
+            <p:ph type="title"/>
+          </p:nvPr>
+        </p:nvSpPr>
+        <p:spPr/>
+        <p:txBody>
+          <a:bodyPr/>
+          <a:lstStyle/>
+          <a:p>
+            <a:pPr lvl="0" indent="0" marL="0">
+              <a:buNone/>
+            </a:pPr>
+            <a:r>
+              <a:rPr/>
+              <a:t>Layer L3 — 1 to 20 December, four confirmations (3/4)</a:t>
+            </a:r>
+          </a:p>
+        </p:txBody>
+      </p:sp>
+      <p:sp>
+        <p:nvSpPr>
+          <p:cNvPr id="3" name="Content Placeholder 2"/>
+          <p:cNvSpPr>
+            <a:spLocks noGrp="1"/>
+          </p:cNvSpPr>
+          <p:nvPr>
+            <p:ph idx="1"/>
+          </p:nvPr>
+        </p:nvSpPr>
+        <p:spPr/>
+        <p:txBody>
+          <a:bodyPr/>
+          <a:lstStyle/>
+          <a:p>
+            <a:pPr lvl="0" indent="0" marL="0">
+              <a:buNone/>
+            </a:pPr>
+            <a:r>
+              <a:rPr/>
+              <a:t>The legend of the 21/09/26 roadmap: “E2 = After Foundation we start rebuilding a cleaner data structure” · “E3 = After the data we can now leverage the data for GTM and Reporting/RevOps” · “E4 = Self - autonomous AI powered CRM”.</a:t>
+            </a:r>
+          </a:p>
+          <a:p>
+            <a:pPr lvl="0" indent="0" marL="0">
+              <a:buNone/>
+            </a:pPr>
+            <a:r>
+              <a:rPr/>
+              <a:t>Read this way, the four confirmations gate the engines that rebuild (E2), leverage (E3) and automate (E4). The mapping is the user’s; the gating is this deck’s reading.</a:t>
+            </a:r>
+          </a:p>
+          <a:p>
+            <a:pPr lvl="0" indent="0" marL="0">
+              <a:buNone/>
+            </a:pPr>
+            <a:r>
+              <a:rPr b="1"/>
+              <a:t>Baselines in the ledger — none SEALSQ-only</a:t>
+            </a:r>
+          </a:p>
+          <a:p>
+            <a:pPr lvl="0" indent="0" marL="0">
+              <a:buNone/>
+            </a:pPr>
+            <a:r>
+              <a:rPr/>
+              <a:t>Every baseline above is portal-wide or a capped floor: duplicates and orphans from the first 10,000 records scanned, property counts from the 2026-09-14 snapshots, live counts of 1 Oct. Two of the four L3 rows are scoped to SEALSQ (lines 20–21); line 23’s goal names SEALSQ properties; line 22 names no entity — and no SEALSQ-only baseline exists for any of them in any admissible source.</a:t>
+            </a:r>
+          </a:p>
+        </p:txBody>
+      </p:sp>
+    </p:spTree>
+  </p:cSld>
+</p:sld>
+</file>
+
+<file path=ppt/slides/slide83.xml><?xml version="1.0" encoding="utf-8"?>
+<p:sld xmlns:a="http://schemas.openxmlformats.org/drawingml/2006/main" xmlns:r="http://schemas.openxmlformats.org/officeDocument/2006/relationships" xmlns:p="http://schemas.openxmlformats.org/presentationml/2006/main">
+  <p:cSld>
+    <p:spTree>
+      <p:nvGrpSpPr>
+        <p:cNvPr id="1" name=""/>
+        <p:cNvGrpSpPr/>
+        <p:nvPr/>
+      </p:nvGrpSpPr>
+      <p:grpSpPr>
+        <a:xfrm>
+          <a:off x="0" y="0"/>
+          <a:ext cx="0" cy="0"/>
+          <a:chOff x="0" y="0"/>
+          <a:chExt cx="0" cy="0"/>
+        </a:xfrm>
+      </p:grpSpPr>
+      <p:sp>
+        <p:nvSpPr>
+          <p:cNvPr id="2" name="Title 1"/>
+          <p:cNvSpPr>
+            <a:spLocks noGrp="1"/>
+          </p:cNvSpPr>
+          <p:nvPr>
+            <p:ph type="title"/>
+          </p:nvPr>
+        </p:nvSpPr>
+        <p:spPr/>
+        <p:txBody>
+          <a:bodyPr/>
+          <a:lstStyle/>
+          <a:p>
+            <a:pPr lvl="0" indent="0" marL="0">
+              <a:buNone/>
+            </a:pPr>
+            <a:r>
+              <a:rPr/>
+              <a:t>Layer L3 — 1 to 20 December, four confirmations (4/4)</a:t>
+            </a:r>
+          </a:p>
+        </p:txBody>
+      </p:sp>
+      <p:sp>
+        <p:nvSpPr>
+          <p:cNvPr id="3" name="Content Placeholder 2"/>
+          <p:cNvSpPr>
+            <a:spLocks noGrp="1"/>
+          </p:cNvSpPr>
+          <p:nvPr>
+            <p:ph idx="1"/>
+          </p:nvPr>
+        </p:nvSpPr>
+        <p:spPr/>
+        <p:txBody>
+          <a:bodyPr/>
+          <a:lstStyle/>
+          <a:p>
+            <a:pPr lvl="0" indent="0" marL="0">
+              <a:buNone/>
+            </a:pPr>
+            <a:r>
+              <a:rPr/>
+              <a:t>The confirmations are the plan’s targets as written, not measurements: lines 20–23, each with START 01-Dec-26, ESTIMATED DURATION 14, END 20-Dec-26, Critical yes, status pending.</a:t>
+            </a:r>
+          </a:p>
+          <a:p>
+            <a:pPr lvl="0" indent="0" marL="0">
+              <a:buNone/>
+            </a:pPr>
+            <a:r>
+              <a:rPr/>
+              <a:t>Connects to Team B (slide 11), “we are not there yet” — the brief’s own words (Image 4): the L3 confirmations are read by this deck as the plan’s answer to that line.</a:t>
+            </a:r>
+          </a:p>
+          <a:p>
+            <a:pPr lvl="0" indent="0" marL="0">
+              <a:buNone/>
+            </a:pPr>
+            <a:r>
+              <a:rPr/>
+              <a:t>4 tasks · lines 20–23 · 1 → 20 Dec 2026 · estimated duration 14 — the tracker’s column, no unit; equals the weekday count of the span (20 calendar days; END falls on a Sunday) · Critical = yes on all 4 · pending · 0% · no owner</a:t>
+            </a:r>
+          </a:p>
+          <a:p>
+            <a:pPr lvl="0" indent="0" marL="0">
+              <a:buNone/>
+            </a:pPr>
+            <a:r>
+              <a:rPr/>
+              <a:t>The plan is the user’s, as tracked on 13 Oct: 22 tasks, 0% done, no owner named. Still a presentation layer: nothing here is recommended.</a:t>
+            </a:r>
+          </a:p>
+        </p:txBody>
+      </p:sp>
+    </p:spTree>
+  </p:cSld>
+</p:sld>
+</file>
+
+<file path=ppt/slides/slide84.xml><?xml version="1.0" encoding="utf-8"?>
+<p:sld xmlns:a="http://schemas.openxmlformats.org/drawingml/2006/main" xmlns:r="http://schemas.openxmlformats.org/officeDocument/2006/relationships" xmlns:p="http://schemas.openxmlformats.org/presentationml/2006/main">
+  <p:cSld>
+    <p:spTree>
+      <p:nvGrpSpPr>
+        <p:cNvPr id="1" name=""/>
+        <p:cNvGrpSpPr/>
+        <p:nvPr/>
+      </p:nvGrpSpPr>
+      <p:grpSpPr>
+        <a:xfrm>
+          <a:off x="0" y="0"/>
+          <a:ext cx="0" cy="0"/>
+          <a:chOff x="0" y="0"/>
+          <a:chExt cx="0" cy="0"/>
+        </a:xfrm>
+      </p:grpSpPr>
+      <p:sp>
+        <p:nvSpPr>
+          <p:cNvPr id="2" name="Title 1"/>
+          <p:cNvSpPr>
+            <a:spLocks noGrp="1"/>
+          </p:cNvSpPr>
+          <p:nvPr>
+            <p:ph type="title"/>
+          </p:nvPr>
+        </p:nvSpPr>
+        <p:spPr/>
+        <p:txBody>
+          <a:bodyPr/>
+          <a:lstStyle/>
+          <a:p>
+            <a:pPr lvl="0" indent="0" marL="0">
+              <a:buNone/>
+            </a:pPr>
+            <a:r>
+              <a:rPr/>
+              <a:t>Scans are capped, snapshots are dated, HubSQL has traps (1/2)</a:t>
+            </a:r>
+          </a:p>
+        </p:txBody>
+      </p:sp>
+      <p:sp>
+        <p:nvSpPr>
+          <p:cNvPr id="3" name="Content Placeholder 2"/>
+          <p:cNvSpPr>
+            <a:spLocks noGrp="1"/>
+          </p:cNvSpPr>
+          <p:nvPr>
+            <p:ph idx="1"/>
+          </p:nvPr>
+        </p:nvSpPr>
+        <p:spPr/>
+        <p:txBody>
+          <a:bodyPr/>
+          <a:lstStyle/>
+          <a:p>
+            <a:pPr lvl="0" indent="0" marL="0">
+              <a:buNone/>
+            </a:pPr>
+            <a:r>
+              <a:rPr i="1"/>
+              <a:t>Appendix A · Evidence and method</a:t>
+            </a:r>
+          </a:p>
+          <a:p>
+            <a:pPr lvl="0" indent="0" marL="0">
+              <a:buNone/>
+            </a:pPr>
+            <a:r>
+              <a:rPr b="1"/>
+              <a:t>Snapshots and scope</a:t>
+            </a:r>
+          </a:p>
+          <a:p>
+            <a:pPr lvl="0" indent="0" marL="0">
+              <a:buNone/>
+            </a:pPr>
+            <a:r>
+              <a:rPr/>
+              <a:t>SEALSQ property set captured 2026-09-14 by direct HubSpot MCP calls: 1,820 of 1,960 deals in scope (SealSQ HW 728 · Services 303 · Icalps_hardware 788 · SEALCOIN 1); 498 deal / 30 contact / 30 company / 14 ticket properties</a:t>
+            </a:r>
+          </a:p>
+          <a:p>
+            <a:pPr lvl="0" indent="0" marL="0">
+              <a:buNone/>
+            </a:pPr>
+            <a:r>
+              <a:rPr/>
+              <a:t>Object volumes at capture: 25,782 contacts · 13,422 companies · 1,960 deals (denominators of the utilisation columns)</a:t>
+            </a:r>
+          </a:p>
+          <a:p>
+            <a:pPr lvl="0" indent="0" marL="0">
+              <a:buNone/>
+            </a:pPr>
+            <a:r>
+              <a:rPr/>
+              <a:t>Live 2026-10-01: 1,972 deals · 822 of 1,960 deals had no product assigned at capture</a:t>
+            </a:r>
+          </a:p>
+          <a:p>
+            <a:pPr lvl="0" indent="0" marL="0">
+              <a:buNone/>
+            </a:pPr>
+            <a:r>
+              <a:rPr b="1"/>
+              <a:t>Hs-Logic scans</a:t>
+            </a:r>
+          </a:p>
+          <a:p>
+            <a:pPr lvl="0" indent="0" marL="0">
+              <a:buNone/>
+            </a:pPr>
+            <a:r>
+              <a:rPr/>
+              <a:t>CAP = 10,000: companies 73.1% covered, contacts 38.0%, paged in default list order; screenshots undated (2026-09), denominators live 2026-10-01</a:t>
+            </a:r>
+          </a:p>
+        </p:txBody>
+      </p:sp>
+    </p:spTree>
+  </p:cSld>
+</p:sld>
+</file>
+
+<file path=ppt/slides/slide85.xml><?xml version="1.0" encoding="utf-8"?>
+<p:sld xmlns:a="http://schemas.openxmlformats.org/drawingml/2006/main" xmlns:r="http://schemas.openxmlformats.org/officeDocument/2006/relationships" xmlns:p="http://schemas.openxmlformats.org/presentationml/2006/main">
+  <p:cSld>
+    <p:spTree>
+      <p:nvGrpSpPr>
+        <p:cNvPr id="1" name=""/>
+        <p:cNvGrpSpPr/>
+        <p:nvPr/>
+      </p:nvGrpSpPr>
+      <p:grpSpPr>
+        <a:xfrm>
+          <a:off x="0" y="0"/>
+          <a:ext cx="0" cy="0"/>
+          <a:chOff x="0" y="0"/>
+          <a:chExt cx="0" cy="0"/>
+        </a:xfrm>
+      </p:grpSpPr>
+      <p:sp>
+        <p:nvSpPr>
+          <p:cNvPr id="2" name="Title 1"/>
+          <p:cNvSpPr>
+            <a:spLocks noGrp="1"/>
+          </p:cNvSpPr>
+          <p:nvPr>
+            <p:ph type="title"/>
+          </p:nvPr>
+        </p:nvSpPr>
+        <p:spPr/>
+        <p:txBody>
+          <a:bodyPr/>
+          <a:lstStyle/>
+          <a:p>
+            <a:pPr lvl="0" indent="0" marL="0">
+              <a:buNone/>
+            </a:pPr>
+            <a:r>
+              <a:rPr/>
+              <a:t>Scans are capped, snapshots are dated, HubSQL has traps (2/2)</a:t>
+            </a:r>
+          </a:p>
+        </p:txBody>
+      </p:sp>
+      <p:sp>
+        <p:nvSpPr>
+          <p:cNvPr id="3" name="Content Placeholder 2"/>
+          <p:cNvSpPr>
+            <a:spLocks noGrp="1"/>
+          </p:cNvSpPr>
+          <p:nvPr>
+            <p:ph idx="1"/>
+          </p:nvPr>
+        </p:nvSpPr>
+        <p:spPr/>
+        <p:txBody>
+          <a:bodyPr/>
+          <a:lstStyle/>
+          <a:p>
+            <a:pPr lvl="0" indent="0" marL="0">
+              <a:buNone/>
+            </a:pPr>
+            <a:r>
+              <a:rPr/>
+              <a:t>duplicates = exact match on lower-cased, whitespace-collapsed name/domain or email/full name; duplicate_ids truncated to 10 members per cluster (README line 75)</a:t>
+            </a:r>
+          </a:p>
+          <a:p>
+            <a:pPr lvl="0" indent="0" marL="0">
+              <a:buNone/>
+            </a:pPr>
+            <a:r>
+              <a:rPr b="1"/>
+              <a:t>HubSQL probe rules and traps</a:t>
+            </a:r>
+          </a:p>
+          <a:p>
+            <a:pPr lvl="0" indent="0" marL="0">
+              <a:buNone/>
+            </a:pPr>
+            <a:r>
+              <a:rPr/>
+              <a:t>14 cheat-sheet rules: one object per query, no JOIN / UNION / subqueries, max 2 associated object types; dealname matching a flagged last resort; CRM Search API stops at 10,000 results</a:t>
+            </a:r>
+          </a:p>
+          <a:p>
+            <a:pPr lvl="0" indent="0" marL="0">
+              <a:buNone/>
+            </a:pPr>
+            <a:r>
+              <a:rPr/>
+              <a:t>COUNT(hs_object_id) executes as a SUM of ids (18,944,500,703,385 vs 730 with COUNT(*)); association filters silently drop inside GROUP BY → only COUNT(*) results are used</a:t>
+            </a:r>
+          </a:p>
+          <a:p>
+            <a:pPr lvl="0" indent="0" marL="0">
+              <a:buNone/>
+            </a:pPr>
+            <a:r>
+              <a:rPr/>
+              <a:t>Year fields are calculated and evaluate to 0 on 1,972 deals, so IS NOT NULL cannot measure fill · summed over ALL deals: “2027”-labelled 434,773 k$ · 2026 103,895 · 2029 79,647 · 2025 78,512</a:t>
+            </a:r>
+          </a:p>
+        </p:txBody>
+      </p:sp>
+    </p:spTree>
+  </p:cSld>
+</p:sld>
+</file>
+
+<file path=ppt/slides/slide86.xml><?xml version="1.0" encoding="utf-8"?>
+<p:sld xmlns:a="http://schemas.openxmlformats.org/drawingml/2006/main" xmlns:r="http://schemas.openxmlformats.org/officeDocument/2006/relationships" xmlns:p="http://schemas.openxmlformats.org/presentationml/2006/main">
+  <p:cSld>
+    <p:spTree>
+      <p:nvGrpSpPr>
+        <p:cNvPr id="1" name=""/>
+        <p:cNvGrpSpPr/>
+        <p:nvPr/>
+      </p:nvGrpSpPr>
+      <p:grpSpPr>
+        <a:xfrm>
+          <a:off x="0" y="0"/>
+          <a:ext cx="0" cy="0"/>
+          <a:chOff x="0" y="0"/>
+          <a:chExt cx="0" cy="0"/>
+        </a:xfrm>
+      </p:grpSpPr>
+      <p:sp>
+        <p:nvSpPr>
+          <p:cNvPr id="2" name="Title 1"/>
+          <p:cNvSpPr>
+            <a:spLocks noGrp="1"/>
+          </p:cNvSpPr>
+          <p:nvPr>
+            <p:ph type="title"/>
+          </p:nvPr>
+        </p:nvSpPr>
+        <p:spPr/>
+        <p:txBody>
+          <a:bodyPr/>
+          <a:lstStyle/>
+          <a:p>
+            <a:pPr lvl="0" indent="0" marL="0">
+              <a:buNone/>
+            </a:pPr>
+            <a:r>
+              <a:rPr/>
+              <a:t>Where every price comes from (1/5)</a:t>
+            </a:r>
+          </a:p>
+        </p:txBody>
+      </p:sp>
+      <p:sp>
+        <p:nvSpPr>
+          <p:cNvPr id="3" name="Content Placeholder 2"/>
+          <p:cNvSpPr>
+            <a:spLocks noGrp="1"/>
+          </p:cNvSpPr>
+          <p:nvPr>
+            <p:ph idx="1"/>
+          </p:nvPr>
+        </p:nvSpPr>
+        <p:spPr/>
+        <p:txBody>
+          <a:bodyPr/>
+          <a:lstStyle/>
+          <a:p>
+            <a:pPr lvl="0" indent="0" marL="0">
+              <a:buNone/>
+            </a:pPr>
+            <a:r>
+              <a:rPr i="1"/>
+              <a:t>Appendix B · Pricing sources · all fetched 2026-10-01 · USD</a:t>
+            </a:r>
+          </a:p>
+          <a:p>
+            <a:pPr lvl="0" indent="0" marL="0">
+              <a:buNone/>
+            </a:pPr>
+            <a:r>
+              <a:rPr b="1"/>
+              <a:t>Sources and confidence tier</a:t>
+            </a:r>
+          </a:p>
+          <a:p>
+            <a:pPr lvl="0"/>
+            <a:r>
+              <a:rPr b="1"/>
+              <a:t>hubspot.com/pricing/data (Starter · Professional):</a:t>
+            </a:r>
+            <a:r>
+              <a:rPr/>
+              <a:t> </a:t>
+            </a:r>
+            <a:r>
+              <a:rPr i="1"/>
+              <a:t>(official list)</a:t>
+            </a:r>
+          </a:p>
+          <a:p>
+            <a:pPr lvl="0"/>
+            <a:r>
+              <a:rPr b="1"/>
+              <a:t>hubspot.com/pricing/data/enterprise:</a:t>
+            </a:r>
+            <a:r>
+              <a:rPr/>
+              <a:t> </a:t>
+            </a:r>
+            <a:r>
+              <a:rPr i="1"/>
+              <a:t>(official list)</a:t>
+            </a:r>
+          </a:p>
+          <a:p>
+            <a:pPr lvl="0"/>
+            <a:r>
+              <a:rPr b="1"/>
+              <a:t>hubspot.com/pricing/sales (seats, onboarding):</a:t>
+            </a:r>
+            <a:r>
+              <a:rPr/>
+              <a:t> </a:t>
+            </a:r>
+            <a:r>
+              <a:rPr i="1"/>
+              <a:t>(official list)</a:t>
+            </a:r>
+          </a:p>
+          <a:p>
+            <a:pPr lvl="0"/>
+            <a:r>
+              <a:rPr b="1"/>
+              <a:t>knowledge.hubspot.com/account-management/manage-seats:</a:t>
+            </a:r>
+            <a:r>
+              <a:rPr/>
+              <a:t> </a:t>
+            </a:r>
+            <a:r>
+              <a:rPr i="1"/>
+              <a:t>(official docs)</a:t>
+            </a:r>
+          </a:p>
+          <a:p>
+            <a:pPr lvl="0"/>
+            <a:r>
+              <a:rPr b="1"/>
+              <a:t>knowledge.hubspot.com/records/manage-duplicate-records:</a:t>
+            </a:r>
+            <a:r>
+              <a:rPr/>
+              <a:t> </a:t>
+            </a:r>
+            <a:r>
+              <a:rPr i="1"/>
+              <a:t>(official docs)</a:t>
+            </a:r>
+          </a:p>
+          <a:p>
+            <a:pPr lvl="0"/>
+            <a:r>
+              <a:rPr b="1"/>
+              <a:t>knowledge.hubspot.com/reports/data-quality-command-center:</a:t>
+            </a:r>
+            <a:r>
+              <a:rPr/>
+              <a:t> </a:t>
+            </a:r>
+            <a:r>
+              <a:rPr i="1"/>
+              <a:t>(official docs)</a:t>
+            </a:r>
+          </a:p>
+        </p:txBody>
+      </p:sp>
+    </p:spTree>
+  </p:cSld>
+</p:sld>
+</file>
+
+<file path=ppt/slides/slide87.xml><?xml version="1.0" encoding="utf-8"?>
+<p:sld xmlns:a="http://schemas.openxmlformats.org/drawingml/2006/main" xmlns:r="http://schemas.openxmlformats.org/officeDocument/2006/relationships" xmlns:p="http://schemas.openxmlformats.org/presentationml/2006/main">
+  <p:cSld>
+    <p:spTree>
+      <p:nvGrpSpPr>
+        <p:cNvPr id="1" name=""/>
+        <p:cNvGrpSpPr/>
+        <p:nvPr/>
+      </p:nvGrpSpPr>
+      <p:grpSpPr>
+        <a:xfrm>
+          <a:off x="0" y="0"/>
+          <a:ext cx="0" cy="0"/>
+          <a:chOff x="0" y="0"/>
+          <a:chExt cx="0" cy="0"/>
+        </a:xfrm>
+      </p:grpSpPr>
+      <p:sp>
+        <p:nvSpPr>
+          <p:cNvPr id="2" name="Title 1"/>
+          <p:cNvSpPr>
+            <a:spLocks noGrp="1"/>
+          </p:cNvSpPr>
+          <p:nvPr>
+            <p:ph type="title"/>
+          </p:nvPr>
+        </p:nvSpPr>
+        <p:spPr/>
+        <p:txBody>
+          <a:bodyPr/>
+          <a:lstStyle/>
+          <a:p>
+            <a:pPr lvl="0" indent="0" marL="0">
+              <a:buNone/>
+            </a:pPr>
+            <a:r>
+              <a:rPr/>
+              <a:t>Where every price comes from (2/5)</a:t>
+            </a:r>
+          </a:p>
+        </p:txBody>
+      </p:sp>
+      <p:sp>
+        <p:nvSpPr>
+          <p:cNvPr id="3" name="Content Placeholder 2"/>
+          <p:cNvSpPr>
+            <a:spLocks noGrp="1"/>
+          </p:cNvSpPr>
+          <p:nvPr>
+            <p:ph idx="1"/>
+          </p:nvPr>
+        </p:nvSpPr>
+        <p:spPr/>
+        <p:txBody>
+          <a:bodyPr/>
+          <a:lstStyle/>
+          <a:p>
+            <a:pPr lvl="0"/>
+            <a:r>
+              <a:rPr b="1"/>
+              <a:t>developers.hubspot.com/docs/guides/apps/private-apps/overview:</a:t>
+            </a:r>
+            <a:r>
+              <a:rPr/>
+              <a:t> </a:t>
+            </a:r>
+            <a:r>
+              <a:rPr i="1"/>
+              <a:t>(official docs)</a:t>
+            </a:r>
+          </a:p>
+          <a:p>
+            <a:pPr lvl="0"/>
+            <a:r>
+              <a:rPr b="1"/>
+              <a:t>hubspot.com/solutions-partners-tiers-and-benefits-2026:</a:t>
+            </a:r>
+            <a:r>
+              <a:rPr/>
+              <a:t> </a:t>
+            </a:r>
+            <a:r>
+              <a:rPr i="1"/>
+              <a:t>(official (thresholds dated))</a:t>
+            </a:r>
+          </a:p>
+          <a:p>
+            <a:pPr lvl="0"/>
+            <a:r>
+              <a:rPr b="1"/>
+              <a:t>stacksync.com/pricing:</a:t>
+            </a:r>
+            <a:r>
+              <a:rPr/>
+              <a:t> </a:t>
+            </a:r>
+            <a:r>
+              <a:rPr i="1"/>
+              <a:t>(vendor list)</a:t>
+            </a:r>
+          </a:p>
+          <a:p>
+            <a:pPr lvl="0"/>
+            <a:r>
+              <a:rPr b="1"/>
+              <a:t>cloud.google.com/bigquery/pricing:</a:t>
+            </a:r>
+            <a:r>
+              <a:rPr/>
+              <a:t> </a:t>
+            </a:r>
+            <a:r>
+              <a:rPr i="1"/>
+              <a:t>(official list)</a:t>
+            </a:r>
+          </a:p>
+          <a:p>
+            <a:pPr lvl="0"/>
+            <a:r>
+              <a:rPr b="1"/>
+              <a:t>cloud.google.com/run/pricing:</a:t>
+            </a:r>
+            <a:r>
+              <a:rPr/>
+              <a:t> </a:t>
+            </a:r>
+            <a:r>
+              <a:rPr i="1"/>
+              <a:t>(official list)</a:t>
+            </a:r>
+          </a:p>
+          <a:p>
+            <a:pPr lvl="0"/>
+            <a:r>
+              <a:rPr b="1"/>
+              <a:t>cloud.google.com/free + gcloud-compute.com (mirror, 2026-09-27):</a:t>
+            </a:r>
+            <a:r>
+              <a:rPr/>
+              <a:t> </a:t>
+            </a:r>
+            <a:r>
+              <a:rPr i="1"/>
+              <a:t>(official / order of magnitude)</a:t>
+            </a:r>
+          </a:p>
+        </p:txBody>
+      </p:sp>
+    </p:spTree>
+  </p:cSld>
+</p:sld>
+</file>
+
+<file path=ppt/slides/slide88.xml><?xml version="1.0" encoding="utf-8"?>
+<p:sld xmlns:a="http://schemas.openxmlformats.org/drawingml/2006/main" xmlns:r="http://schemas.openxmlformats.org/officeDocument/2006/relationships" xmlns:p="http://schemas.openxmlformats.org/presentationml/2006/main">
+  <p:cSld>
+    <p:spTree>
+      <p:nvGrpSpPr>
+        <p:cNvPr id="1" name=""/>
+        <p:cNvGrpSpPr/>
+        <p:nvPr/>
+      </p:nvGrpSpPr>
+      <p:grpSpPr>
+        <a:xfrm>
+          <a:off x="0" y="0"/>
+          <a:ext cx="0" cy="0"/>
+          <a:chOff x="0" y="0"/>
+          <a:chExt cx="0" cy="0"/>
+        </a:xfrm>
+      </p:grpSpPr>
+      <p:sp>
+        <p:nvSpPr>
+          <p:cNvPr id="2" name="Title 1"/>
+          <p:cNvSpPr>
+            <a:spLocks noGrp="1"/>
+          </p:cNvSpPr>
+          <p:nvPr>
+            <p:ph type="title"/>
+          </p:nvPr>
+        </p:nvSpPr>
+        <p:spPr/>
+        <p:txBody>
+          <a:bodyPr/>
+          <a:lstStyle/>
+          <a:p>
+            <a:pPr lvl="0" indent="0" marL="0">
+              <a:buNone/>
+            </a:pPr>
+            <a:r>
+              <a:rPr/>
+              <a:t>Where every price comes from (3/5)</a:t>
+            </a:r>
+          </a:p>
+        </p:txBody>
+      </p:sp>
+      <p:sp>
+        <p:nvSpPr>
+          <p:cNvPr id="3" name="Content Placeholder 2"/>
+          <p:cNvSpPr>
+            <a:spLocks noGrp="1"/>
+          </p:cNvSpPr>
+          <p:nvPr>
+            <p:ph idx="1"/>
+          </p:nvPr>
+        </p:nvSpPr>
+        <p:spPr/>
+        <p:txBody>
+          <a:bodyPr/>
+          <a:lstStyle/>
+          <a:p>
+            <a:pPr lvl="0"/>
+            <a:r>
+              <a:rPr b="1"/>
+              <a:t>github.com/dbt-labs/dbt-core · getdbt.com/pricing:</a:t>
+            </a:r>
+            <a:r>
+              <a:rPr/>
+              <a:t> </a:t>
+            </a:r>
+            <a:r>
+              <a:rPr i="1"/>
+              <a:t>(official)</a:t>
+            </a:r>
+          </a:p>
+          <a:p>
+            <a:pPr lvl="0"/>
+            <a:r>
+              <a:rPr b="1"/>
+              <a:t>oban.pro/pricing:</a:t>
+            </a:r>
+            <a:r>
+              <a:rPr/>
+              <a:t> </a:t>
+            </a:r>
+            <a:r>
+              <a:rPr i="1"/>
+              <a:t>(vendor list)</a:t>
+            </a:r>
+          </a:p>
+          <a:p>
+            <a:pPr lvl="0"/>
+            <a:r>
+              <a:rPr b="1"/>
+              <a:t>platform.claude.com/docs/en/about-claude/pricing:</a:t>
+            </a:r>
+            <a:r>
+              <a:rPr/>
+              <a:t> </a:t>
+            </a:r>
+            <a:r>
+              <a:rPr i="1"/>
+              <a:t>(official list)</a:t>
+            </a:r>
+          </a:p>
+          <a:p>
+            <a:pPr lvl="0"/>
+            <a:r>
+              <a:rPr b="1"/>
+              <a:t>insidea.com/hubspot/managed-operations:</a:t>
+            </a:r>
+            <a:r>
+              <a:rPr/>
+              <a:t> </a:t>
+            </a:r>
+            <a:r>
+              <a:rPr i="1"/>
+              <a:t>(partner range)</a:t>
+            </a:r>
+          </a:p>
+          <a:p>
+            <a:pPr lvl="0"/>
+            <a:r>
+              <a:rPr b="1"/>
+              <a:t>hivestrategy.com/pricing:</a:t>
+            </a:r>
+            <a:r>
+              <a:rPr/>
+              <a:t> </a:t>
+            </a:r>
+            <a:r>
+              <a:rPr i="1"/>
+              <a:t>(partner range)</a:t>
+            </a:r>
+          </a:p>
+          <a:p>
+            <a:pPr lvl="0"/>
+            <a:r>
+              <a:rPr b="1"/>
+              <a:t>leanlabs.com/pricing.md:</a:t>
+            </a:r>
+            <a:r>
+              <a:rPr/>
+              <a:t> </a:t>
+            </a:r>
+            <a:r>
+              <a:rPr i="1"/>
+              <a:t>(partner range)</a:t>
+            </a:r>
+          </a:p>
+          <a:p>
+            <a:pPr lvl="0"/>
+            <a:r>
+              <a:rPr b="1"/>
+              <a:t>portalpilot.io/blog/hubspot-audit-cost (2026-01-30):</a:t>
+            </a:r>
+            <a:r>
+              <a:rPr/>
+              <a:t> </a:t>
+            </a:r>
+            <a:r>
+              <a:rPr i="1"/>
+              <a:t>(secondary range)</a:t>
+            </a:r>
+          </a:p>
+        </p:txBody>
+      </p:sp>
+    </p:spTree>
+  </p:cSld>
+</p:sld>
+</file>
+
+<file path=ppt/slides/slide89.xml><?xml version="1.0" encoding="utf-8"?>
+<p:sld xmlns:a="http://schemas.openxmlformats.org/drawingml/2006/main" xmlns:r="http://schemas.openxmlformats.org/officeDocument/2006/relationships" xmlns:p="http://schemas.openxmlformats.org/presentationml/2006/main">
+  <p:cSld>
+    <p:spTree>
+      <p:nvGrpSpPr>
+        <p:cNvPr id="1" name=""/>
+        <p:cNvGrpSpPr/>
+        <p:nvPr/>
+      </p:nvGrpSpPr>
+      <p:grpSpPr>
+        <a:xfrm>
+          <a:off x="0" y="0"/>
+          <a:ext cx="0" cy="0"/>
+          <a:chOff x="0" y="0"/>
+          <a:chExt cx="0" cy="0"/>
+        </a:xfrm>
+      </p:grpSpPr>
+      <p:sp>
+        <p:nvSpPr>
+          <p:cNvPr id="2" name="Title 1"/>
+          <p:cNvSpPr>
+            <a:spLocks noGrp="1"/>
+          </p:cNvSpPr>
+          <p:nvPr>
+            <p:ph type="title"/>
+          </p:nvPr>
+        </p:nvSpPr>
+        <p:spPr/>
+        <p:txBody>
+          <a:bodyPr/>
+          <a:lstStyle/>
+          <a:p>
+            <a:pPr lvl="0" indent="0" marL="0">
+              <a:buNone/>
+            </a:pPr>
+            <a:r>
+              <a:rPr/>
+              <a:t>Where every price comes from (4/5)</a:t>
+            </a:r>
+          </a:p>
+        </p:txBody>
+      </p:sp>
+      <p:sp>
+        <p:nvSpPr>
+          <p:cNvPr id="3" name="Content Placeholder 2"/>
+          <p:cNvSpPr>
+            <a:spLocks noGrp="1"/>
+          </p:cNvSpPr>
+          <p:nvPr>
+            <p:ph idx="1"/>
+          </p:nvPr>
+        </p:nvSpPr>
+        <p:spPr/>
+        <p:txBody>
+          <a:bodyPr/>
+          <a:lstStyle/>
+          <a:p>
+            <a:pPr lvl="0"/>
+            <a:r>
+              <a:rPr b="1"/>
+              <a:t>impactplus.com … partner-agency-cost (2024-06-09):</a:t>
+            </a:r>
+            <a:r>
+              <a:rPr/>
+              <a:t> </a:t>
+            </a:r>
+            <a:r>
+              <a:rPr i="1"/>
+              <a:t>(secondary range, older)</a:t>
+            </a:r>
+          </a:p>
+          <a:p>
+            <a:pPr lvl="0"/>
+            <a:r>
+              <a:rPr b="1"/>
+              <a:t>getmonetizely.com … implementation-partners-price (2025):</a:t>
+            </a:r>
+            <a:r>
+              <a:rPr/>
+              <a:t> </a:t>
+            </a:r>
+            <a:r>
+              <a:rPr i="1"/>
+              <a:t>(secondary range)</a:t>
+            </a:r>
+          </a:p>
+          <a:p>
+            <a:pPr lvl="0"/>
+            <a:r>
+              <a:rPr b="1"/>
+              <a:t>insycle.com/pricing:</a:t>
+            </a:r>
+            <a:r>
+              <a:rPr/>
+              <a:t> </a:t>
+            </a:r>
+            <a:r>
+              <a:rPr i="1"/>
+              <a:t>(vendor list)</a:t>
+            </a:r>
+          </a:p>
+          <a:p>
+            <a:pPr lvl="0"/>
+            <a:r>
+              <a:rPr b="1"/>
+              <a:t>ecosystem.hubspot.com … dedupely:</a:t>
+            </a:r>
+            <a:r>
+              <a:rPr/>
+              <a:t> </a:t>
+            </a:r>
+            <a:r>
+              <a:rPr i="1"/>
+              <a:t>(vendor list, Starter only)</a:t>
+            </a:r>
+          </a:p>
+          <a:p>
+            <a:pPr lvl="0" indent="0" marL="0">
+              <a:buNone/>
+            </a:pPr>
+            <a:r>
+              <a:rPr b="1"/>
+              <a:t>Not priced — to be quoted</a:t>
+            </a:r>
+          </a:p>
+          <a:p>
+            <a:pPr lvl="0" indent="0" marL="0">
+              <a:buNone/>
+            </a:pPr>
+            <a:r>
+              <a:rPr/>
+              <a:t>Data Hub onboarding (no fee shown on the Data Hub pricing page; Sales Hub shows USD 1,500 / 3,500) · the hermes VPS · handover hours · exit costs (StackSync and Data Hub are billed annually, so exposure is the remaining term) · per-record credit consumption · the seat count needed · the portal’s current tier delta</a:t>
+            </a:r>
+          </a:p>
+        </p:txBody>
+      </p:sp>
+    </p:spTree>
+  </p:cSld>
+</p:sld>
+</file>
+
 <file path=ppt/slides/slide9.xml><?xml version="1.0" encoding="utf-8"?>
 <p:sld xmlns:a="http://schemas.openxmlformats.org/drawingml/2006/main" xmlns:r="http://schemas.openxmlformats.org/officeDocument/2006/relationships" xmlns:p="http://schemas.openxmlformats.org/presentationml/2006/main">
   <p:cSld>
@@ -23835,6 +26897,106 @@
             <a:r>
               <a:rPr/>
               <a:t>Migrate local codebase and backups — 6</a:t>
+            </a:r>
+          </a:p>
+        </p:txBody>
+      </p:sp>
+    </p:spTree>
+  </p:cSld>
+</p:sld>
+</file>
+
+<file path=ppt/slides/slide90.xml><?xml version="1.0" encoding="utf-8"?>
+<p:sld xmlns:a="http://schemas.openxmlformats.org/drawingml/2006/main" xmlns:r="http://schemas.openxmlformats.org/officeDocument/2006/relationships" xmlns:p="http://schemas.openxmlformats.org/presentationml/2006/main">
+  <p:cSld>
+    <p:spTree>
+      <p:nvGrpSpPr>
+        <p:cNvPr id="1" name=""/>
+        <p:cNvGrpSpPr/>
+        <p:nvPr/>
+      </p:nvGrpSpPr>
+      <p:grpSpPr>
+        <a:xfrm>
+          <a:off x="0" y="0"/>
+          <a:ext cx="0" cy="0"/>
+          <a:chOff x="0" y="0"/>
+          <a:chExt cx="0" cy="0"/>
+        </a:xfrm>
+      </p:grpSpPr>
+      <p:sp>
+        <p:nvSpPr>
+          <p:cNvPr id="2" name="Title 1"/>
+          <p:cNvSpPr>
+            <a:spLocks noGrp="1"/>
+          </p:cNvSpPr>
+          <p:nvPr>
+            <p:ph type="title"/>
+          </p:nvPr>
+        </p:nvSpPr>
+        <p:spPr/>
+        <p:txBody>
+          <a:bodyPr/>
+          <a:lstStyle/>
+          <a:p>
+            <a:pPr lvl="0" indent="0" marL="0">
+              <a:buNone/>
+            </a:pPr>
+            <a:r>
+              <a:rPr/>
+              <a:t>Where every price comes from (5/5)</a:t>
+            </a:r>
+          </a:p>
+        </p:txBody>
+      </p:sp>
+      <p:sp>
+        <p:nvSpPr>
+          <p:cNvPr id="3" name="Content Placeholder 2"/>
+          <p:cNvSpPr>
+            <a:spLocks noGrp="1"/>
+          </p:cNvSpPr>
+          <p:nvPr>
+            <p:ph idx="1"/>
+          </p:nvPr>
+        </p:nvSpPr>
+        <p:spPr/>
+        <p:txBody>
+          <a:bodyPr/>
+          <a:lstStyle/>
+          <a:p>
+            <a:pPr lvl="0" indent="0" marL="0">
+              <a:buNone/>
+            </a:pPr>
+            <a:r>
+              <a:rPr b="1"/>
+              <a:t>Caveats carried on every price slide</a:t>
+            </a:r>
+          </a:p>
+          <a:p>
+            <a:pPr lvl="0"/>
+            <a:r>
+              <a:rPr/>
+              <a:t>List prices, not deltas: the portal’s HubSpot tier and the StackSync plan are recorded nowhere in the repos.</a:t>
+            </a:r>
+          </a:p>
+          <a:p>
+            <a:pPr lvl="0"/>
+            <a:r>
+              <a:rPr/>
+              <a:t>Partner ranges are US / UK agencies; no Swiss / EUR price list exists in the sources.</a:t>
+            </a:r>
+          </a:p>
+          <a:p>
+            <a:pPr lvl="0"/>
+            <a:r>
+              <a:rPr/>
+              <a:t>Two pricing claims were refuted in verification (HubSpot Credits allotments, Koalify tiers) and are not shown.</a:t>
+            </a:r>
+          </a:p>
+          <a:p>
+            <a:pPr lvl="0"/>
+            <a:r>
+              <a:rPr/>
+              <a:t>Confidence legend: official list · vendor list · partner range · secondary range · order of magnitude · illustrative · tracker words · not priced.</a:t>
             </a:r>
           </a:p>
         </p:txBody>
